--- a/deck/capstone_defense.pptx
+++ b/deck/capstone_defense.pptx
@@ -3189,8 +3189,8 @@
         </p:nvSpPr>
         <p:spPr>
           <a:xfrm>
-            <a:off x="868680" y="2395728"/>
-            <a:ext cx="10698480" cy="2011680"/>
+            <a:off x="868680" y="2212848"/>
+            <a:ext cx="10698480" cy="2194560"/>
           </a:xfrm>
           <a:prstGeom prst="rect">
             <a:avLst/>
@@ -3215,13 +3215,13 @@
               </a:spcAft>
             </a:pPr>
             <a:r>
-              <a:rPr sz="2900" b="1">
+              <a:rPr sz="3300" b="1">
                 <a:solidFill>
                   <a:srgbClr val="FFFFFF"/>
                 </a:solidFill>
                 <a:latin typeface="Georgia"/>
               </a:rPr>
-              <a:t>Does Spatial Correlation of Carbon Intensity</a:t>
+              <a:t>The Price of Sophistication</a:t>
             </a:r>
           </a:p>
           <a:p>
@@ -3237,13 +3237,35 @@
               </a:spcAft>
             </a:pPr>
             <a:r>
-              <a:rPr sz="2900" b="1">
+              <a:rPr sz="2500" b="1">
                 <a:solidFill>
                   <a:srgbClr val="FFFFFF"/>
                 </a:solidFill>
                 <a:latin typeface="Georgia"/>
               </a:rPr>
-              <a:t>Improve Robust Carbon-Aware Data-Center Scheduling?</a:t>
+              <a:t>When Do Spatial and Robust Models Pay in</a:t>
+            </a:r>
+          </a:p>
+          <a:p>
+            <a:pPr algn="l">
+              <a:lnSpc>
+                <a:spcPct val="104000"/>
+              </a:lnSpc>
+              <a:spcBef>
+                <a:spcPts val="0"/>
+              </a:spcBef>
+              <a:spcAft>
+                <a:spcPts val="800"/>
+              </a:spcAft>
+            </a:pPr>
+            <a:r>
+              <a:rPr sz="2500" b="1">
+                <a:solidFill>
+                  <a:srgbClr val="FFFFFF"/>
+                </a:solidFill>
+                <a:latin typeface="Georgia"/>
+              </a:rPr>
+              <a:t>Carbon-Aware Data-Center Scheduling?</a:t>
             </a:r>
           </a:p>
         </p:txBody>
@@ -3256,7 +3278,7 @@
         </p:nvSpPr>
         <p:spPr>
           <a:xfrm>
-            <a:off x="914400" y="4370832"/>
+            <a:off x="914400" y="4498848"/>
             <a:ext cx="2926080" cy="45720"/>
           </a:xfrm>
           <a:prstGeom prst="rect">
@@ -3300,7 +3322,7 @@
         </p:nvSpPr>
         <p:spPr>
           <a:xfrm>
-            <a:off x="868680" y="4553712"/>
+            <a:off x="868680" y="4681728"/>
             <a:ext cx="10424160" cy="731520"/>
           </a:xfrm>
           <a:prstGeom prst="rect">
@@ -3332,7 +3354,7 @@
                 </a:solidFill>
                 <a:latin typeface="Segoe UI"/>
               </a:rPr>
-              <a:t>A multi-grid falsification study: a causal mechanism, a copula test, and an active-transfer extension</a:t>
+              <a:t>A working day-ahead migration scheduler, and a decision rule for when each modelling layer earns its complexity</a:t>
             </a:r>
           </a:p>
         </p:txBody>
@@ -3656,7 +3678,7 @@
                 </a:solidFill>
                 <a:latin typeface="Georgia"/>
               </a:rPr>
-              <a:t>RQ2: a replicated null</a:t>
+              <a:t>The price-of-robustness crossover</a:t>
             </a:r>
           </a:p>
         </p:txBody>
@@ -3745,7 +3767,7 @@
                 </a:solidFill>
                 <a:latin typeface="Segoe UI"/>
               </a:rPr>
-              <a:t>Spatial correlation &amp; carbon-aware DRO scheduling</a:t>
+              <a:t>The Price of Sophistication: carbon-aware data-center scheduling</a:t>
             </a:r>
           </a:p>
         </p:txBody>
@@ -3797,7 +3819,7 @@
       </p:sp>
       <p:pic>
         <p:nvPicPr>
-          <p:cNvPr id="10" name="Picture 9" descr="finding.png"/>
+          <p:cNvPr id="10" name="Picture 9" descr="crossover.png"/>
           <p:cNvPicPr>
             <a:picLocks noChangeAspect="1"/>
           </p:cNvPicPr>
@@ -3811,8 +3833,8 @@
         </p:blipFill>
         <p:spPr>
           <a:xfrm>
-            <a:off x="640080" y="1371600"/>
-            <a:ext cx="9381476" cy="3383280"/>
+            <a:off x="640080" y="1417320"/>
+            <a:ext cx="6949440" cy="4301587"/>
           </a:xfrm>
           <a:prstGeom prst="rect">
             <a:avLst/>
@@ -3821,58 +3843,14 @@
       </p:pic>
       <p:sp>
         <p:nvSpPr>
-          <p:cNvPr id="11" name="Rectangle 10"/>
-          <p:cNvSpPr/>
-          <p:nvPr/>
-        </p:nvSpPr>
-        <p:spPr>
-          <a:xfrm>
-            <a:off x="640080" y="4983480"/>
-            <a:ext cx="10881360" cy="1143000"/>
-          </a:xfrm>
-          <a:prstGeom prst="rect">
-            <a:avLst/>
-          </a:prstGeom>
-          <a:solidFill>
-            <a:srgbClr val="0E2A52"/>
-          </a:solidFill>
-          <a:ln>
-            <a:noFill/>
-          </a:ln>
-          <a:effectLst/>
-        </p:spPr>
-        <p:style>
-          <a:lnRef idx="1">
-            <a:schemeClr val="accent1"/>
-          </a:lnRef>
-          <a:fillRef idx="3">
-            <a:schemeClr val="accent1"/>
-          </a:fillRef>
-          <a:effectRef idx="2">
-            <a:schemeClr val="accent1"/>
-          </a:effectRef>
-          <a:fontRef idx="minor">
-            <a:schemeClr val="lt1"/>
-          </a:fontRef>
-        </p:style>
-        <p:txBody>
-          <a:bodyPr rtlCol="0" anchor="ctr"/>
-          <a:lstStyle/>
-          <a:p>
-            <a:pPr algn="ctr"/>
-          </a:p>
-        </p:txBody>
-      </p:sp>
-      <p:sp>
-        <p:nvSpPr>
-          <p:cNvPr id="12" name="TextBox 11"/>
+          <p:cNvPr id="11" name="TextBox 10"/>
           <p:cNvSpPr txBox="1"/>
           <p:nvPr/>
         </p:nvSpPr>
         <p:spPr>
           <a:xfrm>
-            <a:off x="914400" y="5029200"/>
-            <a:ext cx="10332720" cy="1051560"/>
+            <a:off x="7772400" y="1554480"/>
+            <a:ext cx="3840480" cy="4389120"/>
           </a:xfrm>
           <a:prstGeom prst="rect">
             <a:avLst/>
@@ -3880,30 +3858,151 @@
           <a:noFill/>
         </p:spPr>
         <p:txBody>
-          <a:bodyPr wrap="square" anchor="ctr" lIns="0" rIns="0" tIns="0" bIns="0">
+          <a:bodyPr wrap="square" lIns="0" rIns="0" tIns="0" bIns="0">
             <a:spAutoFit/>
           </a:bodyPr>
           <a:lstStyle/>
           <a:p>
-            <a:pPr algn="l">
-              <a:lnSpc>
-                <a:spcPct val="106000"/>
-              </a:lnSpc>
-              <a:spcBef>
-                <a:spcPts val="0"/>
-              </a:spcBef>
-              <a:spcAft>
-                <a:spcPts val="600"/>
+            <a:pPr>
+              <a:lnSpc>
+                <a:spcPct val="112000"/>
+              </a:lnSpc>
+              <a:spcAft>
+                <a:spcPts val="1500"/>
               </a:spcAft>
             </a:pPr>
             <a:r>
               <a:rPr sz="2000" b="1">
                 <a:solidFill>
-                  <a:srgbClr val="FFFFFF"/>
-                </a:solidFill>
-                <a:latin typeface="Georgia"/>
-              </a:rPr>
-              <a:t>The spatial gap never exceeds a few tenths of one percent. Joint and shuffled schedules coincide out of sample, on every grid.</a:t>
+                  <a:srgbClr val="0E2A52"/>
+                </a:solidFill>
+                <a:latin typeface="Segoe UI"/>
+              </a:rPr>
+              <a:t>M* near 3, real grids stay below</a:t>
+            </a:r>
+          </a:p>
+          <a:p>
+            <a:pPr>
+              <a:lnSpc>
+                <a:spcPct val="112000"/>
+              </a:lnSpc>
+              <a:spcBef>
+                <a:spcPts val="0"/>
+              </a:spcBef>
+              <a:spcAft>
+                <a:spcPts val="1300"/>
+              </a:spcAft>
+            </a:pPr>
+            <a:r>
+              <a:rPr sz="1300" b="1">
+                <a:solidFill>
+                  <a:srgbClr val="E69F00"/>
+                </a:solidFill>
+                <a:latin typeface="Segoe UI"/>
+              </a:rPr>
+              <a:t>●  </a:t>
+            </a:r>
+            <a:r>
+              <a:rPr sz="1700" b="0">
+                <a:solidFill>
+                  <a:srgbClr val="16202E"/>
+                </a:solidFill>
+                <a:latin typeface="Segoe UI"/>
+              </a:rPr>
+              <a:t>Robust beats risk-neutral only past an emergency severity M* near 3.</a:t>
+            </a:r>
+          </a:p>
+          <a:p>
+            <a:pPr>
+              <a:lnSpc>
+                <a:spcPct val="112000"/>
+              </a:lnSpc>
+              <a:spcBef>
+                <a:spcPts val="0"/>
+              </a:spcBef>
+              <a:spcAft>
+                <a:spcPts val="1300"/>
+              </a:spcAft>
+            </a:pPr>
+            <a:r>
+              <a:rPr sz="1300" b="1">
+                <a:solidFill>
+                  <a:srgbClr val="E69F00"/>
+                </a:solidFill>
+                <a:latin typeface="Segoe UI"/>
+              </a:rPr>
+              <a:t>●  </a:t>
+            </a:r>
+            <a:r>
+              <a:rPr sz="1700" b="1">
+                <a:solidFill>
+                  <a:srgbClr val="B3402F"/>
+                </a:solidFill>
+                <a:latin typeface="Segoe UI"/>
+              </a:rPr>
+              <a:t>Real grids, tested across 17 zones, peak at only M near 1.4.</a:t>
+            </a:r>
+          </a:p>
+          <a:p>
+            <a:pPr>
+              <a:lnSpc>
+                <a:spcPct val="112000"/>
+              </a:lnSpc>
+              <a:spcBef>
+                <a:spcPts val="0"/>
+              </a:spcBef>
+              <a:spcAft>
+                <a:spcPts val="1300"/>
+              </a:spcAft>
+            </a:pPr>
+            <a:r>
+              <a:rPr sz="1300" b="1">
+                <a:solidFill>
+                  <a:srgbClr val="E69F00"/>
+                </a:solidFill>
+                <a:latin typeface="Segoe UI"/>
+              </a:rPr>
+              <a:t>●  </a:t>
+            </a:r>
+            <a:r>
+              <a:rPr sz="1700" b="0">
+                <a:solidFill>
+                  <a:srgbClr val="16202E"/>
+                </a:solidFill>
+                <a:latin typeface="Segoe UI"/>
+              </a:rPr>
+              <a:t>So robustness does not activate on observed data; even Winter Storm Uri reached only 1.3x.</a:t>
+            </a:r>
+          </a:p>
+          <a:p>
+            <a:pPr>
+              <a:lnSpc>
+                <a:spcPct val="112000"/>
+              </a:lnSpc>
+              <a:spcBef>
+                <a:spcPts val="0"/>
+              </a:spcBef>
+              <a:spcAft>
+                <a:spcPts val="1300"/>
+              </a:spcAft>
+            </a:pPr>
+            <a:r>
+              <a:rPr sz="1300" b="1">
+                <a:solidFill>
+                  <a:srgbClr val="E69F00"/>
+                </a:solidFill>
+                <a:latin typeface="Segoe UI"/>
+              </a:rPr>
+              <a:t>●  </a:t>
+            </a:r>
+            <a:r>
+              <a:rPr sz="1700" b="1">
+                <a:solidFill>
+                  <a:srgbClr val="0E2A52"/>
+                </a:solidFill>
+                <a:latin typeface="Segoe UI"/>
+              </a:rPr>
+              <a:t>On real data, deterministic transfer is unambiguously dominant.</a:t>
             </a:r>
           </a:p>
         </p:txBody>
@@ -4151,7 +4250,7 @@
                 </a:solidFill>
                 <a:latin typeface="Georgia"/>
               </a:rPr>
-              <a:t>The null is genuinely robust</a:t>
+              <a:t>The decision rule</a:t>
             </a:r>
           </a:p>
         </p:txBody>
@@ -4240,7 +4339,7 @@
                 </a:solidFill>
                 <a:latin typeface="Segoe UI"/>
               </a:rPr>
-              <a:t>Spatial correlation &amp; carbon-aware DRO scheduling</a:t>
+              <a:t>The Price of Sophistication: carbon-aware data-center scheduling</a:t>
             </a:r>
           </a:p>
         </p:txBody>
@@ -4292,14 +4391,102 @@
       </p:sp>
       <p:sp>
         <p:nvSpPr>
-          <p:cNvPr id="10" name="TextBox 9"/>
+          <p:cNvPr id="10" name="Rectangle 9"/>
+          <p:cNvSpPr/>
+          <p:nvPr/>
+        </p:nvSpPr>
+        <p:spPr>
+          <a:xfrm>
+            <a:off x="640080" y="1371600"/>
+            <a:ext cx="5349240" cy="2240280"/>
+          </a:xfrm>
+          <a:prstGeom prst="rect">
+            <a:avLst/>
+          </a:prstGeom>
+          <a:solidFill>
+            <a:srgbClr val="F3F6FB"/>
+          </a:solidFill>
+          <a:ln>
+            <a:noFill/>
+          </a:ln>
+          <a:effectLst/>
+        </p:spPr>
+        <p:style>
+          <a:lnRef idx="1">
+            <a:schemeClr val="accent1"/>
+          </a:lnRef>
+          <a:fillRef idx="3">
+            <a:schemeClr val="accent1"/>
+          </a:fillRef>
+          <a:effectRef idx="2">
+            <a:schemeClr val="accent1"/>
+          </a:effectRef>
+          <a:fontRef idx="minor">
+            <a:schemeClr val="lt1"/>
+          </a:fontRef>
+        </p:style>
+        <p:txBody>
+          <a:bodyPr rtlCol="0" anchor="ctr"/>
+          <a:lstStyle/>
+          <a:p>
+            <a:pPr algn="ctr"/>
+          </a:p>
+        </p:txBody>
+      </p:sp>
+      <p:sp>
+        <p:nvSpPr>
+          <p:cNvPr id="11" name="Rectangle 10"/>
+          <p:cNvSpPr/>
+          <p:nvPr/>
+        </p:nvSpPr>
+        <p:spPr>
+          <a:xfrm>
+            <a:off x="640080" y="1371600"/>
+            <a:ext cx="128016" cy="2240280"/>
+          </a:xfrm>
+          <a:prstGeom prst="rect">
+            <a:avLst/>
+          </a:prstGeom>
+          <a:solidFill>
+            <a:srgbClr val="4A7C59"/>
+          </a:solidFill>
+          <a:ln>
+            <a:noFill/>
+          </a:ln>
+          <a:effectLst/>
+        </p:spPr>
+        <p:style>
+          <a:lnRef idx="1">
+            <a:schemeClr val="accent1"/>
+          </a:lnRef>
+          <a:fillRef idx="3">
+            <a:schemeClr val="accent1"/>
+          </a:fillRef>
+          <a:effectRef idx="2">
+            <a:schemeClr val="accent1"/>
+          </a:effectRef>
+          <a:fontRef idx="minor">
+            <a:schemeClr val="lt1"/>
+          </a:fontRef>
+        </p:style>
+        <p:txBody>
+          <a:bodyPr rtlCol="0" anchor="ctr"/>
+          <a:lstStyle/>
+          <a:p>
+            <a:pPr algn="ctr"/>
+          </a:p>
+        </p:txBody>
+      </p:sp>
+      <p:sp>
+        <p:nvSpPr>
+          <p:cNvPr id="12" name="TextBox 11"/>
           <p:cNvSpPr txBox="1"/>
           <p:nvPr/>
         </p:nvSpPr>
         <p:spPr>
           <a:xfrm>
-            <a:off x="640080" y="1371600"/>
-            <a:ext cx="5577840" cy="4389120"/>
+            <a:off x="914400" y="1517904"/>
+            <a:ext cx="4937760" cy="457200"/>
           </a:xfrm>
           <a:prstGeom prst="rect">
             <a:avLst/>
@@ -4307,210 +4494,613 @@
           <a:noFill/>
         </p:spPr>
         <p:txBody>
-          <a:bodyPr wrap="square" lIns="0" rIns="0" tIns="0" bIns="0">
+          <a:bodyPr wrap="square" anchor="t" lIns="0" rIns="0" tIns="0" bIns="0">
             <a:spAutoFit/>
           </a:bodyPr>
           <a:lstStyle/>
           <a:p>
-            <a:pPr>
-              <a:lnSpc>
-                <a:spcPct val="112000"/>
-              </a:lnSpc>
-              <a:spcAft>
-                <a:spcPts val="1400"/>
-              </a:spcAft>
-            </a:pPr>
-            <a:r>
-              <a:rPr sz="2000" b="1">
+            <a:pPr algn="l">
+              <a:lnSpc>
+                <a:spcPct val="106000"/>
+              </a:lnSpc>
+              <a:spcBef>
+                <a:spcPts val="0"/>
+              </a:spcBef>
+              <a:spcAft>
+                <a:spcPts val="600"/>
+              </a:spcAft>
+            </a:pPr>
+            <a:r>
+              <a:rPr sz="1900" b="1">
                 <a:solidFill>
                   <a:srgbClr val="0E2A52"/>
                 </a:solidFill>
-                <a:latin typeface="Segoe UI"/>
-              </a:rPr>
-              <a:t>A pre-registered battery</a:t>
-            </a:r>
-          </a:p>
-          <a:p>
-            <a:pPr>
-              <a:lnSpc>
-                <a:spcPct val="112000"/>
-              </a:lnSpc>
-              <a:spcBef>
-                <a:spcPts val="0"/>
-              </a:spcBef>
-              <a:spcAft>
-                <a:spcPts val="1200"/>
-              </a:spcAft>
-            </a:pPr>
-            <a:r>
-              <a:rPr sz="1300" b="1">
-                <a:solidFill>
-                  <a:srgbClr val="E69F00"/>
-                </a:solidFill>
-                <a:latin typeface="Segoe UI"/>
-              </a:rPr>
-              <a:t>●  </a:t>
-            </a:r>
-            <a:r>
-              <a:rPr sz="1700" b="0">
+                <a:latin typeface="Georgia"/>
+              </a:rPr>
+              <a:t>Layer 1: always</a:t>
+            </a:r>
+          </a:p>
+        </p:txBody>
+      </p:sp>
+      <p:sp>
+        <p:nvSpPr>
+          <p:cNvPr id="13" name="TextBox 12"/>
+          <p:cNvSpPr txBox="1"/>
+          <p:nvPr/>
+        </p:nvSpPr>
+        <p:spPr>
+          <a:xfrm>
+            <a:off x="914400" y="1993392"/>
+            <a:ext cx="4937760" cy="1463040"/>
+          </a:xfrm>
+          <a:prstGeom prst="rect">
+            <a:avLst/>
+          </a:prstGeom>
+          <a:noFill/>
+        </p:spPr>
+        <p:txBody>
+          <a:bodyPr wrap="square" anchor="t" lIns="0" rIns="0" tIns="0" bIns="0">
+            <a:spAutoFit/>
+          </a:bodyPr>
+          <a:lstStyle/>
+          <a:p>
+            <a:pPr algn="l">
+              <a:lnSpc>
+                <a:spcPct val="106000"/>
+              </a:lnSpc>
+              <a:spcBef>
+                <a:spcPts val="0"/>
+              </a:spcBef>
+              <a:spcAft>
+                <a:spcPts val="600"/>
+              </a:spcAft>
+            </a:pPr>
+            <a:r>
+              <a:rPr sz="1600" b="0">
                 <a:solidFill>
                   <a:srgbClr val="16202E"/>
                 </a:solidFill>
                 <a:latin typeface="Segoe UI"/>
               </a:rPr>
-              <a:t>Shrinkage and residualization of the covariance.</a:t>
-            </a:r>
-          </a:p>
-          <a:p>
-            <a:pPr>
-              <a:lnSpc>
-                <a:spcPct val="112000"/>
-              </a:lnSpc>
-              <a:spcBef>
-                <a:spcPts val="0"/>
-              </a:spcBef>
-              <a:spcAft>
-                <a:spcPts val="1200"/>
-              </a:spcAft>
-            </a:pPr>
-            <a:r>
-              <a:rPr sz="1300" b="1">
-                <a:solidFill>
-                  <a:srgbClr val="E69F00"/>
-                </a:solidFill>
-                <a:latin typeface="Segoe UI"/>
-              </a:rPr>
-              <a:t>●  </a:t>
-            </a:r>
-            <a:r>
-              <a:rPr sz="1700" b="0">
+              <a:t>Schedule per-region, day-ahead. Temporal shifting captures the diurnal carbon cycle.</a:t>
+            </a:r>
+          </a:p>
+        </p:txBody>
+      </p:sp>
+      <p:sp>
+        <p:nvSpPr>
+          <p:cNvPr id="14" name="Rectangle 13"/>
+          <p:cNvSpPr/>
+          <p:nvPr/>
+        </p:nvSpPr>
+        <p:spPr>
+          <a:xfrm>
+            <a:off x="6172200" y="1371600"/>
+            <a:ext cx="5349240" cy="2240280"/>
+          </a:xfrm>
+          <a:prstGeom prst="rect">
+            <a:avLst/>
+          </a:prstGeom>
+          <a:solidFill>
+            <a:srgbClr val="F3F6FB"/>
+          </a:solidFill>
+          <a:ln>
+            <a:noFill/>
+          </a:ln>
+          <a:effectLst/>
+        </p:spPr>
+        <p:style>
+          <a:lnRef idx="1">
+            <a:schemeClr val="accent1"/>
+          </a:lnRef>
+          <a:fillRef idx="3">
+            <a:schemeClr val="accent1"/>
+          </a:fillRef>
+          <a:effectRef idx="2">
+            <a:schemeClr val="accent1"/>
+          </a:effectRef>
+          <a:fontRef idx="minor">
+            <a:schemeClr val="lt1"/>
+          </a:fontRef>
+        </p:style>
+        <p:txBody>
+          <a:bodyPr rtlCol="0" anchor="ctr"/>
+          <a:lstStyle/>
+          <a:p>
+            <a:pPr algn="ctr"/>
+          </a:p>
+        </p:txBody>
+      </p:sp>
+      <p:sp>
+        <p:nvSpPr>
+          <p:cNvPr id="15" name="Rectangle 14"/>
+          <p:cNvSpPr/>
+          <p:nvPr/>
+        </p:nvSpPr>
+        <p:spPr>
+          <a:xfrm>
+            <a:off x="6172200" y="1371600"/>
+            <a:ext cx="128016" cy="2240280"/>
+          </a:xfrm>
+          <a:prstGeom prst="rect">
+            <a:avLst/>
+          </a:prstGeom>
+          <a:solidFill>
+            <a:srgbClr val="E69F00"/>
+          </a:solidFill>
+          <a:ln>
+            <a:noFill/>
+          </a:ln>
+          <a:effectLst/>
+        </p:spPr>
+        <p:style>
+          <a:lnRef idx="1">
+            <a:schemeClr val="accent1"/>
+          </a:lnRef>
+          <a:fillRef idx="3">
+            <a:schemeClr val="accent1"/>
+          </a:fillRef>
+          <a:effectRef idx="2">
+            <a:schemeClr val="accent1"/>
+          </a:effectRef>
+          <a:fontRef idx="minor">
+            <a:schemeClr val="lt1"/>
+          </a:fontRef>
+        </p:style>
+        <p:txBody>
+          <a:bodyPr rtlCol="0" anchor="ctr"/>
+          <a:lstStyle/>
+          <a:p>
+            <a:pPr algn="ctr"/>
+          </a:p>
+        </p:txBody>
+      </p:sp>
+      <p:sp>
+        <p:nvSpPr>
+          <p:cNvPr id="16" name="TextBox 15"/>
+          <p:cNvSpPr txBox="1"/>
+          <p:nvPr/>
+        </p:nvSpPr>
+        <p:spPr>
+          <a:xfrm>
+            <a:off x="6446520" y="1517904"/>
+            <a:ext cx="4937760" cy="457200"/>
+          </a:xfrm>
+          <a:prstGeom prst="rect">
+            <a:avLst/>
+          </a:prstGeom>
+          <a:noFill/>
+        </p:spPr>
+        <p:txBody>
+          <a:bodyPr wrap="square" anchor="t" lIns="0" rIns="0" tIns="0" bIns="0">
+            <a:spAutoFit/>
+          </a:bodyPr>
+          <a:lstStyle/>
+          <a:p>
+            <a:pPr algn="l">
+              <a:lnSpc>
+                <a:spcPct val="106000"/>
+              </a:lnSpc>
+              <a:spcBef>
+                <a:spcPts val="0"/>
+              </a:spcBef>
+              <a:spcAft>
+                <a:spcPts val="600"/>
+              </a:spcAft>
+            </a:pPr>
+            <a:r>
+              <a:rPr sz="1900" b="1">
+                <a:solidFill>
+                  <a:srgbClr val="0E2A52"/>
+                </a:solidFill>
+                <a:latin typeface="Georgia"/>
+              </a:rPr>
+              <a:t>Layer 2: the lever</a:t>
+            </a:r>
+          </a:p>
+        </p:txBody>
+      </p:sp>
+      <p:sp>
+        <p:nvSpPr>
+          <p:cNvPr id="17" name="TextBox 16"/>
+          <p:cNvSpPr txBox="1"/>
+          <p:nvPr/>
+        </p:nvSpPr>
+        <p:spPr>
+          <a:xfrm>
+            <a:off x="6446520" y="1993392"/>
+            <a:ext cx="4937760" cy="1463040"/>
+          </a:xfrm>
+          <a:prstGeom prst="rect">
+            <a:avLst/>
+          </a:prstGeom>
+          <a:noFill/>
+        </p:spPr>
+        <p:txBody>
+          <a:bodyPr wrap="square" anchor="t" lIns="0" rIns="0" tIns="0" bIns="0">
+            <a:spAutoFit/>
+          </a:bodyPr>
+          <a:lstStyle/>
+          <a:p>
+            <a:pPr algn="l">
+              <a:lnSpc>
+                <a:spcPct val="106000"/>
+              </a:lnSpc>
+              <a:spcBef>
+                <a:spcPts val="0"/>
+              </a:spcBef>
+              <a:spcAft>
+                <a:spcPts val="600"/>
+              </a:spcAft>
+            </a:pPr>
+            <a:r>
+              <a:rPr sz="1600" b="0">
                 <a:solidFill>
                   <a:srgbClr val="16202E"/>
                 </a:solidFill>
                 <a:latin typeface="Segoe UI"/>
               </a:rPr>
-              <a:t>Benjamini–Hochberg correction across all cells.</a:t>
-            </a:r>
-          </a:p>
-          <a:p>
-            <a:pPr>
-              <a:lnSpc>
-                <a:spcPct val="112000"/>
-              </a:lnSpc>
-              <a:spcBef>
-                <a:spcPts val="0"/>
-              </a:spcBef>
-              <a:spcAft>
-                <a:spcPts val="1200"/>
-              </a:spcAft>
-            </a:pPr>
-            <a:r>
-              <a:rPr sz="1300" b="1">
-                <a:solidFill>
-                  <a:srgbClr val="E69F00"/>
-                </a:solidFill>
-                <a:latin typeface="Segoe UI"/>
-              </a:rPr>
-              <a:t>●  </a:t>
-            </a:r>
-            <a:r>
-              <a:rPr sz="1700" b="0">
+              <a:t>Add inter-region transfer if migration bandwidth exists: a 4.0 to 9.9% CVaR reduction over Phi=0. This is where the value is.</a:t>
+            </a:r>
+          </a:p>
+        </p:txBody>
+      </p:sp>
+      <p:sp>
+        <p:nvSpPr>
+          <p:cNvPr id="18" name="Rectangle 17"/>
+          <p:cNvSpPr/>
+          <p:nvPr/>
+        </p:nvSpPr>
+        <p:spPr>
+          <a:xfrm>
+            <a:off x="640080" y="3794760"/>
+            <a:ext cx="5349240" cy="2240280"/>
+          </a:xfrm>
+          <a:prstGeom prst="rect">
+            <a:avLst/>
+          </a:prstGeom>
+          <a:solidFill>
+            <a:srgbClr val="F3F6FB"/>
+          </a:solidFill>
+          <a:ln>
+            <a:noFill/>
+          </a:ln>
+          <a:effectLst/>
+        </p:spPr>
+        <p:style>
+          <a:lnRef idx="1">
+            <a:schemeClr val="accent1"/>
+          </a:lnRef>
+          <a:fillRef idx="3">
+            <a:schemeClr val="accent1"/>
+          </a:fillRef>
+          <a:effectRef idx="2">
+            <a:schemeClr val="accent1"/>
+          </a:effectRef>
+          <a:fontRef idx="minor">
+            <a:schemeClr val="lt1"/>
+          </a:fontRef>
+        </p:style>
+        <p:txBody>
+          <a:bodyPr rtlCol="0" anchor="ctr"/>
+          <a:lstStyle/>
+          <a:p>
+            <a:pPr algn="ctr"/>
+          </a:p>
+        </p:txBody>
+      </p:sp>
+      <p:sp>
+        <p:nvSpPr>
+          <p:cNvPr id="19" name="Rectangle 18"/>
+          <p:cNvSpPr/>
+          <p:nvPr/>
+        </p:nvSpPr>
+        <p:spPr>
+          <a:xfrm>
+            <a:off x="640080" y="3794760"/>
+            <a:ext cx="128016" cy="2240280"/>
+          </a:xfrm>
+          <a:prstGeom prst="rect">
+            <a:avLst/>
+          </a:prstGeom>
+          <a:solidFill>
+            <a:srgbClr val="B3402F"/>
+          </a:solidFill>
+          <a:ln>
+            <a:noFill/>
+          </a:ln>
+          <a:effectLst/>
+        </p:spPr>
+        <p:style>
+          <a:lnRef idx="1">
+            <a:schemeClr val="accent1"/>
+          </a:lnRef>
+          <a:fillRef idx="3">
+            <a:schemeClr val="accent1"/>
+          </a:fillRef>
+          <a:effectRef idx="2">
+            <a:schemeClr val="accent1"/>
+          </a:effectRef>
+          <a:fontRef idx="minor">
+            <a:schemeClr val="lt1"/>
+          </a:fontRef>
+        </p:style>
+        <p:txBody>
+          <a:bodyPr rtlCol="0" anchor="ctr"/>
+          <a:lstStyle/>
+          <a:p>
+            <a:pPr algn="ctr"/>
+          </a:p>
+        </p:txBody>
+      </p:sp>
+      <p:sp>
+        <p:nvSpPr>
+          <p:cNvPr id="20" name="TextBox 19"/>
+          <p:cNvSpPr txBox="1"/>
+          <p:nvPr/>
+        </p:nvSpPr>
+        <p:spPr>
+          <a:xfrm>
+            <a:off x="914400" y="3941063"/>
+            <a:ext cx="4937760" cy="457200"/>
+          </a:xfrm>
+          <a:prstGeom prst="rect">
+            <a:avLst/>
+          </a:prstGeom>
+          <a:noFill/>
+        </p:spPr>
+        <p:txBody>
+          <a:bodyPr wrap="square" anchor="t" lIns="0" rIns="0" tIns="0" bIns="0">
+            <a:spAutoFit/>
+          </a:bodyPr>
+          <a:lstStyle/>
+          <a:p>
+            <a:pPr algn="l">
+              <a:lnSpc>
+                <a:spcPct val="106000"/>
+              </a:lnSpc>
+              <a:spcBef>
+                <a:spcPts val="0"/>
+              </a:spcBef>
+              <a:spcAft>
+                <a:spcPts val="600"/>
+              </a:spcAft>
+            </a:pPr>
+            <a:r>
+              <a:rPr sz="1900" b="1">
+                <a:solidFill>
+                  <a:srgbClr val="0E2A52"/>
+                </a:solidFill>
+                <a:latin typeface="Georgia"/>
+              </a:rPr>
+              <a:t>Layer 3: skip</a:t>
+            </a:r>
+          </a:p>
+        </p:txBody>
+      </p:sp>
+      <p:sp>
+        <p:nvSpPr>
+          <p:cNvPr id="21" name="TextBox 20"/>
+          <p:cNvSpPr txBox="1"/>
+          <p:nvPr/>
+        </p:nvSpPr>
+        <p:spPr>
+          <a:xfrm>
+            <a:off x="914400" y="4416552"/>
+            <a:ext cx="4937760" cy="1463040"/>
+          </a:xfrm>
+          <a:prstGeom prst="rect">
+            <a:avLst/>
+          </a:prstGeom>
+          <a:noFill/>
+        </p:spPr>
+        <p:txBody>
+          <a:bodyPr wrap="square" anchor="t" lIns="0" rIns="0" tIns="0" bIns="0">
+            <a:spAutoFit/>
+          </a:bodyPr>
+          <a:lstStyle/>
+          <a:p>
+            <a:pPr algn="l">
+              <a:lnSpc>
+                <a:spcPct val="106000"/>
+              </a:lnSpc>
+              <a:spcBef>
+                <a:spcPts val="0"/>
+              </a:spcBef>
+              <a:spcAft>
+                <a:spcPts val="600"/>
+              </a:spcAft>
+            </a:pPr>
+            <a:r>
+              <a:rPr sz="1600" b="0">
                 <a:solidFill>
                   <a:srgbClr val="16202E"/>
                 </a:solidFill>
                 <a:latin typeface="Segoe UI"/>
               </a:rPr>
-              <a:t>Walk-forward out-of-sample validation, tighter-ramp sensitivity.</a:t>
-            </a:r>
-          </a:p>
-          <a:p>
-            <a:pPr>
-              <a:lnSpc>
-                <a:spcPct val="112000"/>
-              </a:lnSpc>
-              <a:spcBef>
-                <a:spcPts val="0"/>
-              </a:spcBef>
-              <a:spcAft>
-                <a:spcPts val="1200"/>
-              </a:spcAft>
-            </a:pPr>
-            <a:r>
-              <a:rPr sz="1300" b="1">
-                <a:solidFill>
-                  <a:srgbClr val="E69F00"/>
-                </a:solidFill>
-                <a:latin typeface="Segoe UI"/>
-              </a:rPr>
-              <a:t>●  </a:t>
-            </a:r>
-            <a:r>
-              <a:rPr sz="1700" b="0">
-                <a:solidFill>
-                  <a:srgbClr val="16202E"/>
-                </a:solidFill>
-                <a:latin typeface="Segoe UI"/>
-              </a:rPr>
-              <a:t>Multi-seed stability: the single-seed crossovers were scenario noise.</a:t>
-            </a:r>
-          </a:p>
-          <a:p>
-            <a:pPr>
-              <a:lnSpc>
-                <a:spcPct val="112000"/>
-              </a:lnSpc>
-              <a:spcBef>
-                <a:spcPts val="0"/>
-              </a:spcBef>
-              <a:spcAft>
-                <a:spcPts val="1200"/>
-              </a:spcAft>
-            </a:pPr>
-            <a:r>
-              <a:rPr sz="1300" b="1">
-                <a:solidFill>
-                  <a:srgbClr val="E69F00"/>
-                </a:solidFill>
-                <a:latin typeface="Segoe UI"/>
-              </a:rPr>
-              <a:t>●  </a:t>
-            </a:r>
-            <a:r>
-              <a:rPr sz="1700" b="1">
-                <a:solidFill>
-                  <a:srgbClr val="0E2A52"/>
-                </a:solidFill>
-                <a:latin typeface="Segoe UI"/>
-              </a:rPr>
-              <a:t>TOST equivalence: statistically equivalent, not merely not-significant.</a:t>
-            </a:r>
-          </a:p>
-        </p:txBody>
-      </p:sp>
-      <p:pic>
-        <p:nvPicPr>
-          <p:cNvPr id="11" name="Picture 10" descr="robustness.png"/>
-          <p:cNvPicPr>
-            <a:picLocks noChangeAspect="1"/>
-          </p:cNvPicPr>
-          <p:nvPr/>
-        </p:nvPicPr>
-        <p:blipFill>
-          <a:blip r:embed="rId2"/>
-          <a:stretch>
-            <a:fillRect/>
-          </a:stretch>
-        </p:blipFill>
-        <p:spPr>
-          <a:xfrm>
-            <a:off x="6400800" y="1554480"/>
-            <a:ext cx="5212080" cy="1760706"/>
-          </a:xfrm>
-          <a:prstGeom prst="rect">
-            <a:avLst/>
-          </a:prstGeom>
-        </p:spPr>
-      </p:pic>
+              <a:t>Spatial covariance and copulas. They add below 0.4% of CVaR: not worth the complexity.</a:t>
+            </a:r>
+          </a:p>
+        </p:txBody>
+      </p:sp>
+      <p:sp>
+        <p:nvSpPr>
+          <p:cNvPr id="22" name="Rectangle 21"/>
+          <p:cNvSpPr/>
+          <p:nvPr/>
+        </p:nvSpPr>
+        <p:spPr>
+          <a:xfrm>
+            <a:off x="6172200" y="3794760"/>
+            <a:ext cx="5349240" cy="2240280"/>
+          </a:xfrm>
+          <a:prstGeom prst="rect">
+            <a:avLst/>
+          </a:prstGeom>
+          <a:solidFill>
+            <a:srgbClr val="0E2A52"/>
+          </a:solidFill>
+          <a:ln>
+            <a:noFill/>
+          </a:ln>
+          <a:effectLst/>
+        </p:spPr>
+        <p:style>
+          <a:lnRef idx="1">
+            <a:schemeClr val="accent1"/>
+          </a:lnRef>
+          <a:fillRef idx="3">
+            <a:schemeClr val="accent1"/>
+          </a:fillRef>
+          <a:effectRef idx="2">
+            <a:schemeClr val="accent1"/>
+          </a:effectRef>
+          <a:fontRef idx="minor">
+            <a:schemeClr val="lt1"/>
+          </a:fontRef>
+        </p:style>
+        <p:txBody>
+          <a:bodyPr rtlCol="0" anchor="ctr"/>
+          <a:lstStyle/>
+          <a:p>
+            <a:pPr algn="ctr"/>
+          </a:p>
+        </p:txBody>
+      </p:sp>
+      <p:sp>
+        <p:nvSpPr>
+          <p:cNvPr id="23" name="Rectangle 22"/>
+          <p:cNvSpPr/>
+          <p:nvPr/>
+        </p:nvSpPr>
+        <p:spPr>
+          <a:xfrm>
+            <a:off x="6172200" y="3794760"/>
+            <a:ext cx="128016" cy="2240280"/>
+          </a:xfrm>
+          <a:prstGeom prst="rect">
+            <a:avLst/>
+          </a:prstGeom>
+          <a:solidFill>
+            <a:srgbClr val="E69F00"/>
+          </a:solidFill>
+          <a:ln>
+            <a:noFill/>
+          </a:ln>
+          <a:effectLst/>
+        </p:spPr>
+        <p:style>
+          <a:lnRef idx="1">
+            <a:schemeClr val="accent1"/>
+          </a:lnRef>
+          <a:fillRef idx="3">
+            <a:schemeClr val="accent1"/>
+          </a:fillRef>
+          <a:effectRef idx="2">
+            <a:schemeClr val="accent1"/>
+          </a:effectRef>
+          <a:fontRef idx="minor">
+            <a:schemeClr val="lt1"/>
+          </a:fontRef>
+        </p:style>
+        <p:txBody>
+          <a:bodyPr rtlCol="0" anchor="ctr"/>
+          <a:lstStyle/>
+          <a:p>
+            <a:pPr algn="ctr"/>
+          </a:p>
+        </p:txBody>
+      </p:sp>
+      <p:sp>
+        <p:nvSpPr>
+          <p:cNvPr id="24" name="TextBox 23"/>
+          <p:cNvSpPr txBox="1"/>
+          <p:nvPr/>
+        </p:nvSpPr>
+        <p:spPr>
+          <a:xfrm>
+            <a:off x="6446520" y="3941063"/>
+            <a:ext cx="4937760" cy="457200"/>
+          </a:xfrm>
+          <a:prstGeom prst="rect">
+            <a:avLst/>
+          </a:prstGeom>
+          <a:noFill/>
+        </p:spPr>
+        <p:txBody>
+          <a:bodyPr wrap="square" anchor="t" lIns="0" rIns="0" tIns="0" bIns="0">
+            <a:spAutoFit/>
+          </a:bodyPr>
+          <a:lstStyle/>
+          <a:p>
+            <a:pPr algn="l">
+              <a:lnSpc>
+                <a:spcPct val="106000"/>
+              </a:lnSpc>
+              <a:spcBef>
+                <a:spcPts val="0"/>
+              </a:spcBef>
+              <a:spcAft>
+                <a:spcPts val="600"/>
+              </a:spcAft>
+            </a:pPr>
+            <a:r>
+              <a:rPr sz="1900" b="1">
+                <a:solidFill>
+                  <a:srgbClr val="FFFFFF"/>
+                </a:solidFill>
+                <a:latin typeface="Georgia"/>
+              </a:rPr>
+              <a:t>Layer 4: conditional</a:t>
+            </a:r>
+          </a:p>
+        </p:txBody>
+      </p:sp>
+      <p:sp>
+        <p:nvSpPr>
+          <p:cNvPr id="25" name="TextBox 24"/>
+          <p:cNvSpPr txBox="1"/>
+          <p:nvPr/>
+        </p:nvSpPr>
+        <p:spPr>
+          <a:xfrm>
+            <a:off x="6446520" y="4416552"/>
+            <a:ext cx="4937760" cy="1463040"/>
+          </a:xfrm>
+          <a:prstGeom prst="rect">
+            <a:avLst/>
+          </a:prstGeom>
+          <a:noFill/>
+        </p:spPr>
+        <p:txBody>
+          <a:bodyPr wrap="square" anchor="t" lIns="0" rIns="0" tIns="0" bIns="0">
+            <a:spAutoFit/>
+          </a:bodyPr>
+          <a:lstStyle/>
+          <a:p>
+            <a:pPr algn="l">
+              <a:lnSpc>
+                <a:spcPct val="106000"/>
+              </a:lnSpc>
+              <a:spcBef>
+                <a:spcPts val="0"/>
+              </a:spcBef>
+              <a:spcAft>
+                <a:spcPts val="600"/>
+              </a:spcAft>
+            </a:pPr>
+            <a:r>
+              <a:rPr sz="1600" b="0">
+                <a:solidFill>
+                  <a:srgbClr val="CDD6E4"/>
+                </a:solidFill>
+                <a:latin typeface="Segoe UI"/>
+              </a:rPr>
+              <a:t>Robustify only if you expect emergencies past M* near 3. Real grids do not reach it.</a:t>
+            </a:r>
+          </a:p>
+        </p:txBody>
+      </p:sp>
     </p:spTree>
   </p:cSld>
   <p:clrMapOvr>
@@ -4754,7 +5344,7 @@
                 </a:solidFill>
                 <a:latin typeface="Georgia"/>
               </a:rPr>
-              <a:t>Mechanism 1: the mean dominates</a:t>
+              <a:t>Data: three grids across the spectrum</a:t>
             </a:r>
           </a:p>
         </p:txBody>
@@ -4843,7 +5433,7 @@
                 </a:solidFill>
                 <a:latin typeface="Segoe UI"/>
               </a:rPr>
-              <a:t>Spatial correlation &amp; carbon-aware DRO scheduling</a:t>
+              <a:t>The Price of Sophistication: carbon-aware data-center scheduling</a:t>
             </a:r>
           </a:p>
         </p:txBody>
@@ -4902,7 +5492,7 @@
         <p:spPr>
           <a:xfrm>
             <a:off x="640080" y="1371600"/>
-            <a:ext cx="5577840" cy="4206240"/>
+            <a:ext cx="5577840" cy="4389120"/>
           </a:xfrm>
           <a:prstGeom prst="rect">
             <a:avLst/>
@@ -4920,7 +5510,7 @@
                 <a:spcPct val="112000"/>
               </a:lnSpc>
               <a:spcAft>
-                <a:spcPts val="1700"/>
+                <a:spcPts val="1600"/>
               </a:spcAft>
             </a:pPr>
             <a:r>
@@ -4930,7 +5520,7 @@
                 </a:solidFill>
                 <a:latin typeface="Segoe UI"/>
               </a:rPr>
-              <a:t>Mean-ablation (causal)</a:t>
+              <a:t>Real Electricity Maps carbon intensity</a:t>
             </a:r>
           </a:p>
           <a:p>
@@ -4942,7 +5532,7 @@
                 <a:spcPts val="0"/>
               </a:spcBef>
               <a:spcAft>
-                <a:spcPts val="1500"/>
+                <a:spcPts val="1400"/>
               </a:spcAft>
             </a:pPr>
             <a:r>
@@ -4955,13 +5545,13 @@
               <a:t>●  </a:t>
             </a:r>
             <a:r>
-              <a:rPr sz="1800" b="1">
-                <a:solidFill>
-                  <a:srgbClr val="B3402F"/>
-                </a:solidFill>
-                <a:latin typeface="Segoe UI"/>
-              </a:rPr>
-              <a:t>Flatten the mean carbon field and the joint covariance suddenly pays, up to +1.46%.</a:t>
+              <a:rPr sz="1800" b="0">
+                <a:solidFill>
+                  <a:srgbClr val="16202E"/>
+                </a:solidFill>
+                <a:latin typeface="Segoe UI"/>
+              </a:rPr>
+              <a:t>US West: a strongly, uniformly correlated grid (common-mode).</a:t>
             </a:r>
           </a:p>
           <a:p>
@@ -4973,7 +5563,7 @@
                 <a:spcPts val="0"/>
               </a:spcBef>
               <a:spcAft>
-                <a:spcPts val="1500"/>
+                <a:spcPts val="1400"/>
               </a:spcAft>
             </a:pPr>
             <a:r>
@@ -4992,7 +5582,7 @@
                 </a:solidFill>
                 <a:latin typeface="Segoe UI"/>
               </a:rPr>
-              <a:t>So the spatial signal is real, but masked: dwarfed by the diurnal mean.</a:t>
+              <a:t>Eastern Interconnection belt: an Ontario-anchored mid-correlation set.</a:t>
             </a:r>
           </a:p>
           <a:p>
@@ -5004,7 +5594,7 @@
                 <a:spcPts val="0"/>
               </a:spcBef>
               <a:spcAft>
-                <a:spcPts val="1500"/>
+                <a:spcPts val="1400"/>
               </a:spcAft>
             </a:pPr>
             <a:r>
@@ -5023,55 +5613,66 @@
                 </a:solidFill>
                 <a:latin typeface="Segoe UI"/>
               </a:rPr>
-              <a:t>The schedule chases the big mean valley; the covariance is a ripple on top.</a:t>
-            </a:r>
-          </a:p>
-        </p:txBody>
-      </p:sp>
-      <p:sp>
-        <p:nvSpPr>
-          <p:cNvPr id="11" name="Rectangle 10"/>
-          <p:cNvSpPr/>
-          <p:nvPr/>
-        </p:nvSpPr>
-        <p:spPr>
-          <a:xfrm>
-            <a:off x="6400800" y="1554480"/>
-            <a:ext cx="5212080" cy="4114800"/>
-          </a:xfrm>
-          <a:prstGeom prst="rect">
-            <a:avLst/>
-          </a:prstGeom>
-          <a:solidFill>
-            <a:srgbClr val="F3F6FB"/>
-          </a:solidFill>
-          <a:ln>
-            <a:noFill/>
-          </a:ln>
-          <a:effectLst/>
-        </p:spPr>
-        <p:style>
-          <a:lnRef idx="1">
-            <a:schemeClr val="accent1"/>
-          </a:lnRef>
-          <a:fillRef idx="3">
-            <a:schemeClr val="accent1"/>
-          </a:fillRef>
-          <a:effectRef idx="2">
-            <a:schemeClr val="accent1"/>
-          </a:effectRef>
-          <a:fontRef idx="minor">
-            <a:schemeClr val="lt1"/>
-          </a:fontRef>
-        </p:style>
-        <p:txBody>
-          <a:bodyPr rtlCol="0" anchor="ctr"/>
-          <a:lstStyle/>
-          <a:p>
-            <a:pPr algn="ctr"/>
-          </a:p>
-        </p:txBody>
-      </p:sp>
+              <a:t>Engineered solar / wind / hydro portfolio: low, heterogeneous correlation.</a:t>
+            </a:r>
+          </a:p>
+          <a:p>
+            <a:pPr>
+              <a:lnSpc>
+                <a:spcPct val="112000"/>
+              </a:lnSpc>
+              <a:spcBef>
+                <a:spcPts val="0"/>
+              </a:spcBef>
+              <a:spcAft>
+                <a:spcPts val="1400"/>
+              </a:spcAft>
+            </a:pPr>
+            <a:r>
+              <a:rPr sz="1400" b="1">
+                <a:solidFill>
+                  <a:srgbClr val="E69F00"/>
+                </a:solidFill>
+                <a:latin typeface="Segoe UI"/>
+              </a:rPr>
+              <a:t>●  </a:t>
+            </a:r>
+            <a:r>
+              <a:rPr sz="1800" b="0">
+                <a:solidFill>
+                  <a:srgbClr val="16202E"/>
+                </a:solidFill>
+                <a:latin typeface="Segoe UI"/>
+              </a:rPr>
+              <a:t>Iberia-France: an independent low-correlation external-validity anchor.</a:t>
+            </a:r>
+          </a:p>
+        </p:txBody>
+      </p:sp>
+      <p:pic>
+        <p:nvPicPr>
+          <p:cNvPr id="11" name="Picture 10" descr="ci_corr_heatmap_us_west.png"/>
+          <p:cNvPicPr>
+            <a:picLocks noChangeAspect="1"/>
+          </p:cNvPicPr>
+          <p:nvPr/>
+        </p:nvPicPr>
+        <p:blipFill>
+          <a:blip r:embed="rId2"/>
+          <a:stretch>
+            <a:fillRect/>
+          </a:stretch>
+        </p:blipFill>
+        <p:spPr>
+          <a:xfrm>
+            <a:off x="6400800" y="1463040"/>
+            <a:ext cx="5212080" cy="2396538"/>
+          </a:xfrm>
+          <a:prstGeom prst="rect">
+            <a:avLst/>
+          </a:prstGeom>
+        </p:spPr>
+      </p:pic>
       <p:sp>
         <p:nvSpPr>
           <p:cNvPr id="12" name="TextBox 11"/>
@@ -5080,8 +5681,8 @@
         </p:nvSpPr>
         <p:spPr>
           <a:xfrm>
-            <a:off x="6629400" y="1783080"/>
-            <a:ext cx="4754880" cy="3749039"/>
+            <a:off x="6400800" y="5760720"/>
+            <a:ext cx="5212080" cy="365760"/>
           </a:xfrm>
           <a:prstGeom prst="rect">
             <a:avLst/>
@@ -5094,7 +5695,7 @@
           </a:bodyPr>
           <a:lstStyle/>
           <a:p>
-            <a:pPr algn="l">
+            <a:pPr algn="ctr">
               <a:lnSpc>
                 <a:spcPct val="106000"/>
               </a:lnSpc>
@@ -5102,61 +5703,17 @@
                 <a:spcPts val="0"/>
               </a:spcBef>
               <a:spcAft>
-                <a:spcPts val="1200"/>
-              </a:spcAft>
-            </a:pPr>
-            <a:r>
-              <a:rPr sz="1900" b="1">
-                <a:solidFill>
-                  <a:srgbClr val="0E2A52"/>
-                </a:solidFill>
-                <a:latin typeface="Georgia"/>
-              </a:rPr>
-              <a:t>Why this happens</a:t>
-            </a:r>
-          </a:p>
-          <a:p>
-            <a:pPr algn="l">
-              <a:lnSpc>
-                <a:spcPct val="106000"/>
-              </a:lnSpc>
-              <a:spcBef>
-                <a:spcPts val="0"/>
-              </a:spcBef>
-              <a:spcAft>
-                <a:spcPts val="1200"/>
-              </a:spcAft>
-            </a:pPr>
-            <a:r>
-              <a:rPr sz="1600" b="0">
-                <a:solidFill>
-                  <a:srgbClr val="16202E"/>
-                </a:solidFill>
-                <a:latin typeface="Segoe UI"/>
-              </a:rPr>
-              <a:t>Carbon intensity is driven overwhelmingly by the time-of-day mean (solar, demand). That signal is shared, predictable, and huge.</a:t>
-            </a:r>
-          </a:p>
-          <a:p>
-            <a:pPr algn="l">
-              <a:lnSpc>
-                <a:spcPct val="106000"/>
-              </a:lnSpc>
-              <a:spcBef>
-                <a:spcPts val="0"/>
-              </a:spcBef>
-              <a:spcAft>
-                <a:spcPts val="1200"/>
-              </a:spcAft>
-            </a:pPr>
-            <a:r>
-              <a:rPr sz="1600" b="0">
-                <a:solidFill>
-                  <a:srgbClr val="16202E"/>
-                </a:solidFill>
-                <a:latin typeface="Segoe UI"/>
-              </a:rPr>
-              <a:t>The cross-region covariance is a second-order wrinkle on a first-order wave, so it cannot move the optimal schedule.</a:t>
+                <a:spcPts val="600"/>
+              </a:spcAft>
+            </a:pPr>
+            <a:r>
+              <a:rPr sz="1200" b="0">
+                <a:solidFill>
+                  <a:srgbClr val="5B6675"/>
+                </a:solidFill>
+                <a:latin typeface="Segoe UI"/>
+              </a:rPr>
+              <a:t>Correlation is real, up to 0.78 on the US West.</a:t>
             </a:r>
           </a:p>
         </p:txBody>
@@ -5404,7 +5961,7 @@
                 </a:solidFill>
                 <a:latin typeface="Georgia"/>
               </a:rPr>
-              <a:t>Mechanism 2: the wrong object</a:t>
+              <a:t>Validation and reproducibility</a:t>
             </a:r>
           </a:p>
         </p:txBody>
@@ -5493,7 +6050,7 @@
                 </a:solidFill>
                 <a:latin typeface="Segoe UI"/>
               </a:rPr>
-              <a:t>Spatial correlation &amp; carbon-aware DRO scheduling</a:t>
+              <a:t>The Price of Sophistication: carbon-aware data-center scheduling</a:t>
             </a:r>
           </a:p>
         </p:txBody>
@@ -5543,9 +6100,175 @@
           </a:p>
         </p:txBody>
       </p:sp>
+      <p:sp>
+        <p:nvSpPr>
+          <p:cNvPr id="10" name="TextBox 9"/>
+          <p:cNvSpPr txBox="1"/>
+          <p:nvPr/>
+        </p:nvSpPr>
+        <p:spPr>
+          <a:xfrm>
+            <a:off x="640080" y="1371600"/>
+            <a:ext cx="5577840" cy="4480560"/>
+          </a:xfrm>
+          <a:prstGeom prst="rect">
+            <a:avLst/>
+          </a:prstGeom>
+          <a:noFill/>
+        </p:spPr>
+        <p:txBody>
+          <a:bodyPr wrap="square" lIns="0" rIns="0" tIns="0" bIns="0">
+            <a:spAutoFit/>
+          </a:bodyPr>
+          <a:lstStyle/>
+          <a:p>
+            <a:pPr>
+              <a:lnSpc>
+                <a:spcPct val="112000"/>
+              </a:lnSpc>
+              <a:spcAft>
+                <a:spcPts val="1600"/>
+              </a:spcAft>
+            </a:pPr>
+            <a:r>
+              <a:rPr sz="2100" b="1">
+                <a:solidFill>
+                  <a:srgbClr val="0E2A52"/>
+                </a:solidFill>
+                <a:latin typeface="Segoe UI"/>
+              </a:rPr>
+              <a:t>A pre-registered battery</a:t>
+            </a:r>
+          </a:p>
+          <a:p>
+            <a:pPr>
+              <a:lnSpc>
+                <a:spcPct val="112000"/>
+              </a:lnSpc>
+              <a:spcBef>
+                <a:spcPts val="0"/>
+              </a:spcBef>
+              <a:spcAft>
+                <a:spcPts val="1400"/>
+              </a:spcAft>
+            </a:pPr>
+            <a:r>
+              <a:rPr sz="1400" b="1">
+                <a:solidFill>
+                  <a:srgbClr val="E69F00"/>
+                </a:solidFill>
+                <a:latin typeface="Segoe UI"/>
+              </a:rPr>
+              <a:t>●  </a:t>
+            </a:r>
+            <a:r>
+              <a:rPr sz="1800" b="0">
+                <a:solidFill>
+                  <a:srgbClr val="16202E"/>
+                </a:solidFill>
+                <a:latin typeface="Segoe UI"/>
+              </a:rPr>
+              <a:t>The null survives Ledoit-Wolf shrinkage, residualization, and Benjamini-Hochberg correction across cells.</a:t>
+            </a:r>
+          </a:p>
+          <a:p>
+            <a:pPr>
+              <a:lnSpc>
+                <a:spcPct val="112000"/>
+              </a:lnSpc>
+              <a:spcBef>
+                <a:spcPts val="0"/>
+              </a:spcBef>
+              <a:spcAft>
+                <a:spcPts val="1400"/>
+              </a:spcAft>
+            </a:pPr>
+            <a:r>
+              <a:rPr sz="1400" b="1">
+                <a:solidFill>
+                  <a:srgbClr val="E69F00"/>
+                </a:solidFill>
+                <a:latin typeface="Segoe UI"/>
+              </a:rPr>
+              <a:t>●  </a:t>
+            </a:r>
+            <a:r>
+              <a:rPr sz="1800" b="0">
+                <a:solidFill>
+                  <a:srgbClr val="16202E"/>
+                </a:solidFill>
+                <a:latin typeface="Segoe UI"/>
+              </a:rPr>
+              <a:t>Walk-forward out-of-sample validation and a per-cell equivalence test.</a:t>
+            </a:r>
+          </a:p>
+          <a:p>
+            <a:pPr>
+              <a:lnSpc>
+                <a:spcPct val="112000"/>
+              </a:lnSpc>
+              <a:spcBef>
+                <a:spcPts val="0"/>
+              </a:spcBef>
+              <a:spcAft>
+                <a:spcPts val="1400"/>
+              </a:spcAft>
+            </a:pPr>
+            <a:r>
+              <a:rPr sz="1400" b="1">
+                <a:solidFill>
+                  <a:srgbClr val="E69F00"/>
+                </a:solidFill>
+                <a:latin typeface="Segoe UI"/>
+              </a:rPr>
+              <a:t>●  </a:t>
+            </a:r>
+            <a:r>
+              <a:rPr sz="1800" b="1">
+                <a:solidFill>
+                  <a:srgbClr val="0E2A52"/>
+                </a:solidFill>
+                <a:latin typeface="Segoe UI"/>
+              </a:rPr>
+              <a:t>194 unit tests in CI; bootstrap confidence intervals on every gap.</a:t>
+            </a:r>
+          </a:p>
+          <a:p>
+            <a:pPr>
+              <a:lnSpc>
+                <a:spcPct val="112000"/>
+              </a:lnSpc>
+              <a:spcBef>
+                <a:spcPts val="0"/>
+              </a:spcBef>
+              <a:spcAft>
+                <a:spcPts val="1400"/>
+              </a:spcAft>
+            </a:pPr>
+            <a:r>
+              <a:rPr sz="1400" b="1">
+                <a:solidFill>
+                  <a:srgbClr val="E69F00"/>
+                </a:solidFill>
+                <a:latin typeface="Segoe UI"/>
+              </a:rPr>
+              <a:t>●  </a:t>
+            </a:r>
+            <a:r>
+              <a:rPr sz="1800" b="0">
+                <a:solidFill>
+                  <a:srgbClr val="16202E"/>
+                </a:solidFill>
+                <a:latin typeface="Segoe UI"/>
+              </a:rPr>
+              <a:t>Pre-registered, version-controlled, with archived summary tables for every reported number.</a:t>
+            </a:r>
+          </a:p>
+        </p:txBody>
+      </p:sp>
       <p:pic>
         <p:nvPicPr>
-          <p:cNvPr id="10" name="Picture 9" descr="tail_dependence_taskc.png"/>
+          <p:cNvPr id="11" name="Picture 10" descr="robustness.png"/>
           <p:cNvPicPr>
             <a:picLocks noChangeAspect="1"/>
           </p:cNvPicPr>
@@ -5559,149 +6282,14 @@
         </p:blipFill>
         <p:spPr>
           <a:xfrm>
-            <a:off x="640080" y="1417320"/>
-            <a:ext cx="6583680" cy="3755581"/>
+            <a:off x="6400800" y="1554480"/>
+            <a:ext cx="5212080" cy="1760706"/>
           </a:xfrm>
           <a:prstGeom prst="rect">
             <a:avLst/>
           </a:prstGeom>
         </p:spPr>
       </p:pic>
-      <p:sp>
-        <p:nvSpPr>
-          <p:cNvPr id="11" name="TextBox 10"/>
-          <p:cNvSpPr txBox="1"/>
-          <p:nvPr/>
-        </p:nvSpPr>
-        <p:spPr>
-          <a:xfrm>
-            <a:off x="7315200" y="1554480"/>
-            <a:ext cx="4297680" cy="4389120"/>
-          </a:xfrm>
-          <a:prstGeom prst="rect">
-            <a:avLst/>
-          </a:prstGeom>
-          <a:noFill/>
-        </p:spPr>
-        <p:txBody>
-          <a:bodyPr wrap="square" lIns="0" rIns="0" tIns="0" bIns="0">
-            <a:spAutoFit/>
-          </a:bodyPr>
-          <a:lstStyle/>
-          <a:p>
-            <a:pPr>
-              <a:lnSpc>
-                <a:spcPct val="112000"/>
-              </a:lnSpc>
-              <a:spcAft>
-                <a:spcPts val="1600"/>
-              </a:spcAft>
-            </a:pPr>
-            <a:r>
-              <a:rPr sz="2000" b="1">
-                <a:solidFill>
-                  <a:srgbClr val="0E2A52"/>
-                </a:solidFill>
-                <a:latin typeface="Segoe UI"/>
-              </a:rPr>
-              <a:t>Tail dependence (structural)</a:t>
-            </a:r>
-          </a:p>
-          <a:p>
-            <a:pPr>
-              <a:lnSpc>
-                <a:spcPct val="112000"/>
-              </a:lnSpc>
-              <a:spcBef>
-                <a:spcPts val="0"/>
-              </a:spcBef>
-              <a:spcAft>
-                <a:spcPts val="1400"/>
-              </a:spcAft>
-            </a:pPr>
-            <a:r>
-              <a:rPr sz="1300" b="1">
-                <a:solidFill>
-                  <a:srgbClr val="E69F00"/>
-                </a:solidFill>
-                <a:latin typeface="Segoe UI"/>
-              </a:rPr>
-              <a:t>●  </a:t>
-            </a:r>
-            <a:r>
-              <a:rPr sz="1700" b="0">
-                <a:solidFill>
-                  <a:srgbClr val="16202E"/>
-                </a:solidFill>
-                <a:latin typeface="Segoe UI"/>
-              </a:rPr>
-              <a:t>Residual dependence is non-elliptical: regions go clean together more than dirty together (χ_L &gt; χ_U).</a:t>
-            </a:r>
-          </a:p>
-          <a:p>
-            <a:pPr>
-              <a:lnSpc>
-                <a:spcPct val="112000"/>
-              </a:lnSpc>
-              <a:spcBef>
-                <a:spcPts val="0"/>
-              </a:spcBef>
-              <a:spcAft>
-                <a:spcPts val="1400"/>
-              </a:spcAft>
-            </a:pPr>
-            <a:r>
-              <a:rPr sz="1300" b="1">
-                <a:solidFill>
-                  <a:srgbClr val="E69F00"/>
-                </a:solidFill>
-                <a:latin typeface="Segoe UI"/>
-              </a:rPr>
-              <a:t>●  </a:t>
-            </a:r>
-            <a:r>
-              <a:rPr sz="1700" b="0">
-                <a:solidFill>
-                  <a:srgbClr val="16202E"/>
-                </a:solidFill>
-                <a:latin typeface="Segoe UI"/>
-              </a:rPr>
-              <a:t>A covariance ball forces χ_L = χ_U by construction.</a:t>
-            </a:r>
-          </a:p>
-          <a:p>
-            <a:pPr>
-              <a:lnSpc>
-                <a:spcPct val="112000"/>
-              </a:lnSpc>
-              <a:spcBef>
-                <a:spcPts val="0"/>
-              </a:spcBef>
-              <a:spcAft>
-                <a:spcPts val="1400"/>
-              </a:spcAft>
-            </a:pPr>
-            <a:r>
-              <a:rPr sz="1300" b="1">
-                <a:solidFill>
-                  <a:srgbClr val="E69F00"/>
-                </a:solidFill>
-                <a:latin typeface="Segoe UI"/>
-              </a:rPr>
-              <a:t>●  </a:t>
-            </a:r>
-            <a:r>
-              <a:rPr sz="1700" b="1">
-                <a:solidFill>
-                  <a:srgbClr val="0E2A52"/>
-                </a:solidFill>
-                <a:latin typeface="Segoe UI"/>
-              </a:rPr>
-              <a:t>So an elliptical ambiguity set is the wrong object, blind to the only structure that is left.</a:t>
-            </a:r>
-          </a:p>
-        </p:txBody>
-      </p:sp>
     </p:spTree>
   </p:cSld>
   <p:clrMapOvr>
@@ -5945,7 +6533,7 @@
                 </a:solidFill>
                 <a:latin typeface="Georgia"/>
               </a:rPr>
-              <a:t>Foreclosing the rebuttal: copulas</a:t>
+              <a:t>Limitations, stated honestly</a:t>
             </a:r>
           </a:p>
         </p:txBody>
@@ -6034,7 +6622,7 @@
                 </a:solidFill>
                 <a:latin typeface="Segoe UI"/>
               </a:rPr>
-              <a:t>Spatial correlation &amp; carbon-aware DRO scheduling</a:t>
+              <a:t>The Price of Sophistication: carbon-aware data-center scheduling</a:t>
             </a:r>
           </a:p>
         </p:txBody>
@@ -6084,40 +6672,16 @@
           </a:p>
         </p:txBody>
       </p:sp>
-      <p:pic>
-        <p:nvPicPr>
-          <p:cNvPr id="10" name="Picture 9" descr="copula_result.png"/>
-          <p:cNvPicPr>
-            <a:picLocks noChangeAspect="1"/>
-          </p:cNvPicPr>
-          <p:nvPr/>
-        </p:nvPicPr>
-        <p:blipFill>
-          <a:blip r:embed="rId2"/>
-          <a:stretch>
-            <a:fillRect/>
-          </a:stretch>
-        </p:blipFill>
+      <p:sp>
+        <p:nvSpPr>
+          <p:cNvPr id="10" name="TextBox 9"/>
+          <p:cNvSpPr txBox="1"/>
+          <p:nvPr/>
+        </p:nvSpPr>
         <p:spPr>
           <a:xfrm>
             <a:off x="640080" y="1371600"/>
-            <a:ext cx="6583680" cy="2245184"/>
-          </a:xfrm>
-          <a:prstGeom prst="rect">
-            <a:avLst/>
-          </a:prstGeom>
-        </p:spPr>
-      </p:pic>
-      <p:sp>
-        <p:nvSpPr>
-          <p:cNvPr id="11" name="TextBox 10"/>
-          <p:cNvSpPr txBox="1"/>
-          <p:nvPr/>
-        </p:nvSpPr>
-        <p:spPr>
-          <a:xfrm>
-            <a:off x="7315200" y="1554480"/>
-            <a:ext cx="4297680" cy="4389120"/>
+            <a:ext cx="10881360" cy="4480560"/>
           </a:xfrm>
           <a:prstGeom prst="rect">
             <a:avLst/>
@@ -6139,13 +6703,13 @@
               </a:spcAft>
             </a:pPr>
             <a:r>
-              <a:rPr sz="2100" b="1">
+              <a:rPr sz="2200" b="1">
                 <a:solidFill>
                   <a:srgbClr val="0E2A52"/>
                 </a:solidFill>
                 <a:latin typeface="Segoe UI"/>
               </a:rPr>
-              <a:t>Richer dependence, same null</a:t>
+              <a:t>Where the claims could be pushed</a:t>
             </a:r>
           </a:p>
           <a:p>
@@ -6161,7 +6725,7 @@
               </a:spcAft>
             </a:pPr>
             <a:r>
-              <a:rPr sz="1400" b="1">
+              <a:rPr sz="1500" b="1">
                 <a:solidFill>
                   <a:srgbClr val="E69F00"/>
                 </a:solidFill>
@@ -6170,13 +6734,13 @@
               <a:t>●  </a:t>
             </a:r>
             <a:r>
-              <a:rPr sz="1800" b="0">
+              <a:rPr sz="1900" b="0">
                 <a:solidFill>
                   <a:srgbClr val="16202E"/>
                 </a:solidFill>
                 <a:latin typeface="Segoe UI"/>
               </a:rPr>
-              <a:t>“Maybe covariance is just the wrong model.” We test richer ones.</a:t>
+              <a:t>One canonical workload (splittable load, ramp limits); a sharply different cost geometry could re-weight the covariance term.</a:t>
             </a:r>
           </a:p>
           <a:p>
@@ -6192,7 +6756,7 @@
               </a:spcAft>
             </a:pPr>
             <a:r>
-              <a:rPr sz="1400" b="1">
+              <a:rPr sz="1500" b="1">
                 <a:solidFill>
                   <a:srgbClr val="E69F00"/>
                 </a:solidFill>
@@ -6201,13 +6765,13 @@
               <a:t>●  </a:t>
             </a:r>
             <a:r>
-              <a:rPr sz="1800" b="0">
+              <a:rPr sz="1900" b="0">
                 <a:solidFill>
                   <a:srgbClr val="16202E"/>
                 </a:solidFill>
                 <a:latin typeface="Segoe UI"/>
               </a:rPr>
-              <a:t>Gaussian, lower-tail Clayton, and the maximal comonotone copula.</a:t>
+              <a:t>Primary read is a single held-out year; walk-forward reproduces it, but multi-year evaluation would strengthen external validity.</a:t>
             </a:r>
           </a:p>
           <a:p>
@@ -6223,7 +6787,7 @@
               </a:spcAft>
             </a:pPr>
             <a:r>
-              <a:rPr sz="1400" b="1">
+              <a:rPr sz="1500" b="1">
                 <a:solidFill>
                   <a:srgbClr val="E69F00"/>
                 </a:solidFill>
@@ -6232,13 +6796,44 @@
               <a:t>●  </a:t>
             </a:r>
             <a:r>
-              <a:rPr sz="1800" b="1">
-                <a:solidFill>
-                  <a:srgbClr val="4A7C59"/>
-                </a:solidFill>
-                <a:latin typeface="Segoe UI"/>
-              </a:rPr>
-              <a:t>All leave the null intact; an a-priori bound caps the achievable gain.</a:t>
+              <a:rPr sz="1900" b="0">
+                <a:solidFill>
+                  <a:srgbClr val="16202E"/>
+                </a:solidFill>
+                <a:latin typeface="Segoe UI"/>
+              </a:rPr>
+              <a:t>Results generalize to grids where the diurnal mean dominates residual covariance: an empirical regularity, not a universal law.</a:t>
+            </a:r>
+          </a:p>
+          <a:p>
+            <a:pPr>
+              <a:lnSpc>
+                <a:spcPct val="112000"/>
+              </a:lnSpc>
+              <a:spcBef>
+                <a:spcPts val="0"/>
+              </a:spcBef>
+              <a:spcAft>
+                <a:spcPts val="1500"/>
+              </a:spcAft>
+            </a:pPr>
+            <a:r>
+              <a:rPr sz="1500" b="1">
+                <a:solidFill>
+                  <a:srgbClr val="E69F00"/>
+                </a:solidFill>
+                <a:latin typeface="Segoe UI"/>
+              </a:rPr>
+              <a:t>●  </a:t>
+            </a:r>
+            <a:r>
+              <a:rPr sz="1900" b="0">
+                <a:solidFill>
+                  <a:srgbClr val="16202E"/>
+                </a:solidFill>
+                <a:latin typeface="Segoe UI"/>
+              </a:rPr>
+              <a:t>The crossover is characterized, not observed: a grid with severe emergencies past M* near 3 would activate the robust layer.</a:t>
             </a:r>
           </a:p>
         </p:txBody>
@@ -6486,7 +7081,7 @@
                 </a:solidFill>
                 <a:latin typeface="Georgia"/>
               </a:rPr>
-              <a:t>What the null means</a:t>
+              <a:t>Conclusions and contributions</a:t>
             </a:r>
           </a:p>
         </p:txBody>
@@ -6575,7 +7170,7 @@
                 </a:solidFill>
                 <a:latin typeface="Segoe UI"/>
               </a:rPr>
-              <a:t>Spatial correlation &amp; carbon-aware DRO scheduling</a:t>
+              <a:t>The Price of Sophistication: carbon-aware data-center scheduling</a:t>
             </a:r>
           </a:p>
         </p:txBody>
@@ -6627,102 +7222,14 @@
       </p:sp>
       <p:sp>
         <p:nvSpPr>
-          <p:cNvPr id="10" name="Rectangle 9"/>
-          <p:cNvSpPr/>
-          <p:nvPr/>
-        </p:nvSpPr>
-        <p:spPr>
-          <a:xfrm>
-            <a:off x="640080" y="1417320"/>
-            <a:ext cx="10881360" cy="2011680"/>
-          </a:xfrm>
-          <a:prstGeom prst="rect">
-            <a:avLst/>
-          </a:prstGeom>
-          <a:solidFill>
-            <a:srgbClr val="F3F6FB"/>
-          </a:solidFill>
-          <a:ln>
-            <a:noFill/>
-          </a:ln>
-          <a:effectLst/>
-        </p:spPr>
-        <p:style>
-          <a:lnRef idx="1">
-            <a:schemeClr val="accent1"/>
-          </a:lnRef>
-          <a:fillRef idx="3">
-            <a:schemeClr val="accent1"/>
-          </a:fillRef>
-          <a:effectRef idx="2">
-            <a:schemeClr val="accent1"/>
-          </a:effectRef>
-          <a:fontRef idx="minor">
-            <a:schemeClr val="lt1"/>
-          </a:fontRef>
-        </p:style>
-        <p:txBody>
-          <a:bodyPr rtlCol="0" anchor="ctr"/>
-          <a:lstStyle/>
-          <a:p>
-            <a:pPr algn="ctr"/>
-          </a:p>
-        </p:txBody>
-      </p:sp>
-      <p:sp>
-        <p:nvSpPr>
-          <p:cNvPr id="11" name="Rectangle 10"/>
-          <p:cNvSpPr/>
-          <p:nvPr/>
-        </p:nvSpPr>
-        <p:spPr>
-          <a:xfrm>
-            <a:off x="640080" y="1417320"/>
-            <a:ext cx="128016" cy="2011680"/>
-          </a:xfrm>
-          <a:prstGeom prst="rect">
-            <a:avLst/>
-          </a:prstGeom>
-          <a:solidFill>
-            <a:srgbClr val="4A7C59"/>
-          </a:solidFill>
-          <a:ln>
-            <a:noFill/>
-          </a:ln>
-          <a:effectLst/>
-        </p:spPr>
-        <p:style>
-          <a:lnRef idx="1">
-            <a:schemeClr val="accent1"/>
-          </a:lnRef>
-          <a:fillRef idx="3">
-            <a:schemeClr val="accent1"/>
-          </a:fillRef>
-          <a:effectRef idx="2">
-            <a:schemeClr val="accent1"/>
-          </a:effectRef>
-          <a:fontRef idx="minor">
-            <a:schemeClr val="lt1"/>
-          </a:fontRef>
-        </p:style>
-        <p:txBody>
-          <a:bodyPr rtlCol="0" anchor="ctr"/>
-          <a:lstStyle/>
-          <a:p>
-            <a:pPr algn="ctr"/>
-          </a:p>
-        </p:txBody>
-      </p:sp>
-      <p:sp>
-        <p:nvSpPr>
-          <p:cNvPr id="12" name="TextBox 11"/>
+          <p:cNvPr id="10" name="TextBox 9"/>
           <p:cNvSpPr txBox="1"/>
           <p:nvPr/>
         </p:nvSpPr>
         <p:spPr>
           <a:xfrm>
-            <a:off x="1005840" y="1600200"/>
-            <a:ext cx="10241280" cy="1737360"/>
+            <a:off x="640080" y="1371600"/>
+            <a:ext cx="10881360" cy="4480560"/>
           </a:xfrm>
           <a:prstGeom prst="rect">
             <a:avLst/>
@@ -6730,163 +7237,151 @@
           <a:noFill/>
         </p:spPr>
         <p:txBody>
-          <a:bodyPr wrap="square" anchor="t" lIns="0" rIns="0" tIns="0" bIns="0">
+          <a:bodyPr wrap="square" lIns="0" rIns="0" tIns="0" bIns="0">
             <a:spAutoFit/>
           </a:bodyPr>
           <a:lstStyle/>
           <a:p>
-            <a:pPr algn="l">
-              <a:lnSpc>
-                <a:spcPct val="106000"/>
-              </a:lnSpc>
-              <a:spcBef>
-                <a:spcPts val="0"/>
-              </a:spcBef>
-              <a:spcAft>
-                <a:spcPts val="1000"/>
-              </a:spcAft>
-            </a:pPr>
-            <a:r>
-              <a:rPr sz="2300" b="1">
+            <a:pPr>
+              <a:lnSpc>
+                <a:spcPct val="112000"/>
+              </a:lnSpc>
+              <a:spcAft>
+                <a:spcPts val="1700"/>
+              </a:spcAft>
+            </a:pPr>
+            <a:r>
+              <a:rPr sz="2200" b="1">
                 <a:solidFill>
                   <a:srgbClr val="0E2A52"/>
                 </a:solidFill>
-                <a:latin typeface="Georgia"/>
-              </a:rPr>
-              <a:t>Per-region marginal schedulers capture essentially all the value.</a:t>
-            </a:r>
-          </a:p>
-          <a:p>
-            <a:pPr algn="l">
-              <a:lnSpc>
-                <a:spcPct val="106000"/>
-              </a:lnSpc>
-              <a:spcBef>
-                <a:spcPts val="0"/>
-              </a:spcBef>
-              <a:spcAft>
-                <a:spcPts val="1000"/>
-              </a:spcAft>
-            </a:pPr>
-            <a:r>
-              <a:rPr sz="1800" b="0">
+                <a:latin typeface="Segoe UI"/>
+              </a:rPr>
+              <a:t>What this thesis delivers</a:t>
+            </a:r>
+          </a:p>
+          <a:p>
+            <a:pPr>
+              <a:lnSpc>
+                <a:spcPct val="112000"/>
+              </a:lnSpc>
+              <a:spcBef>
+                <a:spcPts val="0"/>
+              </a:spcBef>
+              <a:spcAft>
+                <a:spcPts val="1500"/>
+              </a:spcAft>
+            </a:pPr>
+            <a:r>
+              <a:rPr sz="1500" b="1">
+                <a:solidFill>
+                  <a:srgbClr val="E69F00"/>
+                </a:solidFill>
+                <a:latin typeface="Segoe UI"/>
+              </a:rPr>
+              <a:t>●  </a:t>
+            </a:r>
+            <a:r>
+              <a:rPr sz="1900" b="1">
+                <a:solidFill>
+                  <a:srgbClr val="4A7C59"/>
+                </a:solidFill>
+                <a:latin typeface="Segoe UI"/>
+              </a:rPr>
+              <a:t>A working day-ahead migration scheduler with honest savings: a 4.0 to 9.9% CVaR reduction over the Phi=0 baseline, the dominant lever.</a:t>
+            </a:r>
+          </a:p>
+          <a:p>
+            <a:pPr>
+              <a:lnSpc>
+                <a:spcPct val="112000"/>
+              </a:lnSpc>
+              <a:spcBef>
+                <a:spcPts val="0"/>
+              </a:spcBef>
+              <a:spcAft>
+                <a:spcPts val="1500"/>
+              </a:spcAft>
+            </a:pPr>
+            <a:r>
+              <a:rPr sz="1500" b="1">
+                <a:solidFill>
+                  <a:srgbClr val="E69F00"/>
+                </a:solidFill>
+                <a:latin typeface="Segoe UI"/>
+              </a:rPr>
+              <a:t>●  </a:t>
+            </a:r>
+            <a:r>
+              <a:rPr sz="1900" b="0">
                 <a:solidFill>
                   <a:srgbClr val="16202E"/>
                 </a:solidFill>
                 <a:latin typeface="Segoe UI"/>
               </a:rPr>
-              <a:t>Modelling the joint distribution adds complexity and solve time for no robust scheduling benefit.</a:t>
-            </a:r>
-          </a:p>
-        </p:txBody>
-      </p:sp>
-      <p:sp>
-        <p:nvSpPr>
-          <p:cNvPr id="13" name="Rectangle 12"/>
-          <p:cNvSpPr/>
-          <p:nvPr/>
-        </p:nvSpPr>
-        <p:spPr>
-          <a:xfrm>
-            <a:off x="640080" y="3703320"/>
-            <a:ext cx="10881360" cy="2011680"/>
-          </a:xfrm>
-          <a:prstGeom prst="rect">
-            <a:avLst/>
-          </a:prstGeom>
-          <a:solidFill>
-            <a:srgbClr val="0E2A52"/>
-          </a:solidFill>
-          <a:ln>
-            <a:noFill/>
-          </a:ln>
-          <a:effectLst/>
-        </p:spPr>
-        <p:style>
-          <a:lnRef idx="1">
-            <a:schemeClr val="accent1"/>
-          </a:lnRef>
-          <a:fillRef idx="3">
-            <a:schemeClr val="accent1"/>
-          </a:fillRef>
-          <a:effectRef idx="2">
-            <a:schemeClr val="accent1"/>
-          </a:effectRef>
-          <a:fontRef idx="minor">
-            <a:schemeClr val="lt1"/>
-          </a:fontRef>
-        </p:style>
-        <p:txBody>
-          <a:bodyPr rtlCol="0" anchor="ctr"/>
-          <a:lstStyle/>
-          <a:p>
-            <a:pPr algn="ctr"/>
-          </a:p>
-        </p:txBody>
-      </p:sp>
-      <p:sp>
-        <p:nvSpPr>
-          <p:cNvPr id="14" name="TextBox 13"/>
-          <p:cNvSpPr txBox="1"/>
-          <p:nvPr/>
-        </p:nvSpPr>
-        <p:spPr>
-          <a:xfrm>
-            <a:off x="1005840" y="3886200"/>
-            <a:ext cx="10241280" cy="1737360"/>
-          </a:xfrm>
-          <a:prstGeom prst="rect">
-            <a:avLst/>
-          </a:prstGeom>
-          <a:noFill/>
-        </p:spPr>
-        <p:txBody>
-          <a:bodyPr wrap="square" anchor="t" lIns="0" rIns="0" tIns="0" bIns="0">
-            <a:spAutoFit/>
-          </a:bodyPr>
-          <a:lstStyle/>
-          <a:p>
-            <a:pPr algn="l">
-              <a:lnSpc>
-                <a:spcPct val="106000"/>
-              </a:lnSpc>
-              <a:spcBef>
-                <a:spcPts val="0"/>
-              </a:spcBef>
-              <a:spcAft>
-                <a:spcPts val="1000"/>
-              </a:spcAft>
-            </a:pPr>
-            <a:r>
-              <a:rPr sz="2300" b="1">
-                <a:solidFill>
-                  <a:srgbClr val="FFFFFF"/>
-                </a:solidFill>
-                <a:latin typeface="Georgia"/>
-              </a:rPr>
-              <a:t>Spatial value, if any, lives in an active transfer channel.</a:t>
-            </a:r>
-          </a:p>
-          <a:p>
-            <a:pPr algn="l">
-              <a:lnSpc>
-                <a:spcPct val="106000"/>
-              </a:lnSpc>
-              <a:spcBef>
-                <a:spcPts val="0"/>
-              </a:spcBef>
-              <a:spcAft>
-                <a:spcPts val="1000"/>
-              </a:spcAft>
-            </a:pPr>
-            <a:r>
-              <a:rPr sz="1800" b="0">
-                <a:solidFill>
-                  <a:srgbClr val="CDD6E4"/>
-                </a:solidFill>
-                <a:latin typeface="Segoe UI"/>
-              </a:rPr>
-              <a:t>Not in a richer passive dependence model, but in actually moving load between regions. That is Phase 3.</a:t>
+              <a:t>A screening rule: passive covariance and copulas add nothing, with a mean-dominance bound that says why.</a:t>
+            </a:r>
+          </a:p>
+          <a:p>
+            <a:pPr>
+              <a:lnSpc>
+                <a:spcPct val="112000"/>
+              </a:lnSpc>
+              <a:spcBef>
+                <a:spcPts val="0"/>
+              </a:spcBef>
+              <a:spcAft>
+                <a:spcPts val="1500"/>
+              </a:spcAft>
+            </a:pPr>
+            <a:r>
+              <a:rPr sz="1500" b="1">
+                <a:solidFill>
+                  <a:srgbClr val="E69F00"/>
+                </a:solidFill>
+                <a:latin typeface="Segoe UI"/>
+              </a:rPr>
+              <a:t>●  </a:t>
+            </a:r>
+            <a:r>
+              <a:rPr sz="1900" b="0">
+                <a:solidFill>
+                  <a:srgbClr val="16202E"/>
+                </a:solidFill>
+                <a:latin typeface="Segoe UI"/>
+              </a:rPr>
+              <a:t>A price-of-robustness decision rule with a tested, data-grounded bound (M near 1.4 below M* near 3).</a:t>
+            </a:r>
+          </a:p>
+          <a:p>
+            <a:pPr>
+              <a:lnSpc>
+                <a:spcPct val="112000"/>
+              </a:lnSpc>
+              <a:spcBef>
+                <a:spcPts val="0"/>
+              </a:spcBef>
+              <a:spcAft>
+                <a:spcPts val="1500"/>
+              </a:spcAft>
+            </a:pPr>
+            <a:r>
+              <a:rPr sz="1500" b="1">
+                <a:solidFill>
+                  <a:srgbClr val="E69F00"/>
+                </a:solidFill>
+                <a:latin typeface="Segoe UI"/>
+              </a:rPr>
+              <a:t>●  </a:t>
+            </a:r>
+            <a:r>
+              <a:rPr sz="1900" b="1">
+                <a:solidFill>
+                  <a:srgbClr val="0E2A52"/>
+                </a:solidFill>
+                <a:latin typeface="Segoe UI"/>
+              </a:rPr>
+              <a:t>A reproducible, pre-registered pipeline under 194 unit tests.</a:t>
             </a:r>
           </a:p>
         </p:txBody>
@@ -6905,7 +7400,7 @@
     <p:bg>
       <p:bgPr>
         <a:solidFill>
-          <a:srgbClr val="FFFFFF"/>
+          <a:srgbClr val="0E2A52"/>
         </a:solidFill>
         <a:effectLst/>
       </p:bgPr>
@@ -6926,51 +7421,7 @@
         <p:spPr>
           <a:xfrm>
             <a:off x="0" y="0"/>
-            <a:ext cx="12191695" cy="950976"/>
-          </a:xfrm>
-          <a:prstGeom prst="rect">
-            <a:avLst/>
-          </a:prstGeom>
-          <a:solidFill>
-            <a:srgbClr val="0E2A52"/>
-          </a:solidFill>
-          <a:ln>
-            <a:noFill/>
-          </a:ln>
-          <a:effectLst/>
-        </p:spPr>
-        <p:style>
-          <a:lnRef idx="1">
-            <a:schemeClr val="accent1"/>
-          </a:lnRef>
-          <a:fillRef idx="3">
-            <a:schemeClr val="accent1"/>
-          </a:fillRef>
-          <a:effectRef idx="2">
-            <a:schemeClr val="accent1"/>
-          </a:effectRef>
-          <a:fontRef idx="minor">
-            <a:schemeClr val="lt1"/>
-          </a:fontRef>
-        </p:style>
-        <p:txBody>
-          <a:bodyPr rtlCol="0" anchor="ctr"/>
-          <a:lstStyle/>
-          <a:p>
-            <a:pPr algn="ctr"/>
-          </a:p>
-        </p:txBody>
-      </p:sp>
-      <p:sp>
-        <p:nvSpPr>
-          <p:cNvPr id="3" name="Rectangle 2"/>
-          <p:cNvSpPr/>
-          <p:nvPr/>
-        </p:nvSpPr>
-        <p:spPr>
-          <a:xfrm>
-            <a:off x="0" y="950976"/>
-            <a:ext cx="12191695" cy="54864"/>
+            <a:ext cx="256032" cy="6858000"/>
           </a:xfrm>
           <a:prstGeom prst="rect">
             <a:avLst/>
@@ -7007,16 +7458,61 @@
       </p:sp>
       <p:sp>
         <p:nvSpPr>
-          <p:cNvPr id="4" name="Oval 3"/>
+          <p:cNvPr id="3" name="TextBox 2"/>
+          <p:cNvSpPr txBox="1"/>
+          <p:nvPr/>
+        </p:nvSpPr>
+        <p:spPr>
+          <a:xfrm>
+            <a:off x="868680" y="822960"/>
+            <a:ext cx="10424160" cy="914400"/>
+          </a:xfrm>
+          <a:prstGeom prst="rect">
+            <a:avLst/>
+          </a:prstGeom>
+          <a:noFill/>
+        </p:spPr>
+        <p:txBody>
+          <a:bodyPr wrap="square" anchor="t" lIns="0" rIns="0" tIns="0" bIns="0">
+            <a:spAutoFit/>
+          </a:bodyPr>
+          <a:lstStyle/>
+          <a:p>
+            <a:pPr algn="l">
+              <a:lnSpc>
+                <a:spcPct val="106000"/>
+              </a:lnSpc>
+              <a:spcBef>
+                <a:spcPts val="0"/>
+              </a:spcBef>
+              <a:spcAft>
+                <a:spcPts val="600"/>
+              </a:spcAft>
+            </a:pPr>
+            <a:r>
+              <a:rPr sz="3200" b="1">
+                <a:solidFill>
+                  <a:srgbClr val="FFFFFF"/>
+                </a:solidFill>
+                <a:latin typeface="Georgia"/>
+              </a:rPr>
+              <a:t>The takeaway, and thank you</a:t>
+            </a:r>
+          </a:p>
+        </p:txBody>
+      </p:sp>
+      <p:sp>
+        <p:nvSpPr>
+          <p:cNvPr id="4" name="Rectangle 3"/>
           <p:cNvSpPr/>
           <p:nvPr/>
         </p:nvSpPr>
         <p:spPr>
           <a:xfrm>
-            <a:off x="457200" y="246888"/>
-            <a:ext cx="457200" cy="457200"/>
-          </a:xfrm>
-          <a:prstGeom prst="ellipse">
+            <a:off x="868680" y="1627632"/>
+            <a:ext cx="2377440" cy="45720"/>
+          </a:xfrm>
+          <a:prstGeom prst="rect">
             <a:avLst/>
           </a:prstGeom>
           <a:solidFill>
@@ -7057,8 +7553,8 @@
         </p:nvSpPr>
         <p:spPr>
           <a:xfrm>
-            <a:off x="457200" y="246888"/>
-            <a:ext cx="457200" cy="457200"/>
+            <a:off x="868680" y="1965960"/>
+            <a:ext cx="10424160" cy="457200"/>
           </a:xfrm>
           <a:prstGeom prst="rect">
             <a:avLst/>
@@ -7066,12 +7562,12 @@
           <a:noFill/>
         </p:spPr>
         <p:txBody>
-          <a:bodyPr wrap="square" anchor="ctr" lIns="0" rIns="0" tIns="0" bIns="0">
+          <a:bodyPr wrap="square" anchor="t" lIns="0" rIns="0" tIns="0" bIns="0">
             <a:spAutoFit/>
           </a:bodyPr>
           <a:lstStyle/>
           <a:p>
-            <a:pPr algn="ctr">
+            <a:pPr algn="l">
               <a:lnSpc>
                 <a:spcPct val="106000"/>
               </a:lnSpc>
@@ -7083,13 +7579,13 @@
               </a:spcAft>
             </a:pPr>
             <a:r>
-              <a:rPr sz="2200" b="1">
-                <a:solidFill>
-                  <a:srgbClr val="0E2A52"/>
-                </a:solidFill>
-                <a:latin typeface="Georgia"/>
-              </a:rPr>
-              <a:t>16</a:t>
+              <a:rPr sz="1900" b="1">
+                <a:solidFill>
+                  <a:srgbClr val="E69F00"/>
+                </a:solidFill>
+                <a:latin typeface="Segoe UI"/>
+              </a:rPr>
+              <a:t>The rule in one line</a:t>
             </a:r>
           </a:p>
         </p:txBody>
@@ -7102,187 +7598,8 @@
         </p:nvSpPr>
         <p:spPr>
           <a:xfrm>
-            <a:off x="1097280" y="0"/>
-            <a:ext cx="9997135" cy="950976"/>
-          </a:xfrm>
-          <a:prstGeom prst="rect">
-            <a:avLst/>
-          </a:prstGeom>
-          <a:noFill/>
-        </p:spPr>
-        <p:txBody>
-          <a:bodyPr wrap="square" anchor="ctr" lIns="0" rIns="0" tIns="0" bIns="0">
-            <a:spAutoFit/>
-          </a:bodyPr>
-          <a:lstStyle/>
-          <a:p>
-            <a:pPr algn="l">
-              <a:lnSpc>
-                <a:spcPct val="106000"/>
-              </a:lnSpc>
-              <a:spcBef>
-                <a:spcPts val="0"/>
-              </a:spcBef>
-              <a:spcAft>
-                <a:spcPts val="600"/>
-              </a:spcAft>
-            </a:pPr>
-            <a:r>
-              <a:rPr sz="2700" b="1">
-                <a:solidFill>
-                  <a:srgbClr val="FFFFFF"/>
-                </a:solidFill>
-                <a:latin typeface="Georgia"/>
-              </a:rPr>
-              <a:t>Limitations, stated honestly</a:t>
-            </a:r>
-          </a:p>
-        </p:txBody>
-      </p:sp>
-      <p:sp>
-        <p:nvSpPr>
-          <p:cNvPr id="7" name="Rectangle 6"/>
-          <p:cNvSpPr/>
-          <p:nvPr/>
-        </p:nvSpPr>
-        <p:spPr>
-          <a:xfrm>
-            <a:off x="457200" y="6473952"/>
-            <a:ext cx="11277295" cy="10972"/>
-          </a:xfrm>
-          <a:prstGeom prst="rect">
-            <a:avLst/>
-          </a:prstGeom>
-          <a:solidFill>
-            <a:srgbClr val="D9DEE6"/>
-          </a:solidFill>
-          <a:ln>
-            <a:noFill/>
-          </a:ln>
-          <a:effectLst/>
-        </p:spPr>
-        <p:style>
-          <a:lnRef idx="1">
-            <a:schemeClr val="accent1"/>
-          </a:lnRef>
-          <a:fillRef idx="3">
-            <a:schemeClr val="accent1"/>
-          </a:fillRef>
-          <a:effectRef idx="2">
-            <a:schemeClr val="accent1"/>
-          </a:effectRef>
-          <a:fontRef idx="minor">
-            <a:schemeClr val="lt1"/>
-          </a:fontRef>
-        </p:style>
-        <p:txBody>
-          <a:bodyPr rtlCol="0" anchor="ctr"/>
-          <a:lstStyle/>
-          <a:p>
-            <a:pPr algn="ctr"/>
-          </a:p>
-        </p:txBody>
-      </p:sp>
-      <p:sp>
-        <p:nvSpPr>
-          <p:cNvPr id="8" name="TextBox 7"/>
-          <p:cNvSpPr txBox="1"/>
-          <p:nvPr/>
-        </p:nvSpPr>
-        <p:spPr>
-          <a:xfrm>
-            <a:off x="457200" y="6492240"/>
-            <a:ext cx="7315200" cy="310896"/>
-          </a:xfrm>
-          <a:prstGeom prst="rect">
-            <a:avLst/>
-          </a:prstGeom>
-          <a:noFill/>
-        </p:spPr>
-        <p:txBody>
-          <a:bodyPr wrap="square" anchor="ctr" lIns="0" rIns="0" tIns="0" bIns="0">
-            <a:spAutoFit/>
-          </a:bodyPr>
-          <a:lstStyle/>
-          <a:p>
-            <a:pPr algn="l">
-              <a:lnSpc>
-                <a:spcPct val="106000"/>
-              </a:lnSpc>
-              <a:spcBef>
-                <a:spcPts val="0"/>
-              </a:spcBef>
-              <a:spcAft>
-                <a:spcPts val="600"/>
-              </a:spcAft>
-            </a:pPr>
-            <a:r>
-              <a:rPr sz="1000" b="0">
-                <a:solidFill>
-                  <a:srgbClr val="5B6675"/>
-                </a:solidFill>
-                <a:latin typeface="Segoe UI"/>
-              </a:rPr>
-              <a:t>Spatial correlation &amp; carbon-aware DRO scheduling</a:t>
-            </a:r>
-          </a:p>
-        </p:txBody>
-      </p:sp>
-      <p:sp>
-        <p:nvSpPr>
-          <p:cNvPr id="9" name="TextBox 8"/>
-          <p:cNvSpPr txBox="1"/>
-          <p:nvPr/>
-        </p:nvSpPr>
-        <p:spPr>
-          <a:xfrm>
-            <a:off x="9905695" y="6492240"/>
-            <a:ext cx="1828800" cy="310896"/>
-          </a:xfrm>
-          <a:prstGeom prst="rect">
-            <a:avLst/>
-          </a:prstGeom>
-          <a:noFill/>
-        </p:spPr>
-        <p:txBody>
-          <a:bodyPr wrap="square" anchor="ctr" lIns="0" rIns="0" tIns="0" bIns="0">
-            <a:spAutoFit/>
-          </a:bodyPr>
-          <a:lstStyle/>
-          <a:p>
-            <a:pPr algn="r">
-              <a:lnSpc>
-                <a:spcPct val="106000"/>
-              </a:lnSpc>
-              <a:spcBef>
-                <a:spcPts val="0"/>
-              </a:spcBef>
-              <a:spcAft>
-                <a:spcPts val="600"/>
-              </a:spcAft>
-            </a:pPr>
-            <a:r>
-              <a:rPr sz="1000" b="0">
-                <a:solidFill>
-                  <a:srgbClr val="5B6675"/>
-                </a:solidFill>
-                <a:latin typeface="Segoe UI"/>
-              </a:rPr>
-              <a:t>M. Ortiz Togashi  ·  16</a:t>
-            </a:r>
-          </a:p>
-        </p:txBody>
-      </p:sp>
-      <p:sp>
-        <p:nvSpPr>
-          <p:cNvPr id="10" name="TextBox 9"/>
-          <p:cNvSpPr txBox="1"/>
-          <p:nvPr/>
-        </p:nvSpPr>
-        <p:spPr>
-          <a:xfrm>
-            <a:off x="640080" y="1371600"/>
-            <a:ext cx="10881360" cy="4480560"/>
+            <a:off x="868680" y="2514600"/>
+            <a:ext cx="10424160" cy="2743200"/>
           </a:xfrm>
           <a:prstGeom prst="rect">
             <a:avLst/>
@@ -7299,142 +7616,168 @@
               <a:lnSpc>
                 <a:spcPct val="112000"/>
               </a:lnSpc>
-              <a:spcAft>
-                <a:spcPts val="1800"/>
+              <a:spcBef>
+                <a:spcPts val="0"/>
+              </a:spcBef>
+              <a:spcAft>
+                <a:spcPts val="1400"/>
+              </a:spcAft>
+            </a:pPr>
+            <a:r>
+              <a:rPr sz="1400" b="1">
+                <a:solidFill>
+                  <a:srgbClr val="E69F00"/>
+                </a:solidFill>
+                <a:latin typeface="Segoe UI"/>
+              </a:rPr>
+              <a:t>●  </a:t>
+            </a:r>
+            <a:r>
+              <a:rPr sz="1800" b="0">
+                <a:solidFill>
+                  <a:srgbClr val="CDD6E4"/>
+                </a:solidFill>
+                <a:latin typeface="Segoe UI"/>
+              </a:rPr>
+              <a:t>Always schedule per-region.</a:t>
+            </a:r>
+          </a:p>
+          <a:p>
+            <a:pPr>
+              <a:lnSpc>
+                <a:spcPct val="112000"/>
+              </a:lnSpc>
+              <a:spcBef>
+                <a:spcPts val="0"/>
+              </a:spcBef>
+              <a:spcAft>
+                <a:spcPts val="1400"/>
+              </a:spcAft>
+            </a:pPr>
+            <a:r>
+              <a:rPr sz="1400" b="1">
+                <a:solidFill>
+                  <a:srgbClr val="E69F00"/>
+                </a:solidFill>
+                <a:latin typeface="Segoe UI"/>
+              </a:rPr>
+              <a:t>●  </a:t>
+            </a:r>
+            <a:r>
+              <a:rPr sz="1800" b="0">
+                <a:solidFill>
+                  <a:srgbClr val="CDD6E4"/>
+                </a:solidFill>
+                <a:latin typeface="Segoe UI"/>
+              </a:rPr>
+              <a:t>Add inter-region transfer: this is the lever, 4.0 to 9.9% over Phi=0.</a:t>
+            </a:r>
+          </a:p>
+          <a:p>
+            <a:pPr>
+              <a:lnSpc>
+                <a:spcPct val="112000"/>
+              </a:lnSpc>
+              <a:spcBef>
+                <a:spcPts val="0"/>
+              </a:spcBef>
+              <a:spcAft>
+                <a:spcPts val="1400"/>
+              </a:spcAft>
+            </a:pPr>
+            <a:r>
+              <a:rPr sz="1400" b="1">
+                <a:solidFill>
+                  <a:srgbClr val="E69F00"/>
+                </a:solidFill>
+                <a:latin typeface="Segoe UI"/>
+              </a:rPr>
+              <a:t>●  </a:t>
+            </a:r>
+            <a:r>
+              <a:rPr sz="1800" b="0">
+                <a:solidFill>
+                  <a:srgbClr val="CDD6E4"/>
+                </a:solidFill>
+                <a:latin typeface="Segoe UI"/>
+              </a:rPr>
+              <a:t>Skip covariance and copulas: they add nothing.</a:t>
+            </a:r>
+          </a:p>
+          <a:p>
+            <a:pPr>
+              <a:lnSpc>
+                <a:spcPct val="112000"/>
+              </a:lnSpc>
+              <a:spcBef>
+                <a:spcPts val="0"/>
+              </a:spcBef>
+              <a:spcAft>
+                <a:spcPts val="1400"/>
+              </a:spcAft>
+            </a:pPr>
+            <a:r>
+              <a:rPr sz="1400" b="1">
+                <a:solidFill>
+                  <a:srgbClr val="E69F00"/>
+                </a:solidFill>
+                <a:latin typeface="Segoe UI"/>
+              </a:rPr>
+              <a:t>●  </a:t>
+            </a:r>
+            <a:r>
+              <a:rPr sz="1800" b="0">
+                <a:solidFill>
+                  <a:srgbClr val="CDD6E4"/>
+                </a:solidFill>
+                <a:latin typeface="Segoe UI"/>
+              </a:rPr>
+              <a:t>Robustify only if you expect emergencies past M* near 3.</a:t>
+            </a:r>
+          </a:p>
+        </p:txBody>
+      </p:sp>
+      <p:sp>
+        <p:nvSpPr>
+          <p:cNvPr id="7" name="TextBox 6"/>
+          <p:cNvSpPr txBox="1"/>
+          <p:nvPr/>
+        </p:nvSpPr>
+        <p:spPr>
+          <a:xfrm>
+            <a:off x="868680" y="5852160"/>
+            <a:ext cx="10424160" cy="731520"/>
+          </a:xfrm>
+          <a:prstGeom prst="rect">
+            <a:avLst/>
+          </a:prstGeom>
+          <a:noFill/>
+        </p:spPr>
+        <p:txBody>
+          <a:bodyPr wrap="square" anchor="t" lIns="0" rIns="0" tIns="0" bIns="0">
+            <a:spAutoFit/>
+          </a:bodyPr>
+          <a:lstStyle/>
+          <a:p>
+            <a:pPr algn="l">
+              <a:lnSpc>
+                <a:spcPct val="106000"/>
+              </a:lnSpc>
+              <a:spcBef>
+                <a:spcPts val="0"/>
+              </a:spcBef>
+              <a:spcAft>
+                <a:spcPts val="600"/>
               </a:spcAft>
             </a:pPr>
             <a:r>
               <a:rPr sz="2200" b="1">
                 <a:solidFill>
-                  <a:srgbClr val="0E2A52"/>
-                </a:solidFill>
-                <a:latin typeface="Segoe UI"/>
-              </a:rPr>
-              <a:t>Where the result could be pushed</a:t>
-            </a:r>
-          </a:p>
-          <a:p>
-            <a:pPr>
-              <a:lnSpc>
-                <a:spcPct val="112000"/>
-              </a:lnSpc>
-              <a:spcBef>
-                <a:spcPts val="0"/>
-              </a:spcBef>
-              <a:spcAft>
-                <a:spcPts val="1600"/>
-              </a:spcAft>
-            </a:pPr>
-            <a:r>
-              <a:rPr sz="1500" b="1">
-                <a:solidFill>
                   <a:srgbClr val="E69F00"/>
                 </a:solidFill>
-                <a:latin typeface="Segoe UI"/>
-              </a:rPr>
-              <a:t>●  </a:t>
-            </a:r>
-            <a:r>
-              <a:rPr sz="1900" b="0">
-                <a:solidFill>
-                  <a:srgbClr val="16202E"/>
-                </a:solidFill>
-                <a:latin typeface="Segoe UI"/>
-              </a:rPr>
-              <a:t>Correlated grids are a best-case stress test: compute shifting is logical (over the network), not electrical, so we hand the joint model its best shot.</a:t>
-            </a:r>
-          </a:p>
-          <a:p>
-            <a:pPr>
-              <a:lnSpc>
-                <a:spcPct val="112000"/>
-              </a:lnSpc>
-              <a:spcBef>
-                <a:spcPts val="0"/>
-              </a:spcBef>
-              <a:spcAft>
-                <a:spcPts val="1600"/>
-              </a:spcAft>
-            </a:pPr>
-            <a:r>
-              <a:rPr sz="1500" b="1">
-                <a:solidFill>
-                  <a:srgbClr val="E69F00"/>
-                </a:solidFill>
-                <a:latin typeface="Segoe UI"/>
-              </a:rPr>
-              <a:t>●  </a:t>
-            </a:r>
-            <a:r>
-              <a:rPr sz="1900" b="0">
-                <a:solidFill>
-                  <a:srgbClr val="16202E"/>
-                </a:solidFill>
-                <a:latin typeface="Segoe UI"/>
-              </a:rPr>
-              <a:t>Results are specific to the grids and the study period; carbon series evolve.</a:t>
-            </a:r>
-          </a:p>
-          <a:p>
-            <a:pPr>
-              <a:lnSpc>
-                <a:spcPct val="112000"/>
-              </a:lnSpc>
-              <a:spcBef>
-                <a:spcPts val="0"/>
-              </a:spcBef>
-              <a:spcAft>
-                <a:spcPts val="1600"/>
-              </a:spcAft>
-            </a:pPr>
-            <a:r>
-              <a:rPr sz="1500" b="1">
-                <a:solidFill>
-                  <a:srgbClr val="E69F00"/>
-                </a:solidFill>
-                <a:latin typeface="Segoe UI"/>
-              </a:rPr>
-              <a:t>●  </a:t>
-            </a:r>
-            <a:r>
-              <a:rPr sz="1900" b="0">
-                <a:solidFill>
-                  <a:srgbClr val="16202E"/>
-                </a:solidFill>
-                <a:latin typeface="Segoe UI"/>
-              </a:rPr>
-              <a:t>CVaR₀.₉₅ is one risk measure; the mean-dominance mechanism, though, is measure-agnostic.</a:t>
-            </a:r>
-          </a:p>
-          <a:p>
-            <a:pPr>
-              <a:lnSpc>
-                <a:spcPct val="112000"/>
-              </a:lnSpc>
-              <a:spcBef>
-                <a:spcPts val="0"/>
-              </a:spcBef>
-              <a:spcAft>
-                <a:spcPts val="1600"/>
-              </a:spcAft>
-            </a:pPr>
-            <a:r>
-              <a:rPr sz="1500" b="1">
-                <a:solidFill>
-                  <a:srgbClr val="E69F00"/>
-                </a:solidFill>
-                <a:latin typeface="Segoe UI"/>
-              </a:rPr>
-              <a:t>●  </a:t>
-            </a:r>
-            <a:r>
-              <a:rPr sz="1900" b="0">
-                <a:solidFill>
-                  <a:srgbClr val="16202E"/>
-                </a:solidFill>
-                <a:latin typeface="Segoe UI"/>
-              </a:rPr>
-              <a:t>The transfer-channel result (Phase 3) is preliminary and deterministic.</a:t>
+                <a:latin typeface="Georgia"/>
+              </a:rPr>
+              <a:t>Thank you. Questions welcome.</a:t>
             </a:r>
           </a:p>
         </p:txBody>
@@ -7682,7 +8025,7 @@
                 </a:solidFill>
                 <a:latin typeface="Georgia"/>
               </a:rPr>
-              <a:t>Conclusions &amp; contributions</a:t>
+              <a:t>Backup: the falsification test</a:t>
             </a:r>
           </a:p>
         </p:txBody>
@@ -7771,7 +8114,7 @@
                 </a:solidFill>
                 <a:latin typeface="Segoe UI"/>
               </a:rPr>
-              <a:t>Spatial correlation &amp; carbon-aware DRO scheduling</a:t>
+              <a:t>The Price of Sophistication: carbon-aware data-center scheduling</a:t>
             </a:r>
           </a:p>
         </p:txBody>
@@ -7829,8 +8172,8 @@
         </p:nvSpPr>
         <p:spPr>
           <a:xfrm>
-            <a:off x="640080" y="1371600"/>
-            <a:ext cx="10881360" cy="4480560"/>
+            <a:off x="640080" y="1325880"/>
+            <a:ext cx="5577840" cy="4572000"/>
           </a:xfrm>
           <a:prstGeom prst="rect">
             <a:avLst/>
@@ -7848,17 +8191,17 @@
                 <a:spcPct val="112000"/>
               </a:lnSpc>
               <a:spcAft>
-                <a:spcPts val="1700"/>
-              </a:spcAft>
-            </a:pPr>
-            <a:r>
-              <a:rPr sz="2200" b="1">
+                <a:spcPts val="1600"/>
+              </a:spcAft>
+            </a:pPr>
+            <a:r>
+              <a:rPr sz="2100" b="1">
                 <a:solidFill>
                   <a:srgbClr val="0E2A52"/>
                 </a:solidFill>
                 <a:latin typeface="Segoe UI"/>
               </a:rPr>
-              <a:t>What this thesis delivers</a:t>
+              <a:t>Shuffled marginals</a:t>
             </a:r>
           </a:p>
           <a:p>
@@ -7870,11 +8213,11 @@
                 <a:spcPts val="0"/>
               </a:spcBef>
               <a:spcAft>
-                <a:spcPts val="1500"/>
-              </a:spcAft>
-            </a:pPr>
-            <a:r>
-              <a:rPr sz="1500" b="1">
+                <a:spcPts val="1400"/>
+              </a:spcAft>
+            </a:pPr>
+            <a:r>
+              <a:rPr sz="1400" b="1">
                 <a:solidFill>
                   <a:srgbClr val="E69F00"/>
                 </a:solidFill>
@@ -7883,13 +8226,13 @@
               <a:t>●  </a:t>
             </a:r>
             <a:r>
-              <a:rPr sz="1900" b="0">
+              <a:rPr sz="1800" b="0">
                 <a:solidFill>
                   <a:srgbClr val="16202E"/>
                 </a:solidFill>
                 <a:latin typeface="Segoe UI"/>
               </a:rPr>
-              <a:t>A pre-registered falsification test for the scheduling value of spatial carbon structure.</a:t>
+              <a:t>Fit the schedule to the full joint covariance.</a:t>
             </a:r>
           </a:p>
           <a:p>
@@ -7901,11 +8244,11 @@
                 <a:spcPts val="0"/>
               </a:spcBef>
               <a:spcAft>
-                <a:spcPts val="1500"/>
-              </a:spcAft>
-            </a:pPr>
-            <a:r>
-              <a:rPr sz="1500" b="1">
+                <a:spcPts val="1400"/>
+              </a:spcAft>
+            </a:pPr>
+            <a:r>
+              <a:rPr sz="1400" b="1">
                 <a:solidFill>
                   <a:srgbClr val="E69F00"/>
                 </a:solidFill>
@@ -7914,13 +8257,13 @@
               <a:t>●  </a:t>
             </a:r>
             <a:r>
-              <a:rPr sz="1900" b="0">
+              <a:rPr sz="1800" b="0">
                 <a:solidFill>
                   <a:srgbClr val="16202E"/>
                 </a:solidFill>
                 <a:latin typeface="Segoe UI"/>
               </a:rPr>
-              <a:t>A replicated null across the full dependence spectrum, with multi-seed and equivalence backing.</a:t>
+              <a:t>Refit to a block-diagonal covariance: identical marginals, cross-region structure destroyed (shuffled).</a:t>
             </a:r>
           </a:p>
           <a:p>
@@ -7932,11 +8275,11 @@
                 <a:spcPts val="0"/>
               </a:spcBef>
               <a:spcAft>
-                <a:spcPts val="1500"/>
-              </a:spcAft>
-            </a:pPr>
-            <a:r>
-              <a:rPr sz="1500" b="1">
+                <a:spcPts val="1400"/>
+              </a:spcAft>
+            </a:pPr>
+            <a:r>
+              <a:rPr sz="1400" b="1">
                 <a:solidFill>
                   <a:srgbClr val="E69F00"/>
                 </a:solidFill>
@@ -7945,13 +8288,13 @@
               <a:t>●  </a:t>
             </a:r>
             <a:r>
-              <a:rPr sz="1900" b="0">
+              <a:rPr sz="1800" b="0">
                 <a:solidFill>
                   <a:srgbClr val="16202E"/>
                 </a:solidFill>
                 <a:latin typeface="Segoe UI"/>
               </a:rPr>
-              <a:t>The mechanism: the diurnal mean dominates, and the residual dependence is non-elliptical, so covariance is both subordinate and the wrong object.</a:t>
+              <a:t>Score both on out-of-sample CVaR(0.95) of daily emissions.</a:t>
             </a:r>
           </a:p>
           <a:p>
@@ -7963,11 +8306,11 @@
                 <a:spcPts val="0"/>
               </a:spcBef>
               <a:spcAft>
-                <a:spcPts val="1500"/>
-              </a:spcAft>
-            </a:pPr>
-            <a:r>
-              <a:rPr sz="1500" b="1">
+                <a:spcPts val="1400"/>
+              </a:spcAft>
+            </a:pPr>
+            <a:r>
+              <a:rPr sz="1400" b="1">
                 <a:solidFill>
                   <a:srgbClr val="E69F00"/>
                 </a:solidFill>
@@ -7976,13 +8319,82 @@
               <a:t>●  </a:t>
             </a:r>
             <a:r>
-              <a:rPr sz="1900" b="1">
+              <a:rPr sz="1800" b="1">
                 <a:solidFill>
                   <a:srgbClr val="0E2A52"/>
                 </a:solidFill>
                 <a:latin typeface="Segoe UI"/>
               </a:rPr>
-              <a:t>A clear, honest negative result that redirects effort to the active transfer channel.</a:t>
+              <a:t>Pre-registered: if spatial structure matters, the joint schedule must win. It does not.</a:t>
+            </a:r>
+          </a:p>
+        </p:txBody>
+      </p:sp>
+      <p:pic>
+        <p:nvPicPr>
+          <p:cNvPr id="11" name="Picture 10" descr="schedule_us_west.png"/>
+          <p:cNvPicPr>
+            <a:picLocks noChangeAspect="1"/>
+          </p:cNvPicPr>
+          <p:nvPr/>
+        </p:nvPicPr>
+        <p:blipFill>
+          <a:blip r:embed="rId2"/>
+          <a:stretch>
+            <a:fillRect/>
+          </a:stretch>
+        </p:blipFill>
+        <p:spPr>
+          <a:xfrm>
+            <a:off x="6400800" y="1463040"/>
+            <a:ext cx="5212080" cy="1222291"/>
+          </a:xfrm>
+          <a:prstGeom prst="rect">
+            <a:avLst/>
+          </a:prstGeom>
+        </p:spPr>
+      </p:pic>
+      <p:sp>
+        <p:nvSpPr>
+          <p:cNvPr id="12" name="TextBox 11"/>
+          <p:cNvSpPr txBox="1"/>
+          <p:nvPr/>
+        </p:nvSpPr>
+        <p:spPr>
+          <a:xfrm>
+            <a:off x="6400800" y="5760720"/>
+            <a:ext cx="5212080" cy="365760"/>
+          </a:xfrm>
+          <a:prstGeom prst="rect">
+            <a:avLst/>
+          </a:prstGeom>
+          <a:noFill/>
+        </p:spPr>
+        <p:txBody>
+          <a:bodyPr wrap="square" anchor="t" lIns="0" rIns="0" tIns="0" bIns="0">
+            <a:spAutoFit/>
+          </a:bodyPr>
+          <a:lstStyle/>
+          <a:p>
+            <a:pPr algn="ctr">
+              <a:lnSpc>
+                <a:spcPct val="106000"/>
+              </a:lnSpc>
+              <a:spcBef>
+                <a:spcPts val="0"/>
+              </a:spcBef>
+              <a:spcAft>
+                <a:spcPts val="600"/>
+              </a:spcAft>
+            </a:pPr>
+            <a:r>
+              <a:rPr sz="1200" b="0">
+                <a:solidFill>
+                  <a:srgbClr val="5B6675"/>
+                </a:solidFill>
+                <a:latin typeface="Segoe UI"/>
+              </a:rPr>
+              <a:t>Joint vs shuffled schedules, side by side.</a:t>
             </a:r>
           </a:p>
         </p:txBody>
@@ -8001,7 +8413,7 @@
     <p:bg>
       <p:bgPr>
         <a:solidFill>
-          <a:srgbClr val="0E2A52"/>
+          <a:srgbClr val="FFFFFF"/>
         </a:solidFill>
         <a:effectLst/>
       </p:bgPr>
@@ -8022,7 +8434,51 @@
         <p:spPr>
           <a:xfrm>
             <a:off x="0" y="0"/>
-            <a:ext cx="256032" cy="6858000"/>
+            <a:ext cx="12191695" cy="950976"/>
+          </a:xfrm>
+          <a:prstGeom prst="rect">
+            <a:avLst/>
+          </a:prstGeom>
+          <a:solidFill>
+            <a:srgbClr val="0E2A52"/>
+          </a:solidFill>
+          <a:ln>
+            <a:noFill/>
+          </a:ln>
+          <a:effectLst/>
+        </p:spPr>
+        <p:style>
+          <a:lnRef idx="1">
+            <a:schemeClr val="accent1"/>
+          </a:lnRef>
+          <a:fillRef idx="3">
+            <a:schemeClr val="accent1"/>
+          </a:fillRef>
+          <a:effectRef idx="2">
+            <a:schemeClr val="accent1"/>
+          </a:effectRef>
+          <a:fontRef idx="minor">
+            <a:schemeClr val="lt1"/>
+          </a:fontRef>
+        </p:style>
+        <p:txBody>
+          <a:bodyPr rtlCol="0" anchor="ctr"/>
+          <a:lstStyle/>
+          <a:p>
+            <a:pPr algn="ctr"/>
+          </a:p>
+        </p:txBody>
+      </p:sp>
+      <p:sp>
+        <p:nvSpPr>
+          <p:cNvPr id="3" name="Rectangle 2"/>
+          <p:cNvSpPr/>
+          <p:nvPr/>
+        </p:nvSpPr>
+        <p:spPr>
+          <a:xfrm>
+            <a:off x="0" y="950976"/>
+            <a:ext cx="12191695" cy="54864"/>
           </a:xfrm>
           <a:prstGeom prst="rect">
             <a:avLst/>
@@ -8059,61 +8515,16 @@
       </p:sp>
       <p:sp>
         <p:nvSpPr>
-          <p:cNvPr id="3" name="TextBox 2"/>
-          <p:cNvSpPr txBox="1"/>
-          <p:nvPr/>
-        </p:nvSpPr>
-        <p:spPr>
-          <a:xfrm>
-            <a:off x="868680" y="822960"/>
-            <a:ext cx="10424160" cy="914400"/>
-          </a:xfrm>
-          <a:prstGeom prst="rect">
-            <a:avLst/>
-          </a:prstGeom>
-          <a:noFill/>
-        </p:spPr>
-        <p:txBody>
-          <a:bodyPr wrap="square" anchor="t" lIns="0" rIns="0" tIns="0" bIns="0">
-            <a:spAutoFit/>
-          </a:bodyPr>
-          <a:lstStyle/>
-          <a:p>
-            <a:pPr algn="l">
-              <a:lnSpc>
-                <a:spcPct val="106000"/>
-              </a:lnSpc>
-              <a:spcBef>
-                <a:spcPts val="0"/>
-              </a:spcBef>
-              <a:spcAft>
-                <a:spcPts val="600"/>
-              </a:spcAft>
-            </a:pPr>
-            <a:r>
-              <a:rPr sz="3200" b="1">
-                <a:solidFill>
-                  <a:srgbClr val="FFFFFF"/>
-                </a:solidFill>
-                <a:latin typeface="Georgia"/>
-              </a:rPr>
-              <a:t>Future work, and thank you</a:t>
-            </a:r>
-          </a:p>
-        </p:txBody>
-      </p:sp>
-      <p:sp>
-        <p:nvSpPr>
-          <p:cNvPr id="4" name="Rectangle 3"/>
+          <p:cNvPr id="4" name="Oval 3"/>
           <p:cNvSpPr/>
           <p:nvPr/>
         </p:nvSpPr>
         <p:spPr>
           <a:xfrm>
-            <a:off x="868680" y="1627632"/>
-            <a:ext cx="2377440" cy="45720"/>
-          </a:xfrm>
-          <a:prstGeom prst="rect">
+            <a:off x="457200" y="246888"/>
+            <a:ext cx="457200" cy="457200"/>
+          </a:xfrm>
+          <a:prstGeom prst="ellipse">
             <a:avLst/>
           </a:prstGeom>
           <a:solidFill>
@@ -8146,9 +8557,233 @@
           </a:p>
         </p:txBody>
       </p:sp>
+      <p:sp>
+        <p:nvSpPr>
+          <p:cNvPr id="5" name="TextBox 4"/>
+          <p:cNvSpPr txBox="1"/>
+          <p:nvPr/>
+        </p:nvSpPr>
+        <p:spPr>
+          <a:xfrm>
+            <a:off x="457200" y="246888"/>
+            <a:ext cx="457200" cy="457200"/>
+          </a:xfrm>
+          <a:prstGeom prst="rect">
+            <a:avLst/>
+          </a:prstGeom>
+          <a:noFill/>
+        </p:spPr>
+        <p:txBody>
+          <a:bodyPr wrap="square" anchor="ctr" lIns="0" rIns="0" tIns="0" bIns="0">
+            <a:spAutoFit/>
+          </a:bodyPr>
+          <a:lstStyle/>
+          <a:p>
+            <a:pPr algn="ctr">
+              <a:lnSpc>
+                <a:spcPct val="106000"/>
+              </a:lnSpc>
+              <a:spcBef>
+                <a:spcPts val="0"/>
+              </a:spcBef>
+              <a:spcAft>
+                <a:spcPts val="600"/>
+              </a:spcAft>
+            </a:pPr>
+            <a:r>
+              <a:rPr sz="2200" b="1">
+                <a:solidFill>
+                  <a:srgbClr val="0E2A52"/>
+                </a:solidFill>
+                <a:latin typeface="Georgia"/>
+              </a:rPr>
+              <a:t>18</a:t>
+            </a:r>
+          </a:p>
+        </p:txBody>
+      </p:sp>
+      <p:sp>
+        <p:nvSpPr>
+          <p:cNvPr id="6" name="TextBox 5"/>
+          <p:cNvSpPr txBox="1"/>
+          <p:nvPr/>
+        </p:nvSpPr>
+        <p:spPr>
+          <a:xfrm>
+            <a:off x="1097280" y="0"/>
+            <a:ext cx="9997135" cy="950976"/>
+          </a:xfrm>
+          <a:prstGeom prst="rect">
+            <a:avLst/>
+          </a:prstGeom>
+          <a:noFill/>
+        </p:spPr>
+        <p:txBody>
+          <a:bodyPr wrap="square" anchor="ctr" lIns="0" rIns="0" tIns="0" bIns="0">
+            <a:spAutoFit/>
+          </a:bodyPr>
+          <a:lstStyle/>
+          <a:p>
+            <a:pPr algn="l">
+              <a:lnSpc>
+                <a:spcPct val="106000"/>
+              </a:lnSpc>
+              <a:spcBef>
+                <a:spcPts val="0"/>
+              </a:spcBef>
+              <a:spcAft>
+                <a:spcPts val="600"/>
+              </a:spcAft>
+            </a:pPr>
+            <a:r>
+              <a:rPr sz="2700" b="1">
+                <a:solidFill>
+                  <a:srgbClr val="FFFFFF"/>
+                </a:solidFill>
+                <a:latin typeface="Georgia"/>
+              </a:rPr>
+              <a:t>Backup: non-elliptical tail dependence</a:t>
+            </a:r>
+          </a:p>
+        </p:txBody>
+      </p:sp>
+      <p:sp>
+        <p:nvSpPr>
+          <p:cNvPr id="7" name="Rectangle 6"/>
+          <p:cNvSpPr/>
+          <p:nvPr/>
+        </p:nvSpPr>
+        <p:spPr>
+          <a:xfrm>
+            <a:off x="457200" y="6473952"/>
+            <a:ext cx="11277295" cy="10972"/>
+          </a:xfrm>
+          <a:prstGeom prst="rect">
+            <a:avLst/>
+          </a:prstGeom>
+          <a:solidFill>
+            <a:srgbClr val="D9DEE6"/>
+          </a:solidFill>
+          <a:ln>
+            <a:noFill/>
+          </a:ln>
+          <a:effectLst/>
+        </p:spPr>
+        <p:style>
+          <a:lnRef idx="1">
+            <a:schemeClr val="accent1"/>
+          </a:lnRef>
+          <a:fillRef idx="3">
+            <a:schemeClr val="accent1"/>
+          </a:fillRef>
+          <a:effectRef idx="2">
+            <a:schemeClr val="accent1"/>
+          </a:effectRef>
+          <a:fontRef idx="minor">
+            <a:schemeClr val="lt1"/>
+          </a:fontRef>
+        </p:style>
+        <p:txBody>
+          <a:bodyPr rtlCol="0" anchor="ctr"/>
+          <a:lstStyle/>
+          <a:p>
+            <a:pPr algn="ctr"/>
+          </a:p>
+        </p:txBody>
+      </p:sp>
+      <p:sp>
+        <p:nvSpPr>
+          <p:cNvPr id="8" name="TextBox 7"/>
+          <p:cNvSpPr txBox="1"/>
+          <p:nvPr/>
+        </p:nvSpPr>
+        <p:spPr>
+          <a:xfrm>
+            <a:off x="457200" y="6492240"/>
+            <a:ext cx="7315200" cy="310896"/>
+          </a:xfrm>
+          <a:prstGeom prst="rect">
+            <a:avLst/>
+          </a:prstGeom>
+          <a:noFill/>
+        </p:spPr>
+        <p:txBody>
+          <a:bodyPr wrap="square" anchor="ctr" lIns="0" rIns="0" tIns="0" bIns="0">
+            <a:spAutoFit/>
+          </a:bodyPr>
+          <a:lstStyle/>
+          <a:p>
+            <a:pPr algn="l">
+              <a:lnSpc>
+                <a:spcPct val="106000"/>
+              </a:lnSpc>
+              <a:spcBef>
+                <a:spcPts val="0"/>
+              </a:spcBef>
+              <a:spcAft>
+                <a:spcPts val="600"/>
+              </a:spcAft>
+            </a:pPr>
+            <a:r>
+              <a:rPr sz="1000" b="0">
+                <a:solidFill>
+                  <a:srgbClr val="5B6675"/>
+                </a:solidFill>
+                <a:latin typeface="Segoe UI"/>
+              </a:rPr>
+              <a:t>The Price of Sophistication: carbon-aware data-center scheduling</a:t>
+            </a:r>
+          </a:p>
+        </p:txBody>
+      </p:sp>
+      <p:sp>
+        <p:nvSpPr>
+          <p:cNvPr id="9" name="TextBox 8"/>
+          <p:cNvSpPr txBox="1"/>
+          <p:nvPr/>
+        </p:nvSpPr>
+        <p:spPr>
+          <a:xfrm>
+            <a:off x="9905695" y="6492240"/>
+            <a:ext cx="1828800" cy="310896"/>
+          </a:xfrm>
+          <a:prstGeom prst="rect">
+            <a:avLst/>
+          </a:prstGeom>
+          <a:noFill/>
+        </p:spPr>
+        <p:txBody>
+          <a:bodyPr wrap="square" anchor="ctr" lIns="0" rIns="0" tIns="0" bIns="0">
+            <a:spAutoFit/>
+          </a:bodyPr>
+          <a:lstStyle/>
+          <a:p>
+            <a:pPr algn="r">
+              <a:lnSpc>
+                <a:spcPct val="106000"/>
+              </a:lnSpc>
+              <a:spcBef>
+                <a:spcPts val="0"/>
+              </a:spcBef>
+              <a:spcAft>
+                <a:spcPts val="600"/>
+              </a:spcAft>
+            </a:pPr>
+            <a:r>
+              <a:rPr sz="1000" b="0">
+                <a:solidFill>
+                  <a:srgbClr val="5B6675"/>
+                </a:solidFill>
+                <a:latin typeface="Segoe UI"/>
+              </a:rPr>
+              <a:t>M. Ortiz Togashi  ·  18</a:t>
+            </a:r>
+          </a:p>
+        </p:txBody>
+      </p:sp>
       <p:pic>
         <p:nvPicPr>
-          <p:cNvPr id="5" name="Picture 4" descr="part3_preliminary.png"/>
+          <p:cNvPr id="10" name="Picture 9" descr="tail_dependence_taskc.png"/>
           <p:cNvPicPr>
             <a:picLocks noChangeAspect="1"/>
           </p:cNvPicPr>
@@ -8162,8 +8797,8 @@
         </p:blipFill>
         <p:spPr>
           <a:xfrm>
-            <a:off x="868680" y="1965960"/>
-            <a:ext cx="6675120" cy="2498780"/>
+            <a:off x="640080" y="1417320"/>
+            <a:ext cx="6583680" cy="3310008"/>
           </a:xfrm>
           <a:prstGeom prst="rect">
             <a:avLst/>
@@ -8172,59 +8807,14 @@
       </p:pic>
       <p:sp>
         <p:nvSpPr>
-          <p:cNvPr id="6" name="TextBox 5"/>
+          <p:cNvPr id="11" name="TextBox 10"/>
           <p:cNvSpPr txBox="1"/>
           <p:nvPr/>
         </p:nvSpPr>
         <p:spPr>
           <a:xfrm>
-            <a:off x="7772400" y="1965960"/>
-            <a:ext cx="3840480" cy="457200"/>
-          </a:xfrm>
-          <a:prstGeom prst="rect">
-            <a:avLst/>
-          </a:prstGeom>
-          <a:noFill/>
-        </p:spPr>
-        <p:txBody>
-          <a:bodyPr wrap="square" anchor="t" lIns="0" rIns="0" tIns="0" bIns="0">
-            <a:spAutoFit/>
-          </a:bodyPr>
-          <a:lstStyle/>
-          <a:p>
-            <a:pPr algn="l">
-              <a:lnSpc>
-                <a:spcPct val="106000"/>
-              </a:lnSpc>
-              <a:spcBef>
-                <a:spcPts val="0"/>
-              </a:spcBef>
-              <a:spcAft>
-                <a:spcPts val="600"/>
-              </a:spcAft>
-            </a:pPr>
-            <a:r>
-              <a:rPr sz="1900" b="1">
-                <a:solidFill>
-                  <a:srgbClr val="E69F00"/>
-                </a:solidFill>
-                <a:latin typeface="Segoe UI"/>
-              </a:rPr>
-              <a:t>Where the value actually is</a:t>
-            </a:r>
-          </a:p>
-        </p:txBody>
-      </p:sp>
-      <p:sp>
-        <p:nvSpPr>
-          <p:cNvPr id="7" name="TextBox 6"/>
-          <p:cNvSpPr txBox="1"/>
-          <p:nvPr/>
-        </p:nvSpPr>
-        <p:spPr>
-          <a:xfrm>
-            <a:off x="7772400" y="2514600"/>
-            <a:ext cx="3840480" cy="3108960"/>
+            <a:off x="7315200" y="1554480"/>
+            <a:ext cx="4297680" cy="4389120"/>
           </a:xfrm>
           <a:prstGeom prst="rect">
             <a:avLst/>
@@ -8241,6 +8831,25 @@
               <a:lnSpc>
                 <a:spcPct val="112000"/>
               </a:lnSpc>
+              <a:spcAft>
+                <a:spcPts val="1600"/>
+              </a:spcAft>
+            </a:pPr>
+            <a:r>
+              <a:rPr sz="2000" b="1">
+                <a:solidFill>
+                  <a:srgbClr val="0E2A52"/>
+                </a:solidFill>
+                <a:latin typeface="Segoe UI"/>
+              </a:rPr>
+              <a:t>Structural reason covariance fails</a:t>
+            </a:r>
+          </a:p>
+          <a:p>
+            <a:pPr>
+              <a:lnSpc>
+                <a:spcPct val="112000"/>
+              </a:lnSpc>
               <a:spcBef>
                 <a:spcPts val="0"/>
               </a:spcBef>
@@ -8249,7 +8858,7 @@
               </a:spcAft>
             </a:pPr>
             <a:r>
-              <a:rPr sz="1200" b="1">
+              <a:rPr sz="1300" b="1">
                 <a:solidFill>
                   <a:srgbClr val="E69F00"/>
                 </a:solidFill>
@@ -8258,13 +8867,13 @@
               <a:t>●  </a:t>
             </a:r>
             <a:r>
-              <a:rPr sz="1600" b="0">
-                <a:solidFill>
-                  <a:srgbClr val="CDD6E4"/>
-                </a:solidFill>
-                <a:latin typeface="Segoe UI"/>
-              </a:rPr>
-              <a:t>Phase 3: the active transfer channel, where moving load shows 4–10% deterministic value.</a:t>
+              <a:rPr sz="1700" b="0">
+                <a:solidFill>
+                  <a:srgbClr val="16202E"/>
+                </a:solidFill>
+                <a:latin typeface="Segoe UI"/>
+              </a:rPr>
+              <a:t>Residual dependence is non-elliptical: regions go clean together more than dirty together (chi_L &gt; chi_U).</a:t>
             </a:r>
           </a:p>
           <a:p>
@@ -8280,7 +8889,7 @@
               </a:spcAft>
             </a:pPr>
             <a:r>
-              <a:rPr sz="1200" b="1">
+              <a:rPr sz="1300" b="1">
                 <a:solidFill>
                   <a:srgbClr val="E69F00"/>
                 </a:solidFill>
@@ -8289,58 +8898,44 @@
               <a:t>●  </a:t>
             </a:r>
             <a:r>
-              <a:rPr sz="1600" b="0">
-                <a:solidFill>
-                  <a:srgbClr val="CDD6E4"/>
-                </a:solidFill>
-                <a:latin typeface="Segoe UI"/>
-              </a:rPr>
-              <a:t>Stochastic and online versions of that channel.</a:t>
-            </a:r>
-          </a:p>
-        </p:txBody>
-      </p:sp>
-      <p:sp>
-        <p:nvSpPr>
-          <p:cNvPr id="8" name="TextBox 7"/>
-          <p:cNvSpPr txBox="1"/>
-          <p:nvPr/>
-        </p:nvSpPr>
-        <p:spPr>
-          <a:xfrm>
-            <a:off x="868680" y="5852160"/>
-            <a:ext cx="10424160" cy="731520"/>
-          </a:xfrm>
-          <a:prstGeom prst="rect">
-            <a:avLst/>
-          </a:prstGeom>
-          <a:noFill/>
-        </p:spPr>
-        <p:txBody>
-          <a:bodyPr wrap="square" anchor="t" lIns="0" rIns="0" tIns="0" bIns="0">
-            <a:spAutoFit/>
-          </a:bodyPr>
-          <a:lstStyle/>
-          <a:p>
-            <a:pPr algn="l">
-              <a:lnSpc>
-                <a:spcPct val="106000"/>
-              </a:lnSpc>
-              <a:spcBef>
-                <a:spcPts val="0"/>
-              </a:spcBef>
-              <a:spcAft>
-                <a:spcPts val="600"/>
-              </a:spcAft>
-            </a:pPr>
-            <a:r>
-              <a:rPr sz="2200" b="1">
+              <a:rPr sz="1700" b="0">
+                <a:solidFill>
+                  <a:srgbClr val="16202E"/>
+                </a:solidFill>
+                <a:latin typeface="Segoe UI"/>
+              </a:rPr>
+              <a:t>A covariance ball forces chi_L = chi_U by construction.</a:t>
+            </a:r>
+          </a:p>
+          <a:p>
+            <a:pPr>
+              <a:lnSpc>
+                <a:spcPct val="112000"/>
+              </a:lnSpc>
+              <a:spcBef>
+                <a:spcPts val="0"/>
+              </a:spcBef>
+              <a:spcAft>
+                <a:spcPts val="1400"/>
+              </a:spcAft>
+            </a:pPr>
+            <a:r>
+              <a:rPr sz="1300" b="1">
                 <a:solidFill>
                   <a:srgbClr val="E69F00"/>
                 </a:solidFill>
-                <a:latin typeface="Georgia"/>
-              </a:rPr>
-              <a:t>Thank you. Questions welcome.</a:t>
+                <a:latin typeface="Segoe UI"/>
+              </a:rPr>
+              <a:t>●  </a:t>
+            </a:r>
+            <a:r>
+              <a:rPr sz="1700" b="1">
+                <a:solidFill>
+                  <a:srgbClr val="0E2A52"/>
+                </a:solidFill>
+                <a:latin typeface="Segoe UI"/>
+              </a:rPr>
+              <a:t>So an elliptical ambiguity set is blind to the only structure left, and it sits in the clean tail a risk-averse scheduler ignores.</a:t>
             </a:r>
           </a:p>
         </p:txBody>
@@ -8588,7 +9183,7 @@
                 </a:solidFill>
                 <a:latin typeface="Georgia"/>
               </a:rPr>
-              <a:t>Data centers can move their work</a:t>
+              <a:t>Flexible compute meets a varying grid</a:t>
             </a:r>
           </a:p>
         </p:txBody>
@@ -8677,7 +9272,7 @@
                 </a:solidFill>
                 <a:latin typeface="Segoe UI"/>
               </a:rPr>
-              <a:t>Spatial correlation &amp; carbon-aware DRO scheduling</a:t>
+              <a:t>The Price of Sophistication: carbon-aware data-center scheduling</a:t>
             </a:r>
           </a:p>
         </p:txBody>
@@ -8826,7 +9421,7 @@
                 </a:solidFill>
                 <a:latin typeface="Segoe UI"/>
               </a:rPr>
-              <a:t>Carbon intensity of electricity varies sharply by hour and by region.</a:t>
+              <a:t>Carbon intensity of electricity varies sharply by hour and by region, driven by wind, solar, hydro, and demand.</a:t>
             </a:r>
           </a:p>
           <a:p>
@@ -8857,7 +9452,7 @@
                 </a:solidFill>
                 <a:latin typeface="Segoe UI"/>
               </a:rPr>
-              <a:t>So a scheduler can defer work to cleaner moments, cutting emissions for free.</a:t>
+              <a:t>So an operator can ship work to cleaner hours and cleaner regions, cutting emissions at almost no cost.</a:t>
             </a:r>
           </a:p>
           <a:p>
@@ -8882,13 +9477,13 @@
               <a:t>●  </a:t>
             </a:r>
             <a:r>
-              <a:rPr sz="1900" b="0">
-                <a:solidFill>
-                  <a:srgbClr val="16202E"/>
-                </a:solidFill>
-                <a:latin typeface="Segoe UI"/>
-              </a:rPr>
-              <a:t>Recent work makes this robust: model carbon as uncertain inside a distributionally robust optimization (DRO).</a:t>
+              <a:rPr sz="1900" b="1">
+                <a:solidFill>
+                  <a:srgbClr val="0E2A52"/>
+                </a:solidFill>
+                <a:latin typeface="Segoe UI"/>
+              </a:rPr>
+              <a:t>The open question is not whether to schedule, but which modelling layers actually pay for their complexity.</a:t>
             </a:r>
           </a:p>
         </p:txBody>
@@ -8957,7 +9552,7 @@
                 </a:solidFill>
                 <a:latin typeface="Segoe UI"/>
               </a:rPr>
-              <a:t>Regional carbon intensity is spatially structured.</a:t>
+              <a:t>Carbon intensity is spatially structured, and it moves.</a:t>
             </a:r>
           </a:p>
         </p:txBody>
@@ -9205,7 +9800,7 @@
                 </a:solidFill>
                 <a:latin typeface="Georgia"/>
               </a:rPr>
-              <a:t>The idea on trial</a:t>
+              <a:t>Which layers earn their complexity?</a:t>
             </a:r>
           </a:p>
         </p:txBody>
@@ -9294,7 +9889,7 @@
                 </a:solidFill>
                 <a:latin typeface="Segoe UI"/>
               </a:rPr>
-              <a:t>Spatial correlation &amp; carbon-aware DRO scheduling</a:t>
+              <a:t>The Price of Sophistication: carbon-aware data-center scheduling</a:t>
             </a:r>
           </a:p>
         </p:txBody>
@@ -9352,8 +9947,8 @@
         </p:nvSpPr>
         <p:spPr>
           <a:xfrm>
-            <a:off x="640080" y="1463040"/>
-            <a:ext cx="10881360" cy="4389120"/>
+            <a:off x="640080" y="1417320"/>
+            <a:ext cx="10881360" cy="3291840"/>
           </a:xfrm>
           <a:prstGeom prst="rect">
             <a:avLst/>
@@ -9371,17 +9966,17 @@
                 <a:spcPct val="112000"/>
               </a:lnSpc>
               <a:spcAft>
-                <a:spcPts val="2000"/>
-              </a:spcAft>
-            </a:pPr>
-            <a:r>
-              <a:rPr sz="2400" b="1">
+                <a:spcPts val="1800"/>
+              </a:spcAft>
+            </a:pPr>
+            <a:r>
+              <a:rPr sz="2300" b="1">
                 <a:solidFill>
                   <a:srgbClr val="0E2A52"/>
                 </a:solidFill>
                 <a:latin typeface="Segoe UI"/>
               </a:rPr>
-              <a:t>What if regions move together?</a:t>
+              <a:t>Sophistication is not free</a:t>
             </a:r>
           </a:p>
           <a:p>
@@ -9393,11 +9988,11 @@
                 <a:spcPts val="0"/>
               </a:spcBef>
               <a:spcAft>
-                <a:spcPts val="1800"/>
-              </a:spcAft>
-            </a:pPr>
-            <a:r>
-              <a:rPr sz="1700" b="1">
+                <a:spcPts val="1600"/>
+              </a:spcAft>
+            </a:pPr>
+            <a:r>
+              <a:rPr sz="1600" b="1">
                 <a:solidFill>
                   <a:srgbClr val="E69F00"/>
                 </a:solidFill>
@@ -9406,13 +10001,13 @@
               <a:t>●  </a:t>
             </a:r>
             <a:r>
-              <a:rPr sz="2100" b="0">
+              <a:rPr sz="2000" b="0">
                 <a:solidFill>
                   <a:srgbClr val="16202E"/>
                 </a:solidFill>
                 <a:latin typeface="Segoe UI"/>
               </a:rPr>
-              <a:t>A natural next step: treat carbon intensity as a stochastic vector across coupled regions, not one region at a time.</a:t>
+              <a:t>Each layer (inter-region transfer, spatial covariance, distributional robustness, richer copulas) adds estimation and compute cost.</a:t>
             </a:r>
           </a:p>
           <a:p>
@@ -9424,11 +10019,11 @@
                 <a:spcPts val="0"/>
               </a:spcBef>
               <a:spcAft>
-                <a:spcPts val="1800"/>
-              </a:spcAft>
-            </a:pPr>
-            <a:r>
-              <a:rPr sz="1700" b="1">
+                <a:spcPts val="1600"/>
+              </a:spcAft>
+            </a:pPr>
+            <a:r>
+              <a:rPr sz="1600" b="1">
                 <a:solidFill>
                   <a:srgbClr val="E69F00"/>
                 </a:solidFill>
@@ -9437,13 +10032,13 @@
               <a:t>●  </a:t>
             </a:r>
             <a:r>
-              <a:rPr sz="2100" b="0">
+              <a:rPr sz="2000" b="0">
                 <a:solidFill>
                   <a:srgbClr val="16202E"/>
                 </a:solidFill>
                 <a:latin typeface="Segoe UI"/>
               </a:rPr>
-              <a:t>Then spatial correlation between regions could inform the robust schedule.</a:t>
+              <a:t>The literature has assumed this sophistication pays, rather than measuring it.</a:t>
             </a:r>
           </a:p>
           <a:p>
@@ -9455,11 +10050,11 @@
                 <a:spcPts val="0"/>
               </a:spcBef>
               <a:spcAft>
-                <a:spcPts val="1800"/>
-              </a:spcAft>
-            </a:pPr>
-            <a:r>
-              <a:rPr sz="1700" b="1">
+                <a:spcPts val="1600"/>
+              </a:spcAft>
+            </a:pPr>
+            <a:r>
+              <a:rPr sz="1600" b="1">
                 <a:solidFill>
                   <a:srgbClr val="E69F00"/>
                 </a:solidFill>
@@ -9468,13 +10063,13 @@
               <a:t>●  </a:t>
             </a:r>
             <a:r>
-              <a:rPr sz="2100" b="0">
-                <a:solidFill>
-                  <a:srgbClr val="16202E"/>
-                </a:solidFill>
-                <a:latin typeface="Segoe UI"/>
-              </a:rPr>
-              <a:t>Intuition: if neighbouring grids move together, a robust scheduler should be able to exploit that joint structure.</a:t>
+              <a:rPr sz="2000" b="1">
+                <a:solidFill>
+                  <a:srgbClr val="0E2A52"/>
+                </a:solidFill>
+                <a:latin typeface="Segoe UI"/>
+              </a:rPr>
+              <a:t>We build a working day-ahead scheduler and price each layer directly, out of sample.</a:t>
             </a:r>
           </a:p>
         </p:txBody>
@@ -9487,8 +10082,8 @@
         </p:nvSpPr>
         <p:spPr>
           <a:xfrm>
-            <a:off x="640080" y="5074920"/>
-            <a:ext cx="10881360" cy="1051560"/>
+            <a:off x="640080" y="4983480"/>
+            <a:ext cx="10881360" cy="1143000"/>
           </a:xfrm>
           <a:prstGeom prst="rect">
             <a:avLst/>
@@ -9531,8 +10126,8 @@
         </p:nvSpPr>
         <p:spPr>
           <a:xfrm>
-            <a:off x="914400" y="5138928"/>
-            <a:ext cx="10332720" cy="914400"/>
+            <a:off x="914400" y="5047488"/>
+            <a:ext cx="10332720" cy="1005840"/>
           </a:xfrm>
           <a:prstGeom prst="rect">
             <a:avLst/>
@@ -9557,13 +10152,13 @@
               </a:spcAft>
             </a:pPr>
             <a:r>
-              <a:rPr sz="2000" b="1">
+              <a:rPr sz="1800" b="1">
                 <a:solidFill>
                   <a:srgbClr val="0E2A52"/>
                 </a:solidFill>
                 <a:latin typeface="Georgia"/>
               </a:rPr>
-              <a:t>This thesis asks one question: does that spatial structure actually carry any robust scheduling value?</a:t>
+              <a:t>RQ1: how much does the transfer lever save?   RQ2: does passive covariance or a copula add anything?   RQ3: when does robustness pay?</a:t>
             </a:r>
           </a:p>
         </p:txBody>
@@ -9811,7 +10406,7 @@
                 </a:solidFill>
                 <a:latin typeface="Georgia"/>
               </a:rPr>
-              <a:t>The gap in prior work</a:t>
+              <a:t>The day-ahead scheduler</a:t>
             </a:r>
           </a:p>
         </p:txBody>
@@ -9900,7 +10495,7 @@
                 </a:solidFill>
                 <a:latin typeface="Segoe UI"/>
               </a:rPr>
-              <a:t>Spatial correlation &amp; carbon-aware DRO scheduling</a:t>
+              <a:t>The Price of Sophistication: carbon-aware data-center scheduling</a:t>
             </a:r>
           </a:p>
         </p:txBody>
@@ -9958,8 +10553,8 @@
         </p:nvSpPr>
         <p:spPr>
           <a:xfrm>
-            <a:off x="640080" y="1463040"/>
-            <a:ext cx="10881360" cy="4114800"/>
+            <a:off x="640080" y="1371600"/>
+            <a:ext cx="5577840" cy="4572000"/>
           </a:xfrm>
           <a:prstGeom prst="rect">
             <a:avLst/>
@@ -9977,17 +10572,17 @@
                 <a:spcPct val="112000"/>
               </a:lnSpc>
               <a:spcAft>
-                <a:spcPts val="2000"/>
-              </a:spcAft>
-            </a:pPr>
-            <a:r>
-              <a:rPr sz="2400" b="1">
+                <a:spcPts val="1600"/>
+              </a:spcAft>
+            </a:pPr>
+            <a:r>
+              <a:rPr sz="2100" b="1">
                 <a:solidFill>
                   <a:srgbClr val="0E2A52"/>
                 </a:solidFill>
                 <a:latin typeface="Segoe UI"/>
               </a:rPr>
-              <a:t>Regions are modelled one at a time</a:t>
+              <a:t>Forecast, optimize, roll</a:t>
             </a:r>
           </a:p>
           <a:p>
@@ -9999,11 +10594,11 @@
                 <a:spcPts val="0"/>
               </a:spcBef>
               <a:spcAft>
-                <a:spcPts val="1800"/>
-              </a:spcAft>
-            </a:pPr>
-            <a:r>
-              <a:rPr sz="1700" b="1">
+                <a:spcPts val="1400"/>
+              </a:spcAft>
+            </a:pPr>
+            <a:r>
+              <a:rPr sz="1400" b="1">
                 <a:solidFill>
                   <a:srgbClr val="E69F00"/>
                 </a:solidFill>
@@ -10012,13 +10607,13 @@
               <a:t>●  </a:t>
             </a:r>
             <a:r>
-              <a:rPr sz="2100" b="0">
+              <a:rPr sz="1800" b="0">
                 <a:solidFill>
                   <a:srgbClr val="16202E"/>
                 </a:solidFill>
                 <a:latin typeface="Segoe UI"/>
               </a:rPr>
-              <a:t>Existing carbon-aware DRO models treat each region in isolation: per-region marginal uncertainty only.</a:t>
+              <a:t>Forecast tomorrow's per-region carbon intensity from history.</a:t>
             </a:r>
           </a:p>
           <a:p>
@@ -10030,11 +10625,11 @@
                 <a:spcPts val="0"/>
               </a:spcBef>
               <a:spcAft>
-                <a:spcPts val="1800"/>
-              </a:spcAft>
-            </a:pPr>
-            <a:r>
-              <a:rPr sz="1700" b="1">
+                <a:spcPts val="1400"/>
+              </a:spcAft>
+            </a:pPr>
+            <a:r>
+              <a:rPr sz="1400" b="1">
                 <a:solidFill>
                   <a:srgbClr val="E69F00"/>
                 </a:solidFill>
@@ -10043,13 +10638,13 @@
               <a:t>●  </a:t>
             </a:r>
             <a:r>
-              <a:rPr sz="2100" b="0">
+              <a:rPr sz="1800" b="0">
                 <a:solidFill>
                   <a:srgbClr val="16202E"/>
                 </a:solidFill>
                 <a:latin typeface="Segoe UI"/>
               </a:rPr>
-              <a:t>The cross-region dependence is never put on trial for scheduling value.</a:t>
+              <a:t>Optimize a migration schedule: move splittable compute across regions under ramp limits and a transfer budget Phi.</a:t>
             </a:r>
           </a:p>
           <a:p>
@@ -10061,11 +10656,11 @@
                 <a:spcPts val="0"/>
               </a:spcBef>
               <a:spcAft>
-                <a:spcPts val="1800"/>
-              </a:spcAft>
-            </a:pPr>
-            <a:r>
-              <a:rPr sz="1700" b="1">
+                <a:spcPts val="1400"/>
+              </a:spcAft>
+            </a:pPr>
+            <a:r>
+              <a:rPr sz="1400" b="1">
                 <a:solidFill>
                   <a:srgbClr val="E69F00"/>
                 </a:solidFill>
@@ -10074,61 +10669,72 @@
               <a:t>●  </a:t>
             </a:r>
             <a:r>
-              <a:rPr sz="2100" b="0">
+              <a:rPr sz="1800" b="0">
                 <a:solidFill>
                   <a:srgbClr val="16202E"/>
                 </a:solidFill>
                 <a:latin typeface="Segoe UI"/>
               </a:rPr>
-              <a:t>It is simply assumed to help, or ignored. Nobody has tested it directly.</a:t>
-            </a:r>
-          </a:p>
-        </p:txBody>
-      </p:sp>
-      <p:sp>
-        <p:nvSpPr>
-          <p:cNvPr id="11" name="Rectangle 10"/>
-          <p:cNvSpPr/>
-          <p:nvPr/>
-        </p:nvSpPr>
-        <p:spPr>
-          <a:xfrm>
-            <a:off x="640080" y="5029200"/>
-            <a:ext cx="10881360" cy="1097280"/>
-          </a:xfrm>
-          <a:prstGeom prst="rect">
-            <a:avLst/>
-          </a:prstGeom>
-          <a:solidFill>
-            <a:srgbClr val="0E2A52"/>
-          </a:solidFill>
-          <a:ln>
-            <a:noFill/>
-          </a:ln>
-          <a:effectLst/>
-        </p:spPr>
-        <p:style>
-          <a:lnRef idx="1">
-            <a:schemeClr val="accent1"/>
-          </a:lnRef>
-          <a:fillRef idx="3">
-            <a:schemeClr val="accent1"/>
-          </a:fillRef>
-          <a:effectRef idx="2">
-            <a:schemeClr val="accent1"/>
-          </a:effectRef>
-          <a:fontRef idx="minor">
-            <a:schemeClr val="lt1"/>
-          </a:fontRef>
-        </p:style>
-        <p:txBody>
-          <a:bodyPr rtlCol="0" anchor="ctr"/>
-          <a:lstStyle/>
-          <a:p>
-            <a:pPr algn="ctr"/>
-          </a:p>
-        </p:txBody>
-      </p:sp>
+              <a:t>Roll forward day by day; score out-of-sample CVaR(0.95) of daily emissions.</a:t>
+            </a:r>
+          </a:p>
+          <a:p>
+            <a:pPr>
+              <a:lnSpc>
+                <a:spcPct val="112000"/>
+              </a:lnSpc>
+              <a:spcBef>
+                <a:spcPts val="0"/>
+              </a:spcBef>
+              <a:spcAft>
+                <a:spcPts val="1400"/>
+              </a:spcAft>
+            </a:pPr>
+            <a:r>
+              <a:rPr sz="1400" b="1">
+                <a:solidFill>
+                  <a:srgbClr val="E69F00"/>
+                </a:solidFill>
+                <a:latin typeface="Segoe UI"/>
+              </a:rPr>
+              <a:t>●  </a:t>
+            </a:r>
+            <a:r>
+              <a:rPr sz="1800" b="1">
+                <a:solidFill>
+                  <a:srgbClr val="0E2A52"/>
+                </a:solidFill>
+                <a:latin typeface="Segoe UI"/>
+              </a:rPr>
+              <a:t>Honest baseline: carbon-aware scheduling with no inter-region transfer (Phi=0), on the same feasible set.</a:t>
+            </a:r>
+          </a:p>
+        </p:txBody>
+      </p:sp>
+      <p:pic>
+        <p:nvPicPr>
+          <p:cNvPr id="11" name="Picture 10" descr="model_validation.png"/>
+          <p:cNvPicPr>
+            <a:picLocks noChangeAspect="1"/>
+          </p:cNvPicPr>
+          <p:nvPr/>
+        </p:nvPicPr>
+        <p:blipFill>
+          <a:blip r:embed="rId2"/>
+          <a:stretch>
+            <a:fillRect/>
+          </a:stretch>
+        </p:blipFill>
+        <p:spPr>
+          <a:xfrm>
+            <a:off x="6400800" y="1463040"/>
+            <a:ext cx="5212080" cy="1528122"/>
+          </a:xfrm>
+          <a:prstGeom prst="rect">
+            <a:avLst/>
+          </a:prstGeom>
+        </p:spPr>
+      </p:pic>
       <p:sp>
         <p:nvSpPr>
           <p:cNvPr id="12" name="TextBox 11"/>
@@ -10137,8 +10743,8 @@
         </p:nvSpPr>
         <p:spPr>
           <a:xfrm>
-            <a:off x="914400" y="5084064"/>
-            <a:ext cx="10332720" cy="960120"/>
+            <a:off x="6400800" y="5760720"/>
+            <a:ext cx="5212080" cy="365760"/>
           </a:xfrm>
           <a:prstGeom prst="rect">
             <a:avLst/>
@@ -10146,12 +10752,12 @@
           <a:noFill/>
         </p:spPr>
         <p:txBody>
-          <a:bodyPr wrap="square" anchor="ctr" lIns="0" rIns="0" tIns="0" bIns="0">
+          <a:bodyPr wrap="square" anchor="t" lIns="0" rIns="0" tIns="0" bIns="0">
             <a:spAutoFit/>
           </a:bodyPr>
           <a:lstStyle/>
           <a:p>
-            <a:pPr algn="l">
+            <a:pPr algn="ctr">
               <a:lnSpc>
                 <a:spcPct val="106000"/>
               </a:lnSpc>
@@ -10163,13 +10769,13 @@
               </a:spcAft>
             </a:pPr>
             <a:r>
-              <a:rPr sz="2000" b="1">
-                <a:solidFill>
-                  <a:srgbClr val="FFFFFF"/>
-                </a:solidFill>
-                <a:latin typeface="Georgia"/>
-              </a:rPr>
-              <a:t>We build the joint-covariance model, then design a test that can falsify its value.</a:t>
+              <a:rPr sz="1200" b="0">
+                <a:solidFill>
+                  <a:srgbClr val="5B6675"/>
+                </a:solidFill>
+                <a:latin typeface="Segoe UI"/>
+              </a:rPr>
+              <a:t>The scheduler matches the exact optimum on small instances.</a:t>
             </a:r>
           </a:p>
         </p:txBody>
@@ -10417,7 +11023,7 @@
                 </a:solidFill>
                 <a:latin typeface="Georgia"/>
               </a:rPr>
-              <a:t>Research questions</a:t>
+              <a:t>RQ1: the transfer lever pays</a:t>
             </a:r>
           </a:p>
         </p:txBody>
@@ -10506,7 +11112,7 @@
                 </a:solidFill>
                 <a:latin typeface="Segoe UI"/>
               </a:rPr>
-              <a:t>Spatial correlation &amp; carbon-aware DRO scheduling</a:t>
+              <a:t>The Price of Sophistication: carbon-aware data-center scheduling</a:t>
             </a:r>
           </a:p>
         </p:txBody>
@@ -10556,104 +11162,40 @@
           </a:p>
         </p:txBody>
       </p:sp>
-      <p:sp>
-        <p:nvSpPr>
-          <p:cNvPr id="10" name="Rectangle 9"/>
-          <p:cNvSpPr/>
-          <p:nvPr/>
-        </p:nvSpPr>
+      <p:pic>
+        <p:nvPicPr>
+          <p:cNvPr id="10" name="Picture 9" descr="transfer_value_curve.png"/>
+          <p:cNvPicPr>
+            <a:picLocks noChangeAspect="1"/>
+          </p:cNvPicPr>
+          <p:nvPr/>
+        </p:nvPicPr>
+        <p:blipFill>
+          <a:blip r:embed="rId2"/>
+          <a:stretch>
+            <a:fillRect/>
+          </a:stretch>
+        </p:blipFill>
         <p:spPr>
           <a:xfrm>
             <a:off x="640080" y="1417320"/>
-            <a:ext cx="10881360" cy="2148840"/>
-          </a:xfrm>
-          <a:prstGeom prst="rect">
-            <a:avLst/>
-          </a:prstGeom>
-          <a:solidFill>
-            <a:srgbClr val="F3F6FB"/>
-          </a:solidFill>
-          <a:ln>
-            <a:noFill/>
-          </a:ln>
-          <a:effectLst/>
-        </p:spPr>
-        <p:style>
-          <a:lnRef idx="1">
-            <a:schemeClr val="accent1"/>
-          </a:lnRef>
-          <a:fillRef idx="3">
-            <a:schemeClr val="accent1"/>
-          </a:fillRef>
-          <a:effectRef idx="2">
-            <a:schemeClr val="accent1"/>
-          </a:effectRef>
-          <a:fontRef idx="minor">
-            <a:schemeClr val="lt1"/>
-          </a:fontRef>
-        </p:style>
-        <p:txBody>
-          <a:bodyPr rtlCol="0" anchor="ctr"/>
-          <a:lstStyle/>
-          <a:p>
-            <a:pPr algn="ctr"/>
-          </a:p>
-        </p:txBody>
-      </p:sp>
-      <p:sp>
-        <p:nvSpPr>
-          <p:cNvPr id="11" name="Rectangle 10"/>
-          <p:cNvSpPr/>
-          <p:nvPr/>
-        </p:nvSpPr>
-        <p:spPr>
-          <a:xfrm>
-            <a:off x="640080" y="1417320"/>
-            <a:ext cx="128016" cy="2148840"/>
-          </a:xfrm>
-          <a:prstGeom prst="rect">
-            <a:avLst/>
-          </a:prstGeom>
-          <a:solidFill>
-            <a:srgbClr val="4A7C59"/>
-          </a:solidFill>
-          <a:ln>
-            <a:noFill/>
-          </a:ln>
-          <a:effectLst/>
-        </p:spPr>
-        <p:style>
-          <a:lnRef idx="1">
-            <a:schemeClr val="accent1"/>
-          </a:lnRef>
-          <a:fillRef idx="3">
-            <a:schemeClr val="accent1"/>
-          </a:fillRef>
-          <a:effectRef idx="2">
-            <a:schemeClr val="accent1"/>
-          </a:effectRef>
-          <a:fontRef idx="minor">
-            <a:schemeClr val="lt1"/>
-          </a:fontRef>
-        </p:style>
-        <p:txBody>
-          <a:bodyPr rtlCol="0" anchor="ctr"/>
-          <a:lstStyle/>
-          <a:p>
-            <a:pPr algn="ctr"/>
-          </a:p>
-        </p:txBody>
-      </p:sp>
-      <p:sp>
-        <p:nvSpPr>
-          <p:cNvPr id="12" name="TextBox 11"/>
+            <a:ext cx="6949440" cy="4391183"/>
+          </a:xfrm>
+          <a:prstGeom prst="rect">
+            <a:avLst/>
+          </a:prstGeom>
+        </p:spPr>
+      </p:pic>
+      <p:sp>
+        <p:nvSpPr>
+          <p:cNvPr id="11" name="TextBox 10"/>
           <p:cNvSpPr txBox="1"/>
           <p:nvPr/>
         </p:nvSpPr>
         <p:spPr>
           <a:xfrm>
-            <a:off x="1005840" y="1554480"/>
-            <a:ext cx="10058400" cy="548640"/>
+            <a:off x="7772400" y="1554480"/>
+            <a:ext cx="3840480" cy="4206240"/>
           </a:xfrm>
           <a:prstGeom prst="rect">
             <a:avLst/>
@@ -10661,253 +11203,151 @@
           <a:noFill/>
         </p:spPr>
         <p:txBody>
-          <a:bodyPr wrap="square" anchor="t" lIns="0" rIns="0" tIns="0" bIns="0">
+          <a:bodyPr wrap="square" lIns="0" rIns="0" tIns="0" bIns="0">
             <a:spAutoFit/>
           </a:bodyPr>
           <a:lstStyle/>
           <a:p>
-            <a:pPr algn="l">
-              <a:lnSpc>
-                <a:spcPct val="106000"/>
-              </a:lnSpc>
-              <a:spcBef>
-                <a:spcPts val="0"/>
-              </a:spcBef>
-              <a:spcAft>
-                <a:spcPts val="600"/>
-              </a:spcAft>
-            </a:pPr>
-            <a:r>
-              <a:rPr sz="2400" b="1">
+            <a:pPr>
+              <a:lnSpc>
+                <a:spcPct val="112000"/>
+              </a:lnSpc>
+              <a:spcAft>
+                <a:spcPts val="1600"/>
+              </a:spcAft>
+            </a:pPr>
+            <a:r>
+              <a:rPr sz="2000" b="1">
                 <a:solidFill>
                   <a:srgbClr val="0E2A52"/>
                 </a:solidFill>
-                <a:latin typeface="Georgia"/>
-              </a:rPr>
-              <a:t>RQ1   Is the spatial premise valid?</a:t>
-            </a:r>
-          </a:p>
-        </p:txBody>
-      </p:sp>
-      <p:sp>
-        <p:nvSpPr>
-          <p:cNvPr id="13" name="TextBox 12"/>
-          <p:cNvSpPr txBox="1"/>
-          <p:nvPr/>
-        </p:nvSpPr>
-        <p:spPr>
-          <a:xfrm>
-            <a:off x="1005840" y="2240280"/>
-            <a:ext cx="10058400" cy="1188720"/>
-          </a:xfrm>
-          <a:prstGeom prst="rect">
-            <a:avLst/>
-          </a:prstGeom>
-          <a:noFill/>
-        </p:spPr>
-        <p:txBody>
-          <a:bodyPr wrap="square" anchor="t" lIns="0" rIns="0" tIns="0" bIns="0">
-            <a:spAutoFit/>
-          </a:bodyPr>
-          <a:lstStyle/>
-          <a:p>
-            <a:pPr algn="l">
-              <a:lnSpc>
-                <a:spcPct val="106000"/>
-              </a:lnSpc>
-              <a:spcBef>
-                <a:spcPts val="0"/>
-              </a:spcBef>
-              <a:spcAft>
-                <a:spcPts val="600"/>
-              </a:spcAft>
-            </a:pPr>
-            <a:r>
-              <a:rPr sz="1900" b="0">
+                <a:latin typeface="Segoe UI"/>
+              </a:rPr>
+              <a:t>The lever, and it works</a:t>
+            </a:r>
+          </a:p>
+          <a:p>
+            <a:pPr>
+              <a:lnSpc>
+                <a:spcPct val="112000"/>
+              </a:lnSpc>
+              <a:spcBef>
+                <a:spcPts val="0"/>
+              </a:spcBef>
+              <a:spcAft>
+                <a:spcPts val="1400"/>
+              </a:spcAft>
+            </a:pPr>
+            <a:r>
+              <a:rPr sz="1300" b="1">
+                <a:solidFill>
+                  <a:srgbClr val="E69F00"/>
+                </a:solidFill>
+                <a:latin typeface="Segoe UI"/>
+              </a:rPr>
+              <a:t>●  </a:t>
+            </a:r>
+            <a:r>
+              <a:rPr sz="1700" b="1">
+                <a:solidFill>
+                  <a:srgbClr val="4A7C59"/>
+                </a:solidFill>
+                <a:latin typeface="Segoe UI"/>
+              </a:rPr>
+              <a:t>Active migration cuts out-of-sample CVaR(0.95) by 4.0 to 9.9% over Phi=0.</a:t>
+            </a:r>
+          </a:p>
+          <a:p>
+            <a:pPr>
+              <a:lnSpc>
+                <a:spcPct val="112000"/>
+              </a:lnSpc>
+              <a:spcBef>
+                <a:spcPts val="0"/>
+              </a:spcBef>
+              <a:spcAft>
+                <a:spcPts val="1400"/>
+              </a:spcAft>
+            </a:pPr>
+            <a:r>
+              <a:rPr sz="1300" b="1">
+                <a:solidFill>
+                  <a:srgbClr val="E69F00"/>
+                </a:solidFill>
+                <a:latin typeface="Segoe UI"/>
+              </a:rPr>
+              <a:t>●  </a:t>
+            </a:r>
+            <a:r>
+              <a:rPr sz="1700" b="0">
                 <a:solidFill>
                   <a:srgbClr val="16202E"/>
                 </a:solidFill>
                 <a:latin typeface="Segoe UI"/>
               </a:rPr>
-              <a:t>Is carbon intensity genuinely correlated across the regions we study, so the joint model has something real to exploit?</a:t>
-            </a:r>
-          </a:p>
-        </p:txBody>
-      </p:sp>
-      <p:sp>
-        <p:nvSpPr>
-          <p:cNvPr id="14" name="Rectangle 13"/>
-          <p:cNvSpPr/>
-          <p:nvPr/>
-        </p:nvSpPr>
-        <p:spPr>
-          <a:xfrm>
-            <a:off x="640080" y="3840480"/>
-            <a:ext cx="10881360" cy="2148840"/>
-          </a:xfrm>
-          <a:prstGeom prst="rect">
-            <a:avLst/>
-          </a:prstGeom>
-          <a:solidFill>
-            <a:srgbClr val="F3F6FB"/>
-          </a:solidFill>
-          <a:ln>
-            <a:noFill/>
-          </a:ln>
-          <a:effectLst/>
-        </p:spPr>
-        <p:style>
-          <a:lnRef idx="1">
-            <a:schemeClr val="accent1"/>
-          </a:lnRef>
-          <a:fillRef idx="3">
-            <a:schemeClr val="accent1"/>
-          </a:fillRef>
-          <a:effectRef idx="2">
-            <a:schemeClr val="accent1"/>
-          </a:effectRef>
-          <a:fontRef idx="minor">
-            <a:schemeClr val="lt1"/>
-          </a:fontRef>
-        </p:style>
-        <p:txBody>
-          <a:bodyPr rtlCol="0" anchor="ctr"/>
-          <a:lstStyle/>
-          <a:p>
-            <a:pPr algn="ctr"/>
-          </a:p>
-        </p:txBody>
-      </p:sp>
-      <p:sp>
-        <p:nvSpPr>
-          <p:cNvPr id="15" name="Rectangle 14"/>
-          <p:cNvSpPr/>
-          <p:nvPr/>
-        </p:nvSpPr>
-        <p:spPr>
-          <a:xfrm>
-            <a:off x="640080" y="3840480"/>
-            <a:ext cx="128016" cy="2148840"/>
-          </a:xfrm>
-          <a:prstGeom prst="rect">
-            <a:avLst/>
-          </a:prstGeom>
-          <a:solidFill>
-            <a:srgbClr val="B3402F"/>
-          </a:solidFill>
-          <a:ln>
-            <a:noFill/>
-          </a:ln>
-          <a:effectLst/>
-        </p:spPr>
-        <p:style>
-          <a:lnRef idx="1">
-            <a:schemeClr val="accent1"/>
-          </a:lnRef>
-          <a:fillRef idx="3">
-            <a:schemeClr val="accent1"/>
-          </a:fillRef>
-          <a:effectRef idx="2">
-            <a:schemeClr val="accent1"/>
-          </a:effectRef>
-          <a:fontRef idx="minor">
-            <a:schemeClr val="lt1"/>
-          </a:fontRef>
-        </p:style>
-        <p:txBody>
-          <a:bodyPr rtlCol="0" anchor="ctr"/>
-          <a:lstStyle/>
-          <a:p>
-            <a:pPr algn="ctr"/>
-          </a:p>
-        </p:txBody>
-      </p:sp>
-      <p:sp>
-        <p:nvSpPr>
-          <p:cNvPr id="16" name="TextBox 15"/>
-          <p:cNvSpPr txBox="1"/>
-          <p:nvPr/>
-        </p:nvSpPr>
-        <p:spPr>
-          <a:xfrm>
-            <a:off x="1005840" y="3977639"/>
-            <a:ext cx="10058400" cy="548640"/>
-          </a:xfrm>
-          <a:prstGeom prst="rect">
-            <a:avLst/>
-          </a:prstGeom>
-          <a:noFill/>
-        </p:spPr>
-        <p:txBody>
-          <a:bodyPr wrap="square" anchor="t" lIns="0" rIns="0" tIns="0" bIns="0">
-            <a:spAutoFit/>
-          </a:bodyPr>
-          <a:lstStyle/>
-          <a:p>
-            <a:pPr algn="l">
-              <a:lnSpc>
-                <a:spcPct val="106000"/>
-              </a:lnSpc>
-              <a:spcBef>
-                <a:spcPts val="0"/>
-              </a:spcBef>
-              <a:spcAft>
-                <a:spcPts val="600"/>
-              </a:spcAft>
-            </a:pPr>
-            <a:r>
-              <a:rPr sz="2400" b="1">
+              <a:t>Per grid: Western 4.0%, Eastern 9.9%, Diversified 9.0%.</a:t>
+            </a:r>
+          </a:p>
+          <a:p>
+            <a:pPr>
+              <a:lnSpc>
+                <a:spcPct val="112000"/>
+              </a:lnSpc>
+              <a:spcBef>
+                <a:spcPts val="0"/>
+              </a:spcBef>
+              <a:spcAft>
+                <a:spcPts val="1400"/>
+              </a:spcAft>
+            </a:pPr>
+            <a:r>
+              <a:rPr sz="1300" b="1">
+                <a:solidFill>
+                  <a:srgbClr val="E69F00"/>
+                </a:solidFill>
+                <a:latin typeface="Segoe UI"/>
+              </a:rPr>
+              <a:t>●  </a:t>
+            </a:r>
+            <a:r>
+              <a:rPr sz="1700" b="0">
+                <a:solidFill>
+                  <a:srgbClr val="16202E"/>
+                </a:solidFill>
+                <a:latin typeface="Segoe UI"/>
+              </a:rPr>
+              <a:t>The lever is the spatial mean: at each hour one region is cleanest, and migration ships work there.</a:t>
+            </a:r>
+          </a:p>
+          <a:p>
+            <a:pPr>
+              <a:lnSpc>
+                <a:spcPct val="112000"/>
+              </a:lnSpc>
+              <a:spcBef>
+                <a:spcPts val="0"/>
+              </a:spcBef>
+              <a:spcAft>
+                <a:spcPts val="1400"/>
+              </a:spcAft>
+            </a:pPr>
+            <a:r>
+              <a:rPr sz="1300" b="1">
+                <a:solidFill>
+                  <a:srgbClr val="E69F00"/>
+                </a:solidFill>
+                <a:latin typeface="Segoe UI"/>
+              </a:rPr>
+              <a:t>●  </a:t>
+            </a:r>
+            <a:r>
+              <a:rPr sz="1700" b="1">
                 <a:solidFill>
                   <a:srgbClr val="0E2A52"/>
                 </a:solidFill>
-                <a:latin typeface="Georgia"/>
-              </a:rPr>
-              <a:t>RQ2   Does spatial structure pay?</a:t>
-            </a:r>
-          </a:p>
-        </p:txBody>
-      </p:sp>
-      <p:sp>
-        <p:nvSpPr>
-          <p:cNvPr id="17" name="TextBox 16"/>
-          <p:cNvSpPr txBox="1"/>
-          <p:nvPr/>
-        </p:nvSpPr>
-        <p:spPr>
-          <a:xfrm>
-            <a:off x="1005840" y="4663440"/>
-            <a:ext cx="10058400" cy="1188720"/>
-          </a:xfrm>
-          <a:prstGeom prst="rect">
-            <a:avLst/>
-          </a:prstGeom>
-          <a:noFill/>
-        </p:spPr>
-        <p:txBody>
-          <a:bodyPr wrap="square" anchor="t" lIns="0" rIns="0" tIns="0" bIns="0">
-            <a:spAutoFit/>
-          </a:bodyPr>
-          <a:lstStyle/>
-          <a:p>
-            <a:pPr algn="l">
-              <a:lnSpc>
-                <a:spcPct val="106000"/>
-              </a:lnSpc>
-              <a:spcBef>
-                <a:spcPts val="0"/>
-              </a:spcBef>
-              <a:spcAft>
-                <a:spcPts val="600"/>
-              </a:spcAft>
-            </a:pPr>
-            <a:r>
-              <a:rPr sz="1900" b="0">
-                <a:solidFill>
-                  <a:srgbClr val="16202E"/>
-                </a:solidFill>
-                <a:latin typeface="Segoe UI"/>
-              </a:rPr>
-              <a:t>Does scheduling to the joint covariance beat scheduling to the marginals alone, measured by out-of-sample tail risk?</a:t>
+                <a:latin typeface="Segoe UI"/>
+              </a:rPr>
+              <a:t>Deterministic: captured with no dependence model at all.</a:t>
             </a:r>
           </a:p>
         </p:txBody>
@@ -11155,7 +11595,7 @@
                 </a:solidFill>
                 <a:latin typeface="Georgia"/>
               </a:rPr>
-              <a:t>Method 1: the robust model</a:t>
+              <a:t>Where the value lives</a:t>
             </a:r>
           </a:p>
         </p:txBody>
@@ -11244,7 +11684,7 @@
                 </a:solidFill>
                 <a:latin typeface="Segoe UI"/>
               </a:rPr>
-              <a:t>Spatial correlation &amp; carbon-aware DRO scheduling</a:t>
+              <a:t>The Price of Sophistication: carbon-aware data-center scheduling</a:t>
             </a:r>
           </a:p>
         </p:txBody>
@@ -11294,188 +11734,9 @@
           </a:p>
         </p:txBody>
       </p:sp>
-      <p:sp>
-        <p:nvSpPr>
-          <p:cNvPr id="10" name="TextBox 9"/>
-          <p:cNvSpPr txBox="1"/>
-          <p:nvPr/>
-        </p:nvSpPr>
-        <p:spPr>
-          <a:xfrm>
-            <a:off x="640080" y="1371600"/>
-            <a:ext cx="5577840" cy="4206240"/>
-          </a:xfrm>
-          <a:prstGeom prst="rect">
-            <a:avLst/>
-          </a:prstGeom>
-          <a:noFill/>
-        </p:spPr>
-        <p:txBody>
-          <a:bodyPr wrap="square" lIns="0" rIns="0" tIns="0" bIns="0">
-            <a:spAutoFit/>
-          </a:bodyPr>
-          <a:lstStyle/>
-          <a:p>
-            <a:pPr>
-              <a:lnSpc>
-                <a:spcPct val="112000"/>
-              </a:lnSpc>
-              <a:spcAft>
-                <a:spcPts val="1700"/>
-              </a:spcAft>
-            </a:pPr>
-            <a:r>
-              <a:rPr sz="2100" b="1">
-                <a:solidFill>
-                  <a:srgbClr val="0E2A52"/>
-                </a:solidFill>
-                <a:latin typeface="Segoe UI"/>
-              </a:rPr>
-              <a:t>DRO as a second-order cone program</a:t>
-            </a:r>
-          </a:p>
-          <a:p>
-            <a:pPr>
-              <a:lnSpc>
-                <a:spcPct val="112000"/>
-              </a:lnSpc>
-              <a:spcBef>
-                <a:spcPts val="0"/>
-              </a:spcBef>
-              <a:spcAft>
-                <a:spcPts val="1500"/>
-              </a:spcAft>
-            </a:pPr>
-            <a:r>
-              <a:rPr sz="1400" b="1">
-                <a:solidFill>
-                  <a:srgbClr val="E69F00"/>
-                </a:solidFill>
-                <a:latin typeface="Segoe UI"/>
-              </a:rPr>
-              <a:t>●  </a:t>
-            </a:r>
-            <a:r>
-              <a:rPr sz="1800" b="0">
-                <a:solidFill>
-                  <a:srgbClr val="16202E"/>
-                </a:solidFill>
-                <a:latin typeface="Segoe UI"/>
-              </a:rPr>
-              <a:t>Mahalanobis–Wasserstein DRO: hedge against carbon distributions close to the data in a covariance-aware metric.</a:t>
-            </a:r>
-          </a:p>
-          <a:p>
-            <a:pPr>
-              <a:lnSpc>
-                <a:spcPct val="112000"/>
-              </a:lnSpc>
-              <a:spcBef>
-                <a:spcPts val="0"/>
-              </a:spcBef>
-              <a:spcAft>
-                <a:spcPts val="1500"/>
-              </a:spcAft>
-            </a:pPr>
-            <a:r>
-              <a:rPr sz="1400" b="1">
-                <a:solidFill>
-                  <a:srgbClr val="E69F00"/>
-                </a:solidFill>
-                <a:latin typeface="Segoe UI"/>
-              </a:rPr>
-              <a:t>●  </a:t>
-            </a:r>
-            <a:r>
-              <a:rPr sz="1800" b="0">
-                <a:solidFill>
-                  <a:srgbClr val="16202E"/>
-                </a:solidFill>
-                <a:latin typeface="Segoe UI"/>
-              </a:rPr>
-              <a:t>It reduces to a second-order cone program (SOCP), solved exactly and fast.</a:t>
-            </a:r>
-          </a:p>
-          <a:p>
-            <a:pPr>
-              <a:lnSpc>
-                <a:spcPct val="112000"/>
-              </a:lnSpc>
-              <a:spcBef>
-                <a:spcPts val="0"/>
-              </a:spcBef>
-              <a:spcAft>
-                <a:spcPts val="1500"/>
-              </a:spcAft>
-            </a:pPr>
-            <a:r>
-              <a:rPr sz="1400" b="1">
-                <a:solidFill>
-                  <a:srgbClr val="E69F00"/>
-                </a:solidFill>
-                <a:latin typeface="Segoe UI"/>
-              </a:rPr>
-              <a:t>●  </a:t>
-            </a:r>
-            <a:r>
-              <a:rPr sz="1800" b="0">
-                <a:solidFill>
-                  <a:srgbClr val="16202E"/>
-                </a:solidFill>
-                <a:latin typeface="Segoe UI"/>
-              </a:rPr>
-              <a:t>ε sets the robustness radius; Σ̂ carries the spatial structure through L.</a:t>
-            </a:r>
-          </a:p>
-        </p:txBody>
-      </p:sp>
-      <p:sp>
-        <p:nvSpPr>
-          <p:cNvPr id="11" name="Rectangle 10"/>
-          <p:cNvSpPr/>
-          <p:nvPr/>
-        </p:nvSpPr>
-        <p:spPr>
-          <a:xfrm>
-            <a:off x="6400800" y="2011680"/>
-            <a:ext cx="5212080" cy="1371600"/>
-          </a:xfrm>
-          <a:prstGeom prst="rect">
-            <a:avLst/>
-          </a:prstGeom>
-          <a:solidFill>
-            <a:srgbClr val="F3F6FB"/>
-          </a:solidFill>
-          <a:ln>
-            <a:noFill/>
-          </a:ln>
-          <a:effectLst/>
-        </p:spPr>
-        <p:style>
-          <a:lnRef idx="1">
-            <a:schemeClr val="accent1"/>
-          </a:lnRef>
-          <a:fillRef idx="3">
-            <a:schemeClr val="accent1"/>
-          </a:fillRef>
-          <a:effectRef idx="2">
-            <a:schemeClr val="accent1"/>
-          </a:effectRef>
-          <a:fontRef idx="minor">
-            <a:schemeClr val="lt1"/>
-          </a:fontRef>
-        </p:style>
-        <p:txBody>
-          <a:bodyPr rtlCol="0" anchor="ctr"/>
-          <a:lstStyle/>
-          <a:p>
-            <a:pPr algn="ctr"/>
-          </a:p>
-        </p:txBody>
-      </p:sp>
       <p:pic>
         <p:nvPicPr>
-          <p:cNvPr id="12" name="Picture 11" descr="_eq_dro.png"/>
+          <p:cNvPr id="10" name="Picture 9" descr="complexity_frontier.png"/>
           <p:cNvPicPr>
             <a:picLocks noChangeAspect="1"/>
           </p:cNvPicPr>
@@ -11489,8 +11750,8 @@
         </p:blipFill>
         <p:spPr>
           <a:xfrm>
-            <a:off x="6537959" y="2331720"/>
-            <a:ext cx="4937760" cy="622866"/>
+            <a:off x="640080" y="1417320"/>
+            <a:ext cx="4503018" cy="4480560"/>
           </a:xfrm>
           <a:prstGeom prst="rect">
             <a:avLst/>
@@ -11499,14 +11760,14 @@
       </p:pic>
       <p:sp>
         <p:nvSpPr>
-          <p:cNvPr id="13" name="TextBox 12"/>
+          <p:cNvPr id="11" name="TextBox 10"/>
           <p:cNvSpPr txBox="1"/>
           <p:nvPr/>
         </p:nvSpPr>
         <p:spPr>
           <a:xfrm>
-            <a:off x="6400800" y="3703320"/>
-            <a:ext cx="5212080" cy="1645920"/>
+            <a:off x="7772400" y="1554480"/>
+            <a:ext cx="3840480" cy="4206240"/>
           </a:xfrm>
           <a:prstGeom prst="rect">
             <a:avLst/>
@@ -11514,30 +11775,151 @@
           <a:noFill/>
         </p:spPr>
         <p:txBody>
-          <a:bodyPr wrap="square" anchor="t" lIns="0" rIns="0" tIns="0" bIns="0">
+          <a:bodyPr wrap="square" lIns="0" rIns="0" tIns="0" bIns="0">
             <a:spAutoFit/>
           </a:bodyPr>
           <a:lstStyle/>
           <a:p>
-            <a:pPr algn="l">
-              <a:lnSpc>
-                <a:spcPct val="106000"/>
-              </a:lnSpc>
-              <a:spcBef>
-                <a:spcPts val="0"/>
-              </a:spcBef>
-              <a:spcAft>
-                <a:spcPts val="600"/>
-              </a:spcAft>
-            </a:pPr>
-            <a:r>
-              <a:rPr sz="1600" b="0">
-                <a:solidFill>
-                  <a:srgbClr val="5B6675"/>
-                </a:solidFill>
-                <a:latin typeface="Segoe UI"/>
-              </a:rPr>
-              <a:t>The covariance Σ̂ enters only through the cone term ε‖Lᵀx‖. Destroy the cross-region part of Σ̂ and we get a clean control.</a:t>
+            <a:pPr>
+              <a:lnSpc>
+                <a:spcPct val="112000"/>
+              </a:lnSpc>
+              <a:spcAft>
+                <a:spcPts val="1700"/>
+              </a:spcAft>
+            </a:pPr>
+            <a:r>
+              <a:rPr sz="2100" b="1">
+                <a:solidFill>
+                  <a:srgbClr val="0E2A52"/>
+                </a:solidFill>
+                <a:latin typeface="Segoe UI"/>
+              </a:rPr>
+              <a:t>The frontier</a:t>
+            </a:r>
+          </a:p>
+          <a:p>
+            <a:pPr>
+              <a:lnSpc>
+                <a:spcPct val="112000"/>
+              </a:lnSpc>
+              <a:spcBef>
+                <a:spcPts val="0"/>
+              </a:spcBef>
+              <a:spcAft>
+                <a:spcPts val="1500"/>
+              </a:spcAft>
+            </a:pPr>
+            <a:r>
+              <a:rPr sz="1400" b="1">
+                <a:solidFill>
+                  <a:srgbClr val="E69F00"/>
+                </a:solidFill>
+                <a:latin typeface="Segoe UI"/>
+              </a:rPr>
+              <a:t>●  </a:t>
+            </a:r>
+            <a:r>
+              <a:rPr sz="1800" b="0">
+                <a:solidFill>
+                  <a:srgbClr val="16202E"/>
+                </a:solidFill>
+                <a:latin typeface="Segoe UI"/>
+              </a:rPr>
+              <a:t>Every model class on one complexity-value frontier.</a:t>
+            </a:r>
+          </a:p>
+          <a:p>
+            <a:pPr>
+              <a:lnSpc>
+                <a:spcPct val="112000"/>
+              </a:lnSpc>
+              <a:spcBef>
+                <a:spcPts val="0"/>
+              </a:spcBef>
+              <a:spcAft>
+                <a:spcPts val="1500"/>
+              </a:spcAft>
+            </a:pPr>
+            <a:r>
+              <a:rPr sz="1400" b="1">
+                <a:solidFill>
+                  <a:srgbClr val="E69F00"/>
+                </a:solidFill>
+                <a:latin typeface="Segoe UI"/>
+              </a:rPr>
+              <a:t>●  </a:t>
+            </a:r>
+            <a:r>
+              <a:rPr sz="1800" b="1">
+                <a:solidFill>
+                  <a:srgbClr val="4A7C59"/>
+                </a:solidFill>
+                <a:latin typeface="Segoe UI"/>
+              </a:rPr>
+              <a:t>Deterministic transfer dominates the frontier.</a:t>
+            </a:r>
+          </a:p>
+          <a:p>
+            <a:pPr>
+              <a:lnSpc>
+                <a:spcPct val="112000"/>
+              </a:lnSpc>
+              <a:spcBef>
+                <a:spcPts val="0"/>
+              </a:spcBef>
+              <a:spcAft>
+                <a:spcPts val="1500"/>
+              </a:spcAft>
+            </a:pPr>
+            <a:r>
+              <a:rPr sz="1400" b="1">
+                <a:solidFill>
+                  <a:srgbClr val="E69F00"/>
+                </a:solidFill>
+                <a:latin typeface="Segoe UI"/>
+              </a:rPr>
+              <a:t>●  </a:t>
+            </a:r>
+            <a:r>
+              <a:rPr sz="1800" b="0">
+                <a:solidFill>
+                  <a:srgbClr val="16202E"/>
+                </a:solidFill>
+                <a:latin typeface="Segoe UI"/>
+              </a:rPr>
+              <a:t>Passive covariance and copula layers add no height.</a:t>
+            </a:r>
+          </a:p>
+          <a:p>
+            <a:pPr>
+              <a:lnSpc>
+                <a:spcPct val="112000"/>
+              </a:lnSpc>
+              <a:spcBef>
+                <a:spcPts val="0"/>
+              </a:spcBef>
+              <a:spcAft>
+                <a:spcPts val="1500"/>
+              </a:spcAft>
+            </a:pPr>
+            <a:r>
+              <a:rPr sz="1400" b="1">
+                <a:solidFill>
+                  <a:srgbClr val="E69F00"/>
+                </a:solidFill>
+                <a:latin typeface="Segoe UI"/>
+              </a:rPr>
+              <a:t>●  </a:t>
+            </a:r>
+            <a:r>
+              <a:rPr sz="1800" b="0">
+                <a:solidFill>
+                  <a:srgbClr val="16202E"/>
+                </a:solidFill>
+                <a:latin typeface="Segoe UI"/>
+              </a:rPr>
+              <a:t>Robust transfer pays only in the tail, conditional on severity.</a:t>
             </a:r>
           </a:p>
         </p:txBody>
@@ -11785,7 +12167,7 @@
                 </a:solidFill>
                 <a:latin typeface="Georgia"/>
               </a:rPr>
-              <a:t>Method 2: the falsification test</a:t>
+              <a:t>RQ2: passive sophistication adds nothing</a:t>
             </a:r>
           </a:p>
         </p:txBody>
@@ -11874,7 +12256,7 @@
                 </a:solidFill>
                 <a:latin typeface="Segoe UI"/>
               </a:rPr>
-              <a:t>Spatial correlation &amp; carbon-aware DRO scheduling</a:t>
+              <a:t>The Price of Sophistication: carbon-aware data-center scheduling</a:t>
             </a:r>
           </a:p>
         </p:txBody>
@@ -11924,175 +12306,9 @@
           </a:p>
         </p:txBody>
       </p:sp>
-      <p:sp>
-        <p:nvSpPr>
-          <p:cNvPr id="10" name="TextBox 9"/>
-          <p:cNvSpPr txBox="1"/>
-          <p:nvPr/>
-        </p:nvSpPr>
-        <p:spPr>
-          <a:xfrm>
-            <a:off x="640080" y="1325880"/>
-            <a:ext cx="5577840" cy="4572000"/>
-          </a:xfrm>
-          <a:prstGeom prst="rect">
-            <a:avLst/>
-          </a:prstGeom>
-          <a:noFill/>
-        </p:spPr>
-        <p:txBody>
-          <a:bodyPr wrap="square" lIns="0" rIns="0" tIns="0" bIns="0">
-            <a:spAutoFit/>
-          </a:bodyPr>
-          <a:lstStyle/>
-          <a:p>
-            <a:pPr>
-              <a:lnSpc>
-                <a:spcPct val="112000"/>
-              </a:lnSpc>
-              <a:spcAft>
-                <a:spcPts val="1600"/>
-              </a:spcAft>
-            </a:pPr>
-            <a:r>
-              <a:rPr sz="2100" b="1">
-                <a:solidFill>
-                  <a:srgbClr val="0E2A52"/>
-                </a:solidFill>
-                <a:latin typeface="Segoe UI"/>
-              </a:rPr>
-              <a:t>Shuffled marginals</a:t>
-            </a:r>
-          </a:p>
-          <a:p>
-            <a:pPr>
-              <a:lnSpc>
-                <a:spcPct val="112000"/>
-              </a:lnSpc>
-              <a:spcBef>
-                <a:spcPts val="0"/>
-              </a:spcBef>
-              <a:spcAft>
-                <a:spcPts val="1400"/>
-              </a:spcAft>
-            </a:pPr>
-            <a:r>
-              <a:rPr sz="1400" b="1">
-                <a:solidFill>
-                  <a:srgbClr val="E69F00"/>
-                </a:solidFill>
-                <a:latin typeface="Segoe UI"/>
-              </a:rPr>
-              <a:t>●  </a:t>
-            </a:r>
-            <a:r>
-              <a:rPr sz="1800" b="0">
-                <a:solidFill>
-                  <a:srgbClr val="16202E"/>
-                </a:solidFill>
-                <a:latin typeface="Segoe UI"/>
-              </a:rPr>
-              <a:t>Fit the schedule to the full joint covariance.</a:t>
-            </a:r>
-          </a:p>
-          <a:p>
-            <a:pPr>
-              <a:lnSpc>
-                <a:spcPct val="112000"/>
-              </a:lnSpc>
-              <a:spcBef>
-                <a:spcPts val="0"/>
-              </a:spcBef>
-              <a:spcAft>
-                <a:spcPts val="1400"/>
-              </a:spcAft>
-            </a:pPr>
-            <a:r>
-              <a:rPr sz="1400" b="1">
-                <a:solidFill>
-                  <a:srgbClr val="E69F00"/>
-                </a:solidFill>
-                <a:latin typeface="Segoe UI"/>
-              </a:rPr>
-              <a:t>●  </a:t>
-            </a:r>
-            <a:r>
-              <a:rPr sz="1800" b="0">
-                <a:solidFill>
-                  <a:srgbClr val="16202E"/>
-                </a:solidFill>
-                <a:latin typeface="Segoe UI"/>
-              </a:rPr>
-              <a:t>Refit it to a block-diagonal covariance: identical marginals, cross-region structure destroyed (shuffled).</a:t>
-            </a:r>
-          </a:p>
-          <a:p>
-            <a:pPr>
-              <a:lnSpc>
-                <a:spcPct val="112000"/>
-              </a:lnSpc>
-              <a:spcBef>
-                <a:spcPts val="0"/>
-              </a:spcBef>
-              <a:spcAft>
-                <a:spcPts val="1400"/>
-              </a:spcAft>
-            </a:pPr>
-            <a:r>
-              <a:rPr sz="1400" b="1">
-                <a:solidFill>
-                  <a:srgbClr val="E69F00"/>
-                </a:solidFill>
-                <a:latin typeface="Segoe UI"/>
-              </a:rPr>
-              <a:t>●  </a:t>
-            </a:r>
-            <a:r>
-              <a:rPr sz="1800" b="0">
-                <a:solidFill>
-                  <a:srgbClr val="16202E"/>
-                </a:solidFill>
-                <a:latin typeface="Segoe UI"/>
-              </a:rPr>
-              <a:t>Score both on out-of-sample CVaR₀.₉₅ of daily emissions.</a:t>
-            </a:r>
-          </a:p>
-          <a:p>
-            <a:pPr>
-              <a:lnSpc>
-                <a:spcPct val="112000"/>
-              </a:lnSpc>
-              <a:spcBef>
-                <a:spcPts val="0"/>
-              </a:spcBef>
-              <a:spcAft>
-                <a:spcPts val="1400"/>
-              </a:spcAft>
-            </a:pPr>
-            <a:r>
-              <a:rPr sz="1400" b="1">
-                <a:solidFill>
-                  <a:srgbClr val="E69F00"/>
-                </a:solidFill>
-                <a:latin typeface="Segoe UI"/>
-              </a:rPr>
-              <a:t>●  </a:t>
-            </a:r>
-            <a:r>
-              <a:rPr sz="1800" b="1">
-                <a:solidFill>
-                  <a:srgbClr val="0E2A52"/>
-                </a:solidFill>
-                <a:latin typeface="Segoe UI"/>
-              </a:rPr>
-              <a:t>Pre-registered. If spatial structure matters, the joint schedule must win.</a:t>
-            </a:r>
-          </a:p>
-        </p:txBody>
-      </p:sp>
       <p:pic>
         <p:nvPicPr>
-          <p:cNvPr id="11" name="Picture 10" descr="schedule_us_west.png"/>
+          <p:cNvPr id="10" name="Picture 9" descr="cv_curve.png"/>
           <p:cNvPicPr>
             <a:picLocks noChangeAspect="1"/>
           </p:cNvPicPr>
@@ -12106,8 +12322,8 @@
         </p:blipFill>
         <p:spPr>
           <a:xfrm>
-            <a:off x="6400800" y="1463040"/>
-            <a:ext cx="5212080" cy="1420513"/>
+            <a:off x="640080" y="1417320"/>
+            <a:ext cx="6766560" cy="1963683"/>
           </a:xfrm>
           <a:prstGeom prst="rect">
             <a:avLst/>
@@ -12116,14 +12332,14 @@
       </p:pic>
       <p:sp>
         <p:nvSpPr>
-          <p:cNvPr id="12" name="TextBox 11"/>
+          <p:cNvPr id="11" name="TextBox 10"/>
           <p:cNvSpPr txBox="1"/>
           <p:nvPr/>
         </p:nvSpPr>
         <p:spPr>
           <a:xfrm>
-            <a:off x="6400800" y="5760720"/>
-            <a:ext cx="5212080" cy="365760"/>
+            <a:off x="7680960" y="1554480"/>
+            <a:ext cx="3931920" cy="4389120"/>
           </a:xfrm>
           <a:prstGeom prst="rect">
             <a:avLst/>
@@ -12131,30 +12347,120 @@
           <a:noFill/>
         </p:spPr>
         <p:txBody>
-          <a:bodyPr wrap="square" anchor="t" lIns="0" rIns="0" tIns="0" bIns="0">
+          <a:bodyPr wrap="square" lIns="0" rIns="0" tIns="0" bIns="0">
             <a:spAutoFit/>
           </a:bodyPr>
           <a:lstStyle/>
           <a:p>
-            <a:pPr algn="ctr">
-              <a:lnSpc>
-                <a:spcPct val="106000"/>
-              </a:lnSpc>
-              <a:spcBef>
-                <a:spcPts val="0"/>
-              </a:spcBef>
-              <a:spcAft>
-                <a:spcPts val="600"/>
-              </a:spcAft>
-            </a:pPr>
-            <a:r>
-              <a:rPr sz="1200" b="0">
-                <a:solidFill>
-                  <a:srgbClr val="5B6675"/>
-                </a:solidFill>
-                <a:latin typeface="Segoe UI"/>
-              </a:rPr>
-              <a:t>Joint vs shuffled schedules, side by side.</a:t>
+            <a:pPr>
+              <a:lnSpc>
+                <a:spcPct val="112000"/>
+              </a:lnSpc>
+              <a:spcAft>
+                <a:spcPts val="1600"/>
+              </a:spcAft>
+            </a:pPr>
+            <a:r>
+              <a:rPr sz="2000" b="1">
+                <a:solidFill>
+                  <a:srgbClr val="0E2A52"/>
+                </a:solidFill>
+                <a:latin typeface="Segoe UI"/>
+              </a:rPr>
+              <a:t>A strong, active null</a:t>
+            </a:r>
+          </a:p>
+          <a:p>
+            <a:pPr>
+              <a:lnSpc>
+                <a:spcPct val="112000"/>
+              </a:lnSpc>
+              <a:spcBef>
+                <a:spcPts val="0"/>
+              </a:spcBef>
+              <a:spcAft>
+                <a:spcPts val="1400"/>
+              </a:spcAft>
+            </a:pPr>
+            <a:r>
+              <a:rPr sz="1300" b="1">
+                <a:solidFill>
+                  <a:srgbClr val="E69F00"/>
+                </a:solidFill>
+                <a:latin typeface="Segoe UI"/>
+              </a:rPr>
+              <a:t>●  </a:t>
+            </a:r>
+            <a:r>
+              <a:rPr sz="1700" b="0">
+                <a:solidFill>
+                  <a:srgbClr val="16202E"/>
+                </a:solidFill>
+                <a:latin typeface="Segoe UI"/>
+              </a:rPr>
+              <a:t>The spatial covariance gap stays below 0.4% of CVaR, and its sign is not stable.</a:t>
+            </a:r>
+          </a:p>
+          <a:p>
+            <a:pPr>
+              <a:lnSpc>
+                <a:spcPct val="112000"/>
+              </a:lnSpc>
+              <a:spcBef>
+                <a:spcPts val="0"/>
+              </a:spcBef>
+              <a:spcAft>
+                <a:spcPts val="1400"/>
+              </a:spcAft>
+            </a:pPr>
+            <a:r>
+              <a:rPr sz="1300" b="1">
+                <a:solidFill>
+                  <a:srgbClr val="E69F00"/>
+                </a:solidFill>
+                <a:latin typeface="Segoe UI"/>
+              </a:rPr>
+              <a:t>●  </a:t>
+            </a:r>
+            <a:r>
+              <a:rPr sz="1700" b="0">
+                <a:solidFill>
+                  <a:srgbClr val="16202E"/>
+                </a:solidFill>
+                <a:latin typeface="Segoe UI"/>
+              </a:rPr>
+              <a:t>The DRO is genuinely engaged (CV selects a non-trivial radius), so this is an active null, not a switched-off one.</a:t>
+            </a:r>
+          </a:p>
+          <a:p>
+            <a:pPr>
+              <a:lnSpc>
+                <a:spcPct val="112000"/>
+              </a:lnSpc>
+              <a:spcBef>
+                <a:spcPts val="0"/>
+              </a:spcBef>
+              <a:spcAft>
+                <a:spcPts val="1400"/>
+              </a:spcAft>
+            </a:pPr>
+            <a:r>
+              <a:rPr sz="1300" b="1">
+                <a:solidFill>
+                  <a:srgbClr val="E69F00"/>
+                </a:solidFill>
+                <a:latin typeface="Segoe UI"/>
+              </a:rPr>
+              <a:t>●  </a:t>
+            </a:r>
+            <a:r>
+              <a:rPr sz="1700" b="1">
+                <a:solidFill>
+                  <a:srgbClr val="0E2A52"/>
+                </a:solidFill>
+                <a:latin typeface="Segoe UI"/>
+              </a:rPr>
+              <a:t>Design justification: a simple per-region model is enough.</a:t>
             </a:r>
           </a:p>
         </p:txBody>
@@ -12402,7 +12708,7 @@
                 </a:solidFill>
                 <a:latin typeface="Georgia"/>
               </a:rPr>
-              <a:t>Data: three grids across the spectrum</a:t>
+              <a:t>Why covariance cannot add value</a:t>
             </a:r>
           </a:p>
         </p:txBody>
@@ -12491,7 +12797,7 @@
                 </a:solidFill>
                 <a:latin typeface="Segoe UI"/>
               </a:rPr>
-              <a:t>Spatial correlation &amp; carbon-aware DRO scheduling</a:t>
+              <a:t>The Price of Sophistication: carbon-aware data-center scheduling</a:t>
             </a:r>
           </a:p>
         </p:txBody>
@@ -12550,7 +12856,7 @@
         <p:spPr>
           <a:xfrm>
             <a:off x="640080" y="1371600"/>
-            <a:ext cx="5577840" cy="4389120"/>
+            <a:ext cx="5577840" cy="4206240"/>
           </a:xfrm>
           <a:prstGeom prst="rect">
             <a:avLst/>
@@ -12568,7 +12874,7 @@
                 <a:spcPct val="112000"/>
               </a:lnSpc>
               <a:spcAft>
-                <a:spcPts val="1600"/>
+                <a:spcPts val="1500"/>
               </a:spcAft>
             </a:pPr>
             <a:r>
@@ -12578,7 +12884,7 @@
                 </a:solidFill>
                 <a:latin typeface="Segoe UI"/>
               </a:rPr>
-              <a:t>Real Electricity Maps carbon intensity</a:t>
+              <a:t>The mechanism</a:t>
             </a:r>
           </a:p>
           <a:p>
@@ -12590,7 +12896,7 @@
                 <a:spcPts val="0"/>
               </a:spcBef>
               <a:spcAft>
-                <a:spcPts val="1400"/>
+                <a:spcPts val="1300"/>
               </a:spcAft>
             </a:pPr>
             <a:r>
@@ -12603,13 +12909,44 @@
               <a:t>●  </a:t>
             </a:r>
             <a:r>
+              <a:rPr sz="1800" b="1">
+                <a:solidFill>
+                  <a:srgbClr val="B3402F"/>
+                </a:solidFill>
+                <a:latin typeface="Segoe UI"/>
+              </a:rPr>
+              <a:t>Mean-ablation: flatten the mean field and the covariance suddenly pays, up to +1.46%.</a:t>
+            </a:r>
+          </a:p>
+          <a:p>
+            <a:pPr>
+              <a:lnSpc>
+                <a:spcPct val="112000"/>
+              </a:lnSpc>
+              <a:spcBef>
+                <a:spcPts val="0"/>
+              </a:spcBef>
+              <a:spcAft>
+                <a:spcPts val="1300"/>
+              </a:spcAft>
+            </a:pPr>
+            <a:r>
+              <a:rPr sz="1400" b="1">
+                <a:solidFill>
+                  <a:srgbClr val="E69F00"/>
+                </a:solidFill>
+                <a:latin typeface="Segoe UI"/>
+              </a:rPr>
+              <a:t>●  </a:t>
+            </a:r>
+            <a:r>
               <a:rPr sz="1800" b="0">
                 <a:solidFill>
                   <a:srgbClr val="16202E"/>
                 </a:solidFill>
                 <a:latin typeface="Segoe UI"/>
               </a:rPr>
-              <a:t>US West: a strongly, uniformly correlated grid (common-mode).</a:t>
+              <a:t>So the spatial signal is real, but masked by the within-day mean carbon field.</a:t>
             </a:r>
           </a:p>
           <a:p>
@@ -12621,7 +12958,7 @@
                 <a:spcPts val="0"/>
               </a:spcBef>
               <a:spcAft>
-                <a:spcPts val="1400"/>
+                <a:spcPts val="1300"/>
               </a:spcAft>
             </a:pPr>
             <a:r>
@@ -12640,7 +12977,7 @@
                 </a:solidFill>
                 <a:latin typeface="Segoe UI"/>
               </a:rPr>
-              <a:t>Eastern Interconnection belt: an Ontario-anchored mid-correlation set.</a:t>
+              <a:t>Residual dependence is also non-elliptical and upper-tail independent, invisible to a covariance ball.</a:t>
             </a:r>
           </a:p>
           <a:p>
@@ -12652,7 +12989,7 @@
                 <a:spcPts val="0"/>
               </a:spcBef>
               <a:spcAft>
-                <a:spcPts val="1400"/>
+                <a:spcPts val="1300"/>
               </a:spcAft>
             </a:pPr>
             <a:r>
@@ -12671,66 +13008,55 @@
                 </a:solidFill>
                 <a:latin typeface="Segoe UI"/>
               </a:rPr>
-              <a:t>Engineered solar / wind / hydro portfolio: low, heterogeneous correlation.</a:t>
-            </a:r>
-          </a:p>
-          <a:p>
-            <a:pPr>
-              <a:lnSpc>
-                <a:spcPct val="112000"/>
-              </a:lnSpc>
-              <a:spcBef>
-                <a:spcPts val="0"/>
-              </a:spcBef>
-              <a:spcAft>
-                <a:spcPts val="1400"/>
-              </a:spcAft>
-            </a:pPr>
-            <a:r>
-              <a:rPr sz="1400" b="1">
-                <a:solidFill>
-                  <a:srgbClr val="E69F00"/>
-                </a:solidFill>
-                <a:latin typeface="Segoe UI"/>
-              </a:rPr>
-              <a:t>●  </a:t>
-            </a:r>
-            <a:r>
-              <a:rPr sz="1800" b="0">
-                <a:solidFill>
-                  <a:srgbClr val="16202E"/>
-                </a:solidFill>
-                <a:latin typeface="Segoe UI"/>
-              </a:rPr>
-              <a:t>Iberia–France: an independent low-correlation anchor.</a:t>
-            </a:r>
-          </a:p>
-        </p:txBody>
-      </p:sp>
-      <p:pic>
-        <p:nvPicPr>
-          <p:cNvPr id="11" name="Picture 10" descr="correlation_map.png"/>
-          <p:cNvPicPr>
-            <a:picLocks noChangeAspect="1"/>
-          </p:cNvPicPr>
-          <p:nvPr/>
-        </p:nvPicPr>
-        <p:blipFill>
-          <a:blip r:embed="rId2"/>
-          <a:stretch>
-            <a:fillRect/>
-          </a:stretch>
-        </p:blipFill>
+              <a:t>We checked richer dependence models (Gaussian, Clayton, comonotone): they add nothing.</a:t>
+            </a:r>
+          </a:p>
+        </p:txBody>
+      </p:sp>
+      <p:sp>
+        <p:nvSpPr>
+          <p:cNvPr id="11" name="Rectangle 10"/>
+          <p:cNvSpPr/>
+          <p:nvPr/>
+        </p:nvSpPr>
         <p:spPr>
           <a:xfrm>
             <a:off x="6400800" y="1554480"/>
-            <a:ext cx="5212080" cy="3086662"/>
-          </a:xfrm>
-          <a:prstGeom prst="rect">
-            <a:avLst/>
-          </a:prstGeom>
-        </p:spPr>
-      </p:pic>
+            <a:ext cx="5212080" cy="4114800"/>
+          </a:xfrm>
+          <a:prstGeom prst="rect">
+            <a:avLst/>
+          </a:prstGeom>
+          <a:solidFill>
+            <a:srgbClr val="F3F6FB"/>
+          </a:solidFill>
+          <a:ln>
+            <a:noFill/>
+          </a:ln>
+          <a:effectLst/>
+        </p:spPr>
+        <p:style>
+          <a:lnRef idx="1">
+            <a:schemeClr val="accent1"/>
+          </a:lnRef>
+          <a:fillRef idx="3">
+            <a:schemeClr val="accent1"/>
+          </a:fillRef>
+          <a:effectRef idx="2">
+            <a:schemeClr val="accent1"/>
+          </a:effectRef>
+          <a:fontRef idx="minor">
+            <a:schemeClr val="lt1"/>
+          </a:fontRef>
+        </p:style>
+        <p:txBody>
+          <a:bodyPr rtlCol="0" anchor="ctr"/>
+          <a:lstStyle/>
+          <a:p>
+            <a:pPr algn="ctr"/>
+          </a:p>
+        </p:txBody>
+      </p:sp>
       <p:sp>
         <p:nvSpPr>
           <p:cNvPr id="12" name="TextBox 11"/>
@@ -12739,8 +13065,8 @@
         </p:nvSpPr>
         <p:spPr>
           <a:xfrm>
-            <a:off x="6400800" y="5715000"/>
-            <a:ext cx="5212080" cy="365760"/>
+            <a:off x="6629400" y="1783080"/>
+            <a:ext cx="4754880" cy="3749039"/>
           </a:xfrm>
           <a:prstGeom prst="rect">
             <a:avLst/>
@@ -12753,7 +13079,7 @@
           </a:bodyPr>
           <a:lstStyle/>
           <a:p>
-            <a:pPr algn="ctr">
+            <a:pPr algn="l">
               <a:lnSpc>
                 <a:spcPct val="106000"/>
               </a:lnSpc>
@@ -12761,17 +13087,61 @@
                 <a:spcPts val="0"/>
               </a:spcBef>
               <a:spcAft>
-                <a:spcPts val="600"/>
-              </a:spcAft>
-            </a:pPr>
-            <a:r>
-              <a:rPr sz="1200" b="0">
-                <a:solidFill>
-                  <a:srgbClr val="5B6675"/>
-                </a:solidFill>
-                <a:latin typeface="Segoe UI"/>
-              </a:rPr>
-              <a:t>Chosen to span weak → strong spatial dependence.</a:t>
+                <a:spcPts val="1200"/>
+              </a:spcAft>
+            </a:pPr>
+            <a:r>
+              <a:rPr sz="1900" b="1">
+                <a:solidFill>
+                  <a:srgbClr val="0E2A52"/>
+                </a:solidFill>
+                <a:latin typeface="Georgia"/>
+              </a:rPr>
+              <a:t>Mean-dominance bound</a:t>
+            </a:r>
+          </a:p>
+          <a:p>
+            <a:pPr algn="l">
+              <a:lnSpc>
+                <a:spcPct val="106000"/>
+              </a:lnSpc>
+              <a:spcBef>
+                <a:spcPts val="0"/>
+              </a:spcBef>
+              <a:spcAft>
+                <a:spcPts val="1200"/>
+              </a:spcAft>
+            </a:pPr>
+            <a:r>
+              <a:rPr sz="1600" b="0">
+                <a:solidFill>
+                  <a:srgbClr val="16202E"/>
+                </a:solidFill>
+                <a:latin typeface="Segoe UI"/>
+              </a:rPr>
+              <a:t>Carbon intensity is driven overwhelmingly by the time-of-day mean (solar, demand): shared, predictable, and large.</a:t>
+            </a:r>
+          </a:p>
+          <a:p>
+            <a:pPr algn="l">
+              <a:lnSpc>
+                <a:spcPct val="106000"/>
+              </a:lnSpc>
+              <a:spcBef>
+                <a:spcPts val="0"/>
+              </a:spcBef>
+              <a:spcAft>
+                <a:spcPts val="1200"/>
+              </a:spcAft>
+            </a:pPr>
+            <a:r>
+              <a:rPr sz="1600" b="0">
+                <a:solidFill>
+                  <a:srgbClr val="16202E"/>
+                </a:solidFill>
+                <a:latin typeface="Segoe UI"/>
+              </a:rPr>
+              <a:t>The cross-region covariance is a second-order wrinkle on a first-order wave, so it cannot move the optimal schedule. CVaR's translation invariance makes the dependence model second-order to the mean.</a:t>
             </a:r>
           </a:p>
         </p:txBody>
@@ -13019,7 +13389,7 @@
                 </a:solidFill>
                 <a:latin typeface="Georgia"/>
               </a:rPr>
-              <a:t>RQ1: the spatial premise is valid</a:t>
+              <a:t>RQ3: why robustify at all</a:t>
             </a:r>
           </a:p>
         </p:txBody>
@@ -13108,7 +13478,7 @@
                 </a:solidFill>
                 <a:latin typeface="Segoe UI"/>
               </a:rPr>
-              <a:t>Spatial correlation &amp; carbon-aware DRO scheduling</a:t>
+              <a:t>The Price of Sophistication: carbon-aware data-center scheduling</a:t>
             </a:r>
           </a:p>
         </p:txBody>
@@ -13158,9 +13528,219 @@
           </a:p>
         </p:txBody>
       </p:sp>
+      <p:sp>
+        <p:nvSpPr>
+          <p:cNvPr id="10" name="TextBox 9"/>
+          <p:cNvSpPr txBox="1"/>
+          <p:nvPr/>
+        </p:nvSpPr>
+        <p:spPr>
+          <a:xfrm>
+            <a:off x="640080" y="1371600"/>
+            <a:ext cx="5577840" cy="4206240"/>
+          </a:xfrm>
+          <a:prstGeom prst="rect">
+            <a:avLst/>
+          </a:prstGeom>
+          <a:noFill/>
+        </p:spPr>
+        <p:txBody>
+          <a:bodyPr wrap="square" lIns="0" rIns="0" tIns="0" bIns="0">
+            <a:spAutoFit/>
+          </a:bodyPr>
+          <a:lstStyle/>
+          <a:p>
+            <a:pPr>
+              <a:lnSpc>
+                <a:spcPct val="112000"/>
+              </a:lnSpc>
+              <a:spcAft>
+                <a:spcPts val="1600"/>
+              </a:spcAft>
+            </a:pPr>
+            <a:r>
+              <a:rPr sz="2100" b="1">
+                <a:solidFill>
+                  <a:srgbClr val="0E2A52"/>
+                </a:solidFill>
+                <a:latin typeface="Segoe UI"/>
+              </a:rPr>
+              <a:t>Hedging day-ahead forecast error</a:t>
+            </a:r>
+          </a:p>
+          <a:p>
+            <a:pPr>
+              <a:lnSpc>
+                <a:spcPct val="112000"/>
+              </a:lnSpc>
+              <a:spcBef>
+                <a:spcPts val="0"/>
+              </a:spcBef>
+              <a:spcAft>
+                <a:spcPts val="1400"/>
+              </a:spcAft>
+            </a:pPr>
+            <a:r>
+              <a:rPr sz="1400" b="1">
+                <a:solidFill>
+                  <a:srgbClr val="E69F00"/>
+                </a:solidFill>
+                <a:latin typeface="Segoe UI"/>
+              </a:rPr>
+              <a:t>●  </a:t>
+            </a:r>
+            <a:r>
+              <a:rPr sz="1800" b="0">
+                <a:solidFill>
+                  <a:srgbClr val="16202E"/>
+                </a:solidFill>
+                <a:latin typeface="Segoe UI"/>
+              </a:rPr>
+              <a:t>Scheduling against tomorrow's carbon means scheduling under forecast error.</a:t>
+            </a:r>
+          </a:p>
+          <a:p>
+            <a:pPr>
+              <a:lnSpc>
+                <a:spcPct val="112000"/>
+              </a:lnSpc>
+              <a:spcBef>
+                <a:spcPts val="0"/>
+              </a:spcBef>
+              <a:spcAft>
+                <a:spcPts val="1400"/>
+              </a:spcAft>
+            </a:pPr>
+            <a:r>
+              <a:rPr sz="1400" b="1">
+                <a:solidFill>
+                  <a:srgbClr val="E69F00"/>
+                </a:solidFill>
+                <a:latin typeface="Segoe UI"/>
+              </a:rPr>
+              <a:t>●  </a:t>
+            </a:r>
+            <a:r>
+              <a:rPr sz="1800" b="0">
+                <a:solidFill>
+                  <a:srgbClr val="16202E"/>
+                </a:solidFill>
+                <a:latin typeface="Segoe UI"/>
+              </a:rPr>
+              <a:t>We hedge that error with a data-driven Wasserstein DRO: a daily, rolling ambiguity set around the empirical distribution.</a:t>
+            </a:r>
+          </a:p>
+          <a:p>
+            <a:pPr>
+              <a:lnSpc>
+                <a:spcPct val="112000"/>
+              </a:lnSpc>
+              <a:spcBef>
+                <a:spcPts val="0"/>
+              </a:spcBef>
+              <a:spcAft>
+                <a:spcPts val="1400"/>
+              </a:spcAft>
+            </a:pPr>
+            <a:r>
+              <a:rPr sz="1400" b="1">
+                <a:solidFill>
+                  <a:srgbClr val="E69F00"/>
+                </a:solidFill>
+                <a:latin typeface="Segoe UI"/>
+              </a:rPr>
+              <a:t>●  </a:t>
+            </a:r>
+            <a:r>
+              <a:rPr sz="1800" b="0">
+                <a:solidFill>
+                  <a:srgbClr val="16202E"/>
+                </a:solidFill>
+                <a:latin typeface="Segoe UI"/>
+              </a:rPr>
+              <a:t>It reduces to a second-order cone program, solved exactly and fast.</a:t>
+            </a:r>
+          </a:p>
+          <a:p>
+            <a:pPr>
+              <a:lnSpc>
+                <a:spcPct val="112000"/>
+              </a:lnSpc>
+              <a:spcBef>
+                <a:spcPts val="0"/>
+              </a:spcBef>
+              <a:spcAft>
+                <a:spcPts val="1400"/>
+              </a:spcAft>
+            </a:pPr>
+            <a:r>
+              <a:rPr sz="1400" b="1">
+                <a:solidFill>
+                  <a:srgbClr val="E69F00"/>
+                </a:solidFill>
+                <a:latin typeface="Segoe UI"/>
+              </a:rPr>
+              <a:t>●  </a:t>
+            </a:r>
+            <a:r>
+              <a:rPr sz="1800" b="1">
+                <a:solidFill>
+                  <a:srgbClr val="0E2A52"/>
+                </a:solidFill>
+                <a:latin typeface="Segoe UI"/>
+              </a:rPr>
+              <a:t>This is a price-of-robustness question: it buys tail reduction at a mean premium.</a:t>
+            </a:r>
+          </a:p>
+        </p:txBody>
+      </p:sp>
+      <p:sp>
+        <p:nvSpPr>
+          <p:cNvPr id="11" name="Rectangle 10"/>
+          <p:cNvSpPr/>
+          <p:nvPr/>
+        </p:nvSpPr>
+        <p:spPr>
+          <a:xfrm>
+            <a:off x="6400800" y="2103120"/>
+            <a:ext cx="5212080" cy="1371600"/>
+          </a:xfrm>
+          <a:prstGeom prst="rect">
+            <a:avLst/>
+          </a:prstGeom>
+          <a:solidFill>
+            <a:srgbClr val="F3F6FB"/>
+          </a:solidFill>
+          <a:ln>
+            <a:noFill/>
+          </a:ln>
+          <a:effectLst/>
+        </p:spPr>
+        <p:style>
+          <a:lnRef idx="1">
+            <a:schemeClr val="accent1"/>
+          </a:lnRef>
+          <a:fillRef idx="3">
+            <a:schemeClr val="accent1"/>
+          </a:fillRef>
+          <a:effectRef idx="2">
+            <a:schemeClr val="accent1"/>
+          </a:effectRef>
+          <a:fontRef idx="minor">
+            <a:schemeClr val="lt1"/>
+          </a:fontRef>
+        </p:style>
+        <p:txBody>
+          <a:bodyPr rtlCol="0" anchor="ctr"/>
+          <a:lstStyle/>
+          <a:p>
+            <a:pPr algn="ctr"/>
+          </a:p>
+        </p:txBody>
+      </p:sp>
       <p:pic>
         <p:nvPicPr>
-          <p:cNvPr id="10" name="Picture 9" descr="ci_corr_heatmap_us_west.png"/>
+          <p:cNvPr id="12" name="Picture 11" descr="_eq_dro.png"/>
           <p:cNvPicPr>
             <a:picLocks noChangeAspect="1"/>
           </p:cNvPicPr>
@@ -13174,8 +13754,8 @@
         </p:blipFill>
         <p:spPr>
           <a:xfrm>
-            <a:off x="640080" y="1417320"/>
-            <a:ext cx="6766560" cy="3111295"/>
+            <a:off x="6537959" y="2423160"/>
+            <a:ext cx="4937760" cy="622866"/>
           </a:xfrm>
           <a:prstGeom prst="rect">
             <a:avLst/>
@@ -13184,14 +13764,14 @@
       </p:pic>
       <p:sp>
         <p:nvSpPr>
-          <p:cNvPr id="11" name="TextBox 10"/>
+          <p:cNvPr id="13" name="TextBox 12"/>
           <p:cNvSpPr txBox="1"/>
           <p:nvPr/>
         </p:nvSpPr>
         <p:spPr>
           <a:xfrm>
-            <a:off x="7680960" y="1554480"/>
-            <a:ext cx="3931920" cy="4206240"/>
+            <a:off x="6400800" y="3749039"/>
+            <a:ext cx="5212080" cy="1828800"/>
           </a:xfrm>
           <a:prstGeom prst="rect">
             <a:avLst/>
@@ -13199,120 +13779,30 @@
           <a:noFill/>
         </p:spPr>
         <p:txBody>
-          <a:bodyPr wrap="square" lIns="0" rIns="0" tIns="0" bIns="0">
+          <a:bodyPr wrap="square" anchor="t" lIns="0" rIns="0" tIns="0" bIns="0">
             <a:spAutoFit/>
           </a:bodyPr>
           <a:lstStyle/>
           <a:p>
-            <a:pPr>
-              <a:lnSpc>
-                <a:spcPct val="112000"/>
-              </a:lnSpc>
-              <a:spcAft>
-                <a:spcPts val="1800"/>
-              </a:spcAft>
-            </a:pPr>
-            <a:r>
-              <a:rPr sz="2100" b="1">
-                <a:solidFill>
-                  <a:srgbClr val="0E2A52"/>
-                </a:solidFill>
-                <a:latin typeface="Segoe UI"/>
-              </a:rPr>
-              <a:t>Correlation is real</a:t>
-            </a:r>
-          </a:p>
-          <a:p>
-            <a:pPr>
-              <a:lnSpc>
-                <a:spcPct val="112000"/>
-              </a:lnSpc>
-              <a:spcBef>
-                <a:spcPts val="0"/>
-              </a:spcBef>
-              <a:spcAft>
-                <a:spcPts val="1600"/>
-              </a:spcAft>
-            </a:pPr>
-            <a:r>
-              <a:rPr sz="1400" b="1">
-                <a:solidFill>
-                  <a:srgbClr val="E69F00"/>
-                </a:solidFill>
-                <a:latin typeface="Segoe UI"/>
-              </a:rPr>
-              <a:t>●  </a:t>
-            </a:r>
-            <a:r>
-              <a:rPr sz="1800" b="1">
-                <a:solidFill>
-                  <a:srgbClr val="4A7C59"/>
-                </a:solidFill>
-                <a:latin typeface="Segoe UI"/>
-              </a:rPr>
-              <a:t>Cross-region correlation is real and strong, up to 0.78 on the US West.</a:t>
-            </a:r>
-          </a:p>
-          <a:p>
-            <a:pPr>
-              <a:lnSpc>
-                <a:spcPct val="112000"/>
-              </a:lnSpc>
-              <a:spcBef>
-                <a:spcPts val="0"/>
-              </a:spcBef>
-              <a:spcAft>
-                <a:spcPts val="1600"/>
-              </a:spcAft>
-            </a:pPr>
-            <a:r>
-              <a:rPr sz="1400" b="1">
-                <a:solidFill>
-                  <a:srgbClr val="E69F00"/>
-                </a:solidFill>
-                <a:latin typeface="Segoe UI"/>
-              </a:rPr>
-              <a:t>●  </a:t>
-            </a:r>
-            <a:r>
-              <a:rPr sz="1800" b="0">
-                <a:solidFill>
-                  <a:srgbClr val="16202E"/>
-                </a:solidFill>
-                <a:latin typeface="Segoe UI"/>
-              </a:rPr>
-              <a:t>It is stable across hours and seasons.</a:t>
-            </a:r>
-          </a:p>
-          <a:p>
-            <a:pPr>
-              <a:lnSpc>
-                <a:spcPct val="112000"/>
-              </a:lnSpc>
-              <a:spcBef>
-                <a:spcPts val="0"/>
-              </a:spcBef>
-              <a:spcAft>
-                <a:spcPts val="1600"/>
-              </a:spcAft>
-            </a:pPr>
-            <a:r>
-              <a:rPr sz="1400" b="1">
-                <a:solidFill>
-                  <a:srgbClr val="E69F00"/>
-                </a:solidFill>
-                <a:latin typeface="Segoe UI"/>
-              </a:rPr>
-              <a:t>●  </a:t>
-            </a:r>
-            <a:r>
-              <a:rPr sz="1800" b="0">
-                <a:solidFill>
-                  <a:srgbClr val="16202E"/>
-                </a:solidFill>
-                <a:latin typeface="Segoe UI"/>
-              </a:rPr>
-              <a:t>So the joint model is not fighting a strawman: there is genuine structure to exploit.</a:t>
+            <a:pPr algn="l">
+              <a:lnSpc>
+                <a:spcPct val="106000"/>
+              </a:lnSpc>
+              <a:spcBef>
+                <a:spcPts val="0"/>
+              </a:spcBef>
+              <a:spcAft>
+                <a:spcPts val="600"/>
+              </a:spcAft>
+            </a:pPr>
+            <a:r>
+              <a:rPr sz="1600" b="0">
+                <a:solidFill>
+                  <a:srgbClr val="5B6675"/>
+                </a:solidFill>
+                <a:latin typeface="Segoe UI"/>
+              </a:rPr>
+              <a:t>The mean term carries the saving; the cone term epsilon times the norm of L-transpose x prices the hedge. The value of the stochastic solution is near zero under nominal carbon.</a:t>
             </a:r>
           </a:p>
         </p:txBody>

--- a/deck/capstone_defense.pptx
+++ b/deck/capstone_defense.pptx
@@ -3834,7 +3834,7 @@
         <p:spPr>
           <a:xfrm>
             <a:off x="640080" y="1417320"/>
-            <a:ext cx="6949440" cy="4301587"/>
+            <a:ext cx="6949440" cy="4426739"/>
           </a:xfrm>
           <a:prstGeom prst="rect">
             <a:avLst/>
@@ -5666,7 +5666,7 @@
         <p:spPr>
           <a:xfrm>
             <a:off x="6400800" y="1463040"/>
-            <a:ext cx="5212080" cy="2396538"/>
+            <a:ext cx="5212080" cy="2455099"/>
           </a:xfrm>
           <a:prstGeom prst="rect">
             <a:avLst/>
@@ -6230,7 +6230,7 @@
                 </a:solidFill>
                 <a:latin typeface="Segoe UI"/>
               </a:rPr>
-              <a:t>194 unit tests in CI; bootstrap confidence intervals on every gap.</a:t>
+              <a:t>199 unit tests (186 in CI); bootstrap confidence intervals on every gap.</a:t>
             </a:r>
           </a:p>
           <a:p>
@@ -6283,7 +6283,7 @@
         <p:spPr>
           <a:xfrm>
             <a:off x="6400800" y="1554480"/>
-            <a:ext cx="5212080" cy="1760706"/>
+            <a:ext cx="5212080" cy="1814503"/>
           </a:xfrm>
           <a:prstGeom prst="rect">
             <a:avLst/>
@@ -7381,7 +7381,7 @@
                 </a:solidFill>
                 <a:latin typeface="Segoe UI"/>
               </a:rPr>
-              <a:t>A reproducible, pre-registered pipeline under 194 unit tests.</a:t>
+              <a:t>A reproducible, pre-registered pipeline under 199 unit tests.</a:t>
             </a:r>
           </a:p>
         </p:txBody>
@@ -8347,7 +8347,7 @@
         <p:spPr>
           <a:xfrm>
             <a:off x="6400800" y="1463040"/>
-            <a:ext cx="5212080" cy="1222291"/>
+            <a:ext cx="5212080" cy="966780"/>
           </a:xfrm>
           <a:prstGeom prst="rect">
             <a:avLst/>
@@ -8798,7 +8798,7 @@
         <p:spPr>
           <a:xfrm>
             <a:off x="640080" y="1417320"/>
-            <a:ext cx="6583680" cy="3310008"/>
+            <a:ext cx="6583680" cy="3616573"/>
           </a:xfrm>
           <a:prstGeom prst="rect">
             <a:avLst/>
@@ -9505,7 +9505,7 @@
         <p:spPr>
           <a:xfrm>
             <a:off x="6400800" y="1554480"/>
-            <a:ext cx="5212080" cy="3086662"/>
+            <a:ext cx="5212080" cy="3054710"/>
           </a:xfrm>
           <a:prstGeom prst="rect">
             <a:avLst/>
@@ -10728,7 +10728,7 @@
         <p:spPr>
           <a:xfrm>
             <a:off x="6400800" y="1463040"/>
-            <a:ext cx="5212080" cy="1528122"/>
+            <a:ext cx="5212080" cy="1531000"/>
           </a:xfrm>
           <a:prstGeom prst="rect">
             <a:avLst/>
@@ -11179,7 +11179,7 @@
         <p:spPr>
           <a:xfrm>
             <a:off x="640080" y="1417320"/>
-            <a:ext cx="6949440" cy="4391183"/>
+            <a:ext cx="6949440" cy="4478809"/>
           </a:xfrm>
           <a:prstGeom prst="rect">
             <a:avLst/>
@@ -12323,7 +12323,7 @@
         <p:spPr>
           <a:xfrm>
             <a:off x="640080" y="1417320"/>
-            <a:ext cx="6766560" cy="1963683"/>
+            <a:ext cx="6766560" cy="2342780"/>
           </a:xfrm>
           <a:prstGeom prst="rect">
             <a:avLst/>
@@ -12915,7 +12915,7 @@
                 </a:solidFill>
                 <a:latin typeface="Segoe UI"/>
               </a:rPr>
-              <a:t>Mean-ablation: flatten the mean field and the covariance suddenly pays, up to +1.46%.</a:t>
+              <a:t>The mean-leveling test: flatten the mean field and the covariance suddenly pays, up to +1.46%.</a:t>
             </a:r>
           </a:p>
           <a:p>
@@ -12946,7 +12946,7 @@
                 </a:solidFill>
                 <a:latin typeface="Segoe UI"/>
               </a:rPr>
-              <a:t>So the spatial signal is real, but masked by the within-day mean carbon field.</a:t>
+              <a:t>So the cross-region signal is real, but masked by the within-day mean carbon field.</a:t>
             </a:r>
           </a:p>
           <a:p>

--- a/deck/capstone_defense.pptx
+++ b/deck/capstone_defense.pptx
@@ -3237,13 +3237,13 @@
               </a:spcAft>
             </a:pPr>
             <a:r>
-              <a:rPr sz="2500" b="1">
+              <a:rPr sz="2200" b="1">
                 <a:solidFill>
                   <a:srgbClr val="FFFFFF"/>
                 </a:solidFill>
                 <a:latin typeface="Georgia"/>
               </a:rPr>
-              <a:t>When Do Spatial and Robust Models Pay in</a:t>
+              <a:t>A Pre-Registered Falsification Test for When Spatial</a:t>
             </a:r>
           </a:p>
           <a:p>
@@ -3259,13 +3259,13 @@
               </a:spcAft>
             </a:pPr>
             <a:r>
-              <a:rPr sz="2500" b="1">
+              <a:rPr sz="2200" b="1">
                 <a:solidFill>
                   <a:srgbClr val="FFFFFF"/>
                 </a:solidFill>
                 <a:latin typeface="Georgia"/>
               </a:rPr>
-              <a:t>Carbon-Aware Data-Center Scheduling?</a:t>
+              <a:t>and Robust Modelling Pay in Carbon-Aware Scheduling</a:t>
             </a:r>
           </a:p>
         </p:txBody>
@@ -3834,7 +3834,7 @@
         <p:spPr>
           <a:xfrm>
             <a:off x="640080" y="1417320"/>
-            <a:ext cx="6949440" cy="4426739"/>
+            <a:ext cx="6949440" cy="4379803"/>
           </a:xfrm>
           <a:prstGeom prst="rect">
             <a:avLst/>
@@ -5666,7 +5666,7 @@
         <p:spPr>
           <a:xfrm>
             <a:off x="6400800" y="1463040"/>
-            <a:ext cx="5212080" cy="2455099"/>
+            <a:ext cx="5212080" cy="2621094"/>
           </a:xfrm>
           <a:prstGeom prst="rect">
             <a:avLst/>
@@ -6230,7 +6230,7 @@
                 </a:solidFill>
                 <a:latin typeface="Segoe UI"/>
               </a:rPr>
-              <a:t>199 unit tests (186 in CI); bootstrap confidence intervals on every gap.</a:t>
+              <a:t>202 unit tests (189 in CI); bootstrap confidence intervals on every gap.</a:t>
             </a:r>
           </a:p>
           <a:p>
@@ -6283,7 +6283,7 @@
         <p:spPr>
           <a:xfrm>
             <a:off x="6400800" y="1554480"/>
-            <a:ext cx="5212080" cy="1814503"/>
+            <a:ext cx="5212080" cy="2050884"/>
           </a:xfrm>
           <a:prstGeom prst="rect">
             <a:avLst/>
@@ -7381,7 +7381,7 @@
                 </a:solidFill>
                 <a:latin typeface="Segoe UI"/>
               </a:rPr>
-              <a:t>A reproducible, pre-registered pipeline under 199 unit tests.</a:t>
+              <a:t>A reproducible, pre-registered pipeline under 202 unit tests.</a:t>
             </a:r>
           </a:p>
         </p:txBody>
@@ -8798,7 +8798,7 @@
         <p:spPr>
           <a:xfrm>
             <a:off x="640080" y="1417320"/>
-            <a:ext cx="6583680" cy="3616573"/>
+            <a:ext cx="5770047" cy="4480560"/>
           </a:xfrm>
           <a:prstGeom prst="rect">
             <a:avLst/>
@@ -9505,7 +9505,7 @@
         <p:spPr>
           <a:xfrm>
             <a:off x="6400800" y="1554480"/>
-            <a:ext cx="5212080" cy="3054710"/>
+            <a:ext cx="5212080" cy="3253684"/>
           </a:xfrm>
           <a:prstGeom prst="rect">
             <a:avLst/>
@@ -10728,7 +10728,7 @@
         <p:spPr>
           <a:xfrm>
             <a:off x="6400800" y="1463040"/>
-            <a:ext cx="5212080" cy="1531000"/>
+            <a:ext cx="5212080" cy="1942268"/>
           </a:xfrm>
           <a:prstGeom prst="rect">
             <a:avLst/>
@@ -11179,7 +11179,7 @@
         <p:spPr>
           <a:xfrm>
             <a:off x="640080" y="1417320"/>
-            <a:ext cx="6949440" cy="4478809"/>
+            <a:ext cx="6949440" cy="4426739"/>
           </a:xfrm>
           <a:prstGeom prst="rect">
             <a:avLst/>
@@ -11751,7 +11751,7 @@
         <p:spPr>
           <a:xfrm>
             <a:off x="640080" y="1417320"/>
-            <a:ext cx="4503018" cy="4480560"/>
+            <a:ext cx="6949440" cy="4452081"/>
           </a:xfrm>
           <a:prstGeom prst="rect">
             <a:avLst/>
@@ -12323,7 +12323,7 @@
         <p:spPr>
           <a:xfrm>
             <a:off x="640080" y="1417320"/>
-            <a:ext cx="6766560" cy="2342780"/>
+            <a:ext cx="6766560" cy="2523068"/>
           </a:xfrm>
           <a:prstGeom prst="rect">
             <a:avLst/>

--- a/deck/capstone_defense.pptx
+++ b/deck/capstone_defense.pptx
@@ -3243,7 +3243,7 @@
                 </a:solidFill>
                 <a:latin typeface="Georgia"/>
               </a:rPr>
-              <a:t>A Pre-Registered Falsification Test for When Spatial</a:t>
+              <a:t>A Pre-Committed Falsification Test for When Spatial</a:t>
             </a:r>
           </a:p>
           <a:p>
@@ -6137,7 +6137,7 @@
                 </a:solidFill>
                 <a:latin typeface="Segoe UI"/>
               </a:rPr>
-              <a:t>A pre-registered battery</a:t>
+              <a:t>A pre-committed battery</a:t>
             </a:r>
           </a:p>
           <a:p>
@@ -6261,7 +6261,7 @@
                 </a:solidFill>
                 <a:latin typeface="Segoe UI"/>
               </a:rPr>
-              <a:t>Pre-registered, version-controlled, with archived summary tables for every reported number.</a:t>
+              <a:t>Pre-committed, version-controlled, with archived summary tables for every reported number.</a:t>
             </a:r>
           </a:p>
         </p:txBody>
@@ -7381,7 +7381,7 @@
                 </a:solidFill>
                 <a:latin typeface="Segoe UI"/>
               </a:rPr>
-              <a:t>A reproducible, pre-registered pipeline under 202 unit tests.</a:t>
+              <a:t>A reproducible, pre-committed pipeline under 202 unit tests.</a:t>
             </a:r>
           </a:p>
         </p:txBody>
@@ -8325,7 +8325,7 @@
                 </a:solidFill>
                 <a:latin typeface="Segoe UI"/>
               </a:rPr>
-              <a:t>Pre-registered: if spatial structure matters, the joint schedule must win. It does not.</a:t>
+              <a:t>Pre-committed: if spatial structure matters, the joint schedule must win. It does not.</a:t>
             </a:r>
           </a:p>
         </p:txBody>

--- a/deck/capstone_defense.pptx
+++ b/deck/capstone_defense.pptx
@@ -3834,7 +3834,7 @@
         <p:spPr>
           <a:xfrm>
             <a:off x="640080" y="1417320"/>
-            <a:ext cx="6949440" cy="4379803"/>
+            <a:ext cx="6949440" cy="4301587"/>
           </a:xfrm>
           <a:prstGeom prst="rect">
             <a:avLst/>
@@ -3940,7 +3940,7 @@
                 </a:solidFill>
                 <a:latin typeface="Segoe UI"/>
               </a:rPr>
-              <a:t>Real grids, tested across 17 zones, peak at only M near 1.4.</a:t>
+              <a:t>Real grids, tested across 17 zones, lie at joint-grid M = 1.29–1.89.</a:t>
             </a:r>
           </a:p>
           <a:p>
@@ -5666,7 +5666,7 @@
         <p:spPr>
           <a:xfrm>
             <a:off x="6400800" y="1463040"/>
-            <a:ext cx="5212080" cy="2621094"/>
+            <a:ext cx="5212080" cy="2396538"/>
           </a:xfrm>
           <a:prstGeom prst="rect">
             <a:avLst/>
@@ -6230,7 +6230,7 @@
                 </a:solidFill>
                 <a:latin typeface="Segoe UI"/>
               </a:rPr>
-              <a:t>202 unit tests (189 in CI); bootstrap confidence intervals on every gap.</a:t>
+              <a:t>202 tests (189 in public CI); bootstrap confidence intervals on every gap.</a:t>
             </a:r>
           </a:p>
           <a:p>
@@ -7350,7 +7350,7 @@
                 </a:solidFill>
                 <a:latin typeface="Segoe UI"/>
               </a:rPr>
-              <a:t>A price-of-robustness decision rule with a tested, data-grounded bound (M near 1.4 below M* near 3).</a:t>
+              <a:t>A price-of-robustness decision rule with a tested, data-grounded bound (joint-grid M = 1.29–1.89, below M* near 3).</a:t>
             </a:r>
           </a:p>
           <a:p>
@@ -7381,7 +7381,7 @@
                 </a:solidFill>
                 <a:latin typeface="Segoe UI"/>
               </a:rPr>
-              <a:t>A reproducible, pre-committed pipeline under 202 unit tests.</a:t>
+              <a:t>A reproducible, pre-committed pipeline under 202 tests.</a:t>
             </a:r>
           </a:p>
         </p:txBody>
@@ -8347,7 +8347,7 @@
         <p:spPr>
           <a:xfrm>
             <a:off x="6400800" y="1463040"/>
-            <a:ext cx="5212080" cy="966780"/>
+            <a:ext cx="5212080" cy="1222291"/>
           </a:xfrm>
           <a:prstGeom prst="rect">
             <a:avLst/>
@@ -8798,7 +8798,7 @@
         <p:spPr>
           <a:xfrm>
             <a:off x="640080" y="1417320"/>
-            <a:ext cx="5770047" cy="4480560"/>
+            <a:ext cx="6583680" cy="3310008"/>
           </a:xfrm>
           <a:prstGeom prst="rect">
             <a:avLst/>
@@ -9505,7 +9505,7 @@
         <p:spPr>
           <a:xfrm>
             <a:off x="6400800" y="1554480"/>
-            <a:ext cx="5212080" cy="3253684"/>
+            <a:ext cx="5212080" cy="3084700"/>
           </a:xfrm>
           <a:prstGeom prst="rect">
             <a:avLst/>
@@ -10728,7 +10728,7 @@
         <p:spPr>
           <a:xfrm>
             <a:off x="6400800" y="1463040"/>
-            <a:ext cx="5212080" cy="1942268"/>
+            <a:ext cx="5212080" cy="1941780"/>
           </a:xfrm>
           <a:prstGeom prst="rect">
             <a:avLst/>
@@ -11179,7 +11179,7 @@
         <p:spPr>
           <a:xfrm>
             <a:off x="640080" y="1417320"/>
-            <a:ext cx="6949440" cy="4426739"/>
+            <a:ext cx="6949440" cy="4391183"/>
           </a:xfrm>
           <a:prstGeom prst="rect">
             <a:avLst/>
@@ -11751,7 +11751,7 @@
         <p:spPr>
           <a:xfrm>
             <a:off x="640080" y="1417320"/>
-            <a:ext cx="6949440" cy="4452081"/>
+            <a:ext cx="6949440" cy="3163879"/>
           </a:xfrm>
           <a:prstGeom prst="rect">
             <a:avLst/>
@@ -12323,7 +12323,7 @@
         <p:spPr>
           <a:xfrm>
             <a:off x="640080" y="1417320"/>
-            <a:ext cx="6766560" cy="2523068"/>
+            <a:ext cx="6766560" cy="1963683"/>
           </a:xfrm>
           <a:prstGeom prst="rect">
             <a:avLst/>
@@ -13755,7 +13755,7 @@
         <p:spPr>
           <a:xfrm>
             <a:off x="6537959" y="2423160"/>
-            <a:ext cx="4937760" cy="622866"/>
+            <a:ext cx="4937760" cy="592713"/>
           </a:xfrm>
           <a:prstGeom prst="rect">
             <a:avLst/>
